--- a/lightning-lesson-v3/How_to_Tell_If_Your_Career_Is_Stalling_Lightning_Lesson_v3.2_FINAL.pptx
+++ b/lightning-lesson-v3/How_to_Tell_If_Your_Career_Is_Stalling_Lightning_Lesson_v3.2_FINAL.pptx
@@ -19,6 +19,7 @@
     <p:sldId id="267" r:id="rId19"/>
     <p:sldId id="268" r:id="rId20"/>
     <p:sldId id="269" r:id="rId21"/>
+    <p:sldId id="270" r:id="rId22"/>
   </p:sldIdLst>
   <p:sldSz cx="12191695" cy="6858000" type="screen4x3"/>
   <p:notesSz cx="6858000" cy="9144000"/>
@@ -631,7 +632,7 @@
               <a:rPr sz="1100">
                 <a:latin typeface="Arial"/>
               </a:rPr>
-              <a:t>TIMING: 28:00-31:00</a:t>
+              <a:t>TIMING: 23:00-28:00</a:t>
             </a:r>
           </a:p>
           <a:p>
@@ -639,7 +640,7 @@
               <a:rPr sz="1100">
                 <a:latin typeface="Arial"/>
               </a:rPr>
-              <a:t>WHAT TO SAY: Do not let the exercise become a verdict. Familiarity is a signal, not a diagnosis. Then deliver the one AI sentence on the slide, once, without expanding into a tools discussion.</a:t>
+              <a:t>WHAT TO SAY: Five quiet minutes. Open the Career Stall Check and write against your own last 90 days. No one will be called on.</a:t>
             </a:r>
           </a:p>
           <a:p>
@@ -647,7 +648,7 @@
               <a:rPr sz="1100">
                 <a:latin typeface="Arial"/>
               </a:rPr>
-              <a:t>WHAT NOT TO SAY: No tool names. No prompting advice. No job-loss predictions. No industry forecasts. This is a single sentence, not a new section.</a:t>
+              <a:t>WHAT NOT TO SAY: Do not say this is the full assessment. Do not offer to review anyone's answers live.</a:t>
             </a:r>
           </a:p>
           <a:p>
@@ -655,7 +656,7 @@
               <a:rPr sz="1100">
                 <a:latin typeface="Arial"/>
               </a:rPr>
-              <a:t>PARTICIPANT ACTION: None. This is a settling beat before the bridge.</a:t>
+              <a:t>PARTICIPANT ACTION: Completes the four fields on the Career Stall Check handout privately.</a:t>
             </a:r>
           </a:p>
           <a:p>
@@ -663,7 +664,7 @@
               <a:rPr sz="1100">
                 <a:latin typeface="Arial"/>
               </a:rPr>
-              <a:t>LIKELY MISUNDERSTANDING: Someone may ask what AI tool to use. Decline: "That's outside today's scope — this is about the reading, not the tools."</a:t>
+              <a:t>LIKELY MISUNDERSTANDING: Someone may ask if this produces a score or placement. It does not — redirect calmly: "That is what the full Position Read does. This is recognition."</a:t>
             </a:r>
           </a:p>
           <a:p>
@@ -671,7 +672,7 @@
               <a:rPr sz="1100">
                 <a:latin typeface="Arial"/>
               </a:rPr>
-              <a:t>TRANSITION LINE: What you did in the last 28 minutes is one piece of a larger read. Let me show you what the rest of it looks like.</a:t>
+              <a:t>TRANSITION LINE: Before we go further, one caution about what a recognition exercise is and is not.</a:t>
             </a:r>
           </a:p>
         </p:txBody>
@@ -744,7 +745,7 @@
               <a:rPr sz="1100">
                 <a:latin typeface="Arial"/>
               </a:rPr>
-              <a:t>TIMING: 31:00-32:30</a:t>
+              <a:t>TIMING: 28:00-31:00</a:t>
             </a:r>
           </a:p>
           <a:p>
@@ -752,7 +753,7 @@
               <a:rPr sz="1100">
                 <a:latin typeface="Arial"/>
               </a:rPr>
-              <a:t>WHAT TO SAY: This is factual, not a hard sell. Today gave you recognition. The workshop gives you the structured, evidence-backed read. Name Density and Optionality briefly here for the first time — this is the one place they belong.</a:t>
+              <a:t>WHAT TO SAY: Do not let the exercise become a verdict. Familiarity is a signal, not a diagnosis. Then deliver the one AI sentence on the slide, once, without expanding into a tools discussion.</a:t>
             </a:r>
           </a:p>
           <a:p>
@@ -760,7 +761,7 @@
               <a:rPr sz="1100">
                 <a:latin typeface="Arial"/>
               </a:rPr>
-              <a:t>WHAT NOT TO SAY: Do not add scarcity. Do not overexplain every deliverable — read the list once and move.</a:t>
+              <a:t>WHAT NOT TO SAY: No tool names. No prompting advice. No job-loss predictions. No industry forecasts. This is a single sentence, not a new section.</a:t>
             </a:r>
           </a:p>
           <a:p>
@@ -768,7 +769,7 @@
               <a:rPr sz="1100">
                 <a:latin typeface="Arial"/>
               </a:rPr>
-              <a:t>PARTICIPANT ACTION: Listening.</a:t>
+              <a:t>PARTICIPANT ACTION: None. This is a settling beat before the bridge.</a:t>
             </a:r>
           </a:p>
           <a:p>
@@ -776,7 +777,7 @@
               <a:rPr sz="1100">
                 <a:latin typeface="Arial"/>
               </a:rPr>
-              <a:t>LIKELY MISUNDERSTANDING: Someone may think today's exercise already produced a placement. Restate plainly: today was recognition; placement requires the full instrument.</a:t>
+              <a:t>LIKELY MISUNDERSTANDING: Someone may ask what AI tool to use. Decline: "That's outside today's scope — this is about the reading, not the tools."</a:t>
             </a:r>
           </a:p>
           <a:p>
@@ -784,7 +785,7 @@
               <a:rPr sz="1100">
                 <a:latin typeface="Arial"/>
               </a:rPr>
-              <a:t>TRANSITION LINE: Here is exactly what that workshop is, and how to join it.</a:t>
+              <a:t>TRANSITION LINE: What you did in the last 28 minutes is one piece of a larger read. Let me show you what the rest of it looks like.</a:t>
             </a:r>
           </a:p>
         </p:txBody>
@@ -857,7 +858,7 @@
               <a:rPr sz="1100">
                 <a:latin typeface="Arial"/>
               </a:rPr>
-              <a:t>TIMING: 32:30-45:00 — this slide stays on screen for both the workshop introduction (32:30-34:00) and the full Q&amp;A block (34:00-45:00). Do not advance to a separate Q&amp;A slide.</a:t>
+              <a:t>TIMING: 31:00-32:30</a:t>
             </a:r>
           </a:p>
           <a:p>
@@ -865,7 +866,7 @@
               <a:rPr sz="1100">
                 <a:latin typeface="Arial"/>
               </a:rPr>
-              <a:t/>
+              <a:t>WHAT TO SAY: This is factual, not a hard sell. Today gave you recognition. The workshop gives you the structured, evidence-backed read. Name Density and Optionality briefly here for the first time — this is the one place they belong.</a:t>
             </a:r>
           </a:p>
           <a:p>
@@ -873,7 +874,7 @@
               <a:rPr sz="1100">
                 <a:latin typeface="Arial"/>
               </a:rPr>
-              <a:t>WORKSHOP INTRODUCTION (32:30-34:00)</a:t>
+              <a:t>WHAT NOT TO SAY: Do not add scarcity. Do not overexplain every deliverable — read the list once and move.</a:t>
             </a:r>
           </a:p>
           <a:p>
@@ -881,7 +882,7 @@
               <a:rPr sz="1100">
                 <a:latin typeface="Arial"/>
               </a:rPr>
-              <a:t>WHAT TO SAY: If today helped you recognize a pattern, the full Position Read is where that pattern gets examined with evidence. It is a two-hour live workshop, including Q&amp;A. Point to the registration CTA once, clearly.</a:t>
+              <a:t>PARTICIPANT ACTION: Listening.</a:t>
             </a:r>
           </a:p>
           <a:p>
@@ -889,7 +890,7 @@
               <a:rPr sz="1100">
                 <a:latin typeface="Arial"/>
               </a:rPr>
-              <a:t>WHAT NOT TO SAY: Do not run a hard close. Do not imply the free lesson was incomplete on purpose — it was complete for recognition.</a:t>
+              <a:t>LIKELY MISUNDERSTANDING: Someone may think today's exercise already produced a placement. Restate plainly: today was recognition; placement requires the full instrument.</a:t>
             </a:r>
           </a:p>
           <a:p>
@@ -897,95 +898,7 @@
               <a:rPr sz="1100">
                 <a:latin typeface="Arial"/>
               </a:rPr>
-              <a:t>LIKELY MISUNDERSTANDING: Someone may confuse the $249 launch price with a temporary discount. It is the public launch price for the first two paid deliveries, not a founding discount — correct this if it comes up.</a:t>
-            </a:r>
-          </a:p>
-          <a:p>
-            <a:r>
-              <a:rPr sz="1100">
-                <a:latin typeface="Arial"/>
-              </a:rPr>
-              <a:t>ACTION BEFORE DELIVERY: Replace the URL and QR placeholders with the confirmed Maven registration link and the confirmed Substack link before this deck goes live.</a:t>
-            </a:r>
-          </a:p>
-          <a:p>
-            <a:r>
-              <a:rPr sz="1100">
-                <a:latin typeface="Arial"/>
-              </a:rPr>
-              <a:t/>
-            </a:r>
-          </a:p>
-          <a:p>
-            <a:r>
-              <a:rPr sz="1100">
-                <a:latin typeface="Arial"/>
-              </a:rPr>
-              <a:t>Q&amp;A (34:00-45:00) — STAY ON THIS SLIDE</a:t>
-            </a:r>
-          </a:p>
-          <a:p>
-            <a:r>
-              <a:rPr sz="1100">
-                <a:latin typeface="Arial"/>
-              </a:rPr>
-              <a:t>Keep answers short. Answer the principle, not the person's career decision.</a:t>
-            </a:r>
-          </a:p>
-          <a:p>
-            <a:r>
-              <a:rPr sz="1100">
-                <a:latin typeface="Arial"/>
-              </a:rPr>
-              <a:t>GOOD Q&amp;A QUESTIONS: How do I tell the difference between performance and formation? What does portability mean? What kind of evidence counts?</a:t>
-            </a:r>
-          </a:p>
-          <a:p>
-            <a:r>
-              <a:rPr sz="1100">
-                <a:latin typeface="Arial"/>
-              </a:rPr>
-              <a:t>QUESTIONS TO REDIRECT: Should I leave? What state am I in? What should I do about my manager? Can you score my situation?</a:t>
-            </a:r>
-          </a:p>
-          <a:p>
-            <a:r>
-              <a:rPr sz="1100">
-                <a:latin typeface="Arial"/>
-              </a:rPr>
-              <a:t>Q&amp;A BOUNDARY (say this): "I can help you clarify what the pattern suggests examining. I cannot make the employment decision for you."</a:t>
-            </a:r>
-          </a:p>
-          <a:p>
-            <a:r>
-              <a:rPr sz="1100">
-                <a:latin typeface="Arial"/>
-              </a:rPr>
-              <a:t>IF ASKED WHY NO ONE IS SCORED HERE: "Questions about the ideas are welcome. Individual situations will not be scored or diagnosed in this room."</a:t>
-            </a:r>
-          </a:p>
-          <a:p>
-            <a:r>
-              <a:rPr sz="1100">
-                <a:latin typeface="Arial"/>
-              </a:rPr>
-              <a:t>WHAT NOT TO SAY: Do not score anyone's situation live. Do not name a Career State for anyone. Do not tell anyone to stay or leave.</a:t>
-            </a:r>
-          </a:p>
-          <a:p>
-            <a:r>
-              <a:rPr sz="1100">
-                <a:latin typeface="Arial"/>
-              </a:rPr>
-              <a:t>FACILITATOR REFERENCE: A hidden slide immediately after this one (not shown in the live sequence) holds this same Q&amp;A guidance in card form, in case you prefer glancing at Slide Sorter / Presenter view instead of these notes.</a:t>
-            </a:r>
-          </a:p>
-          <a:p>
-            <a:r>
-              <a:rPr sz="1100">
-                <a:latin typeface="Arial"/>
-              </a:rPr>
-              <a:t>CLOSE: Thank the room. The registration link and QR code are already on screen — no need to switch slides.</a:t>
+              <a:t>TRANSITION LINE: Here is exactly what that workshop is, and how to join it.</a:t>
             </a:r>
           </a:p>
         </p:txBody>
@@ -1058,7 +971,7 @@
               <a:rPr sz="1100">
                 <a:latin typeface="Arial"/>
               </a:rPr>
-              <a:t>THIS SLIDE IS HIDDEN — it does not appear during normal Slide Show playback (View &gt; Hide Slide is set). It is kept only as a facilitator-quick-reference card.</a:t>
+              <a:t>TIMING: 32:30-45:00 — this slide stays on screen for both the workshop introduction (32:30-34:00) and the full Q&amp;A block (34:00-45:00). Do not advance to a separate Q&amp;A slide.</a:t>
             </a:r>
           </a:p>
           <a:p>
@@ -1074,7 +987,7 @@
               <a:rPr sz="1100">
                 <a:latin typeface="Arial"/>
               </a:rPr>
-              <a:t>Live Q&amp;A now happens on slide 12 (Invitation), which stays on screen from 32:30 through 45:00. The guidance below is duplicated there in note form; use whichever view is easier to glance at.</a:t>
+              <a:t>WORKSHOP INTRODUCTION (32:30-34:00)</a:t>
             </a:r>
           </a:p>
           <a:p>
@@ -1082,6 +995,38 @@
               <a:rPr sz="1100">
                 <a:latin typeface="Arial"/>
               </a:rPr>
+              <a:t>WHAT TO SAY: If today helped you recognize a pattern, the full Position Read is where that pattern gets examined with evidence. It is a two-hour live workshop, including Q&amp;A. Point to the registration CTA once, clearly.</a:t>
+            </a:r>
+          </a:p>
+          <a:p>
+            <a:r>
+              <a:rPr sz="1100">
+                <a:latin typeface="Arial"/>
+              </a:rPr>
+              <a:t>WHAT NOT TO SAY: Do not run a hard close. Do not imply the free lesson was incomplete on purpose — it was complete for recognition.</a:t>
+            </a:r>
+          </a:p>
+          <a:p>
+            <a:r>
+              <a:rPr sz="1100">
+                <a:latin typeface="Arial"/>
+              </a:rPr>
+              <a:t>LIKELY MISUNDERSTANDING: Someone may confuse the $249 launch price with a temporary discount. It is the public launch price for the first two paid deliveries, not a founding discount — correct this if it comes up.</a:t>
+            </a:r>
+          </a:p>
+          <a:p>
+            <a:r>
+              <a:rPr sz="1100">
+                <a:latin typeface="Arial"/>
+              </a:rPr>
+              <a:t>ACTION BEFORE DELIVERY: Replace the URL and QR placeholders with the confirmed Maven registration link and the confirmed Substack link before this deck goes live.</a:t>
+            </a:r>
+          </a:p>
+          <a:p>
+            <a:r>
+              <a:rPr sz="1100">
+                <a:latin typeface="Arial"/>
+              </a:rPr>
               <a:t/>
             </a:r>
           </a:p>
@@ -1090,6 +1035,22 @@
               <a:rPr sz="1100">
                 <a:latin typeface="Arial"/>
               </a:rPr>
+              <a:t>Q&amp;A (34:00-45:00) — STAY ON THIS SLIDE</a:t>
+            </a:r>
+          </a:p>
+          <a:p>
+            <a:r>
+              <a:rPr sz="1100">
+                <a:latin typeface="Arial"/>
+              </a:rPr>
+              <a:t>Keep answers short. Answer the principle, not the person's career decision.</a:t>
+            </a:r>
+          </a:p>
+          <a:p>
+            <a:r>
+              <a:rPr sz="1100">
+                <a:latin typeface="Arial"/>
+              </a:rPr>
               <a:t>GOOD Q&amp;A QUESTIONS: How do I tell the difference between performance and formation? What does portability mean? What kind of evidence counts?</a:t>
             </a:r>
           </a:p>
@@ -1106,7 +1067,7 @@
               <a:rPr sz="1100">
                 <a:latin typeface="Arial"/>
               </a:rPr>
-              <a:t>BOUNDARY LINE: "I can help you clarify what the pattern suggests examining. I cannot make the employment decision for you."</a:t>
+              <a:t>Q&amp;A BOUNDARY (say this): "I can help you clarify what the pattern suggests examining. I cannot make the employment decision for you."</a:t>
             </a:r>
           </a:p>
           <a:p>
@@ -1114,7 +1075,31 @@
               <a:rPr sz="1100">
                 <a:latin typeface="Arial"/>
               </a:rPr>
-              <a:t>DO NOT unhide this slide and advance to it during a live session — the registration and pricing on slide 12 must stay visible for the whole Q&amp;A block.</a:t>
+              <a:t>IF ASKED WHY NO ONE IS SCORED HERE: "Questions about the ideas are welcome. Individual situations will not be scored or diagnosed in this room."</a:t>
+            </a:r>
+          </a:p>
+          <a:p>
+            <a:r>
+              <a:rPr sz="1100">
+                <a:latin typeface="Arial"/>
+              </a:rPr>
+              <a:t>WHAT NOT TO SAY: Do not score anyone's situation live. Do not name a Career State for anyone. Do not tell anyone to stay or leave.</a:t>
+            </a:r>
+          </a:p>
+          <a:p>
+            <a:r>
+              <a:rPr sz="1100">
+                <a:latin typeface="Arial"/>
+              </a:rPr>
+              <a:t>FACILITATOR REFERENCE: A hidden slide immediately after this one (not shown in the live sequence) holds this same Q&amp;A guidance in card form, in case you prefer glancing at Slide Sorter / Presenter view instead of these notes.</a:t>
+            </a:r>
+          </a:p>
+          <a:p>
+            <a:r>
+              <a:rPr sz="1100">
+                <a:latin typeface="Arial"/>
+              </a:rPr>
+              <a:t>CLOSE: Thank the room. The registration link and QR code are already on screen — no need to switch slides.</a:t>
             </a:r>
           </a:p>
         </p:txBody>
@@ -1187,6 +1172,135 @@
               <a:rPr sz="1100">
                 <a:latin typeface="Arial"/>
               </a:rPr>
+              <a:t>THIS SLIDE IS HIDDEN — it does not appear during normal Slide Show playback (View &gt; Hide Slide is set). It is kept only as a facilitator-quick-reference card.</a:t>
+            </a:r>
+          </a:p>
+          <a:p>
+            <a:r>
+              <a:rPr sz="1100">
+                <a:latin typeface="Arial"/>
+              </a:rPr>
+              <a:t/>
+            </a:r>
+          </a:p>
+          <a:p>
+            <a:r>
+              <a:rPr sz="1100">
+                <a:latin typeface="Arial"/>
+              </a:rPr>
+              <a:t>Live Q&amp;A now happens on slide 13 (Invitation), which stays on screen from 32:30 through 45:00. The guidance below is duplicated there in note form; use whichever view is easier to glance at.</a:t>
+            </a:r>
+          </a:p>
+          <a:p>
+            <a:r>
+              <a:rPr sz="1100">
+                <a:latin typeface="Arial"/>
+              </a:rPr>
+              <a:t/>
+            </a:r>
+          </a:p>
+          <a:p>
+            <a:r>
+              <a:rPr sz="1100">
+                <a:latin typeface="Arial"/>
+              </a:rPr>
+              <a:t>GOOD Q&amp;A QUESTIONS: How do I tell the difference between performance and formation? What does portability mean? What kind of evidence counts?</a:t>
+            </a:r>
+          </a:p>
+          <a:p>
+            <a:r>
+              <a:rPr sz="1100">
+                <a:latin typeface="Arial"/>
+              </a:rPr>
+              <a:t>QUESTIONS TO REDIRECT: Should I leave? What state am I in? What should I do about my manager? Can you score my situation?</a:t>
+            </a:r>
+          </a:p>
+          <a:p>
+            <a:r>
+              <a:rPr sz="1100">
+                <a:latin typeface="Arial"/>
+              </a:rPr>
+              <a:t>BOUNDARY LINE: "I can help you clarify what the pattern suggests examining. I cannot make the employment decision for you."</a:t>
+            </a:r>
+          </a:p>
+          <a:p>
+            <a:r>
+              <a:rPr sz="1100">
+                <a:latin typeface="Arial"/>
+              </a:rPr>
+              <a:t>DO NOT unhide this slide and advance to it during a live session — the registration and pricing on slide 13 must stay visible for the whole Q&amp;A block.</a:t>
+            </a:r>
+          </a:p>
+        </p:txBody>
+      </p:sp>
+      <p:sp>
+        <p:nvSpPr>
+          <p:cNvPr id="4" name="Slide Number Placeholder 3"/>
+          <p:cNvSpPr>
+            <a:spLocks noGrp="1"/>
+          </p:cNvSpPr>
+          <p:nvPr>
+            <p:ph type="sldNum" idx="5" sz="quarter"/>
+          </p:nvPr>
+        </p:nvSpPr>
+        <p:spPr/>
+      </p:sp>
+    </p:spTree>
+  </p:cSld>
+  <p:clrMapOvr>
+    <a:masterClrMapping/>
+  </p:clrMapOvr>
+</p:notes>
+</file>
+
+<file path=ppt/notesSlides/notesSlide15.xml><?xml version="1.0" encoding="utf-8"?>
+<p:notes xmlns:a="http://schemas.openxmlformats.org/drawingml/2006/main" xmlns:p="http://schemas.openxmlformats.org/presentationml/2006/main" xmlns:r="http://schemas.openxmlformats.org/officeDocument/2006/relationships">
+  <p:cSld>
+    <p:spTree>
+      <p:nvGrpSpPr>
+        <p:cNvPr id="1" name=""/>
+        <p:cNvGrpSpPr/>
+        <p:nvPr/>
+      </p:nvGrpSpPr>
+      <p:grpSpPr>
+        <a:xfrm>
+          <a:off x="0" y="0"/>
+          <a:ext cx="0" cy="0"/>
+          <a:chOff x="0" y="0"/>
+          <a:chExt cx="0" cy="0"/>
+        </a:xfrm>
+      </p:grpSpPr>
+      <p:sp>
+        <p:nvSpPr>
+          <p:cNvPr id="2" name="Slide Image Placeholder 1"/>
+          <p:cNvSpPr>
+            <a:spLocks noGrp="1"/>
+          </p:cNvSpPr>
+          <p:nvPr>
+            <p:ph type="sldImg" idx="2"/>
+          </p:nvPr>
+        </p:nvSpPr>
+        <p:spPr/>
+      </p:sp>
+      <p:sp>
+        <p:nvSpPr>
+          <p:cNvPr id="3" name="Notes Placeholder 2"/>
+          <p:cNvSpPr>
+            <a:spLocks noGrp="1"/>
+          </p:cNvSpPr>
+          <p:nvPr>
+            <p:ph type="body" idx="3" sz="quarter"/>
+          </p:nvPr>
+        </p:nvSpPr>
+        <p:spPr/>
+        <p:txBody>
+          <a:bodyPr/>
+          <a:lstStyle/>
+          <a:p>
+            <a:r>
+              <a:rPr sz="1100">
+                <a:latin typeface="Arial"/>
+              </a:rPr>
               <a:t>TIMING: Not part of the timed 45-minute session. Use only if delivering to a room with extra time, or share as a leave-behind slide in the deck PDF.</a:t>
             </a:r>
           </a:p>
@@ -1332,7 +1446,7 @@
               <a:rPr sz="1100">
                 <a:latin typeface="Arial"/>
               </a:rPr>
-              <a:t>TRANSITION LINE: "Before we begin, I want to understand what brought you into the room." Then advance to the opening poll.</a:t>
+              <a:t>TRANSITION LINE: "Before we begin, I want to understand what brought you into the room." Then advance to the concise boundary slide, then the opening poll.</a:t>
             </a:r>
           </a:p>
           <a:p>
@@ -1445,7 +1559,7 @@
               <a:rPr sz="1100">
                 <a:latin typeface="Arial"/>
               </a:rPr>
-              <a:t>TIMING: 3:00-5:00</a:t>
+              <a:t>TIMING: 3:00-3:30</a:t>
             </a:r>
           </a:p>
           <a:p>
@@ -1453,7 +1567,7 @@
               <a:rPr sz="1100">
                 <a:latin typeface="Arial"/>
               </a:rPr>
-              <a:t>WHAT TO SAY: Put the poll in chat or use Maven/Zoom polling. Ask people to choose the nearest reason, not explain.</a:t>
+              <a:t>WHAT TO SAY: Read the boundary statement once, plainly, exactly as written on the slide. This is the only place the boundary is stated — do not repeat it later.</a:t>
             </a:r>
           </a:p>
           <a:p>
@@ -1461,7 +1575,7 @@
               <a:rPr sz="1100">
                 <a:latin typeface="Arial"/>
               </a:rPr>
-              <a:t>WHAT NOT TO SAY: Do not analyze individual answers aloud.</a:t>
+              <a:t>WHAT NOT TO SAY: Do not soften it, apologize for it, or expand it into a longer disclaimer.</a:t>
             </a:r>
           </a:p>
           <a:p>
@@ -1469,7 +1583,7 @@
               <a:rPr sz="1100">
                 <a:latin typeface="Arial"/>
               </a:rPr>
-              <a:t>PARTICIPANT ACTION: Selects one option via chat or poll widget.</a:t>
+              <a:t>PARTICIPANT ACTION: None. Listening.</a:t>
             </a:r>
           </a:p>
           <a:p>
@@ -1477,7 +1591,7 @@
               <a:rPr sz="1100">
                 <a:latin typeface="Arial"/>
               </a:rPr>
-              <a:t>LIKELY MISUNDERSTANDING: A participant may try to explain their situation in detail; thank them briefly and move on without engaging the specifics.</a:t>
+              <a:t>LIKELY MISUNDERSTANDING: Some may still expect a scored assessment today even after hearing this. If it resurfaces later, redirect with this same line rather than inventing a new one.</a:t>
             </a:r>
           </a:p>
           <a:p>
@@ -1485,7 +1599,7 @@
               <a:rPr sz="1100">
                 <a:latin typeface="Arial"/>
               </a:rPr>
-              <a:t>TRANSITION LINE: Whatever brought you here, by the end of today you'll leave with three specific things. Here's what they are.</a:t>
+              <a:t>TRANSITION LINE: Now, let's find out what brought you into the room today.</a:t>
             </a:r>
           </a:p>
         </p:txBody>
@@ -1558,7 +1672,7 @@
               <a:rPr sz="1100">
                 <a:latin typeface="Arial"/>
               </a:rPr>
-              <a:t>TIMING: 5:00-6:30</a:t>
+              <a:t>TIMING: 3:30-5:00</a:t>
             </a:r>
           </a:p>
           <a:p>
@@ -1566,7 +1680,7 @@
               <a:rPr sz="1100">
                 <a:latin typeface="Arial"/>
               </a:rPr>
-              <a:t>WHAT TO SAY: Three things by minute 45: the difference between performance and growth, your own Career Stall Check completed against real evidence, and one next question worth investigating.</a:t>
+              <a:t>WHAT TO SAY: Put the poll in chat or use Maven/Zoom polling. Ask people to choose the nearest reason, not explain.</a:t>
             </a:r>
           </a:p>
           <a:p>
@@ -1574,7 +1688,7 @@
               <a:rPr sz="1100">
                 <a:latin typeface="Arial"/>
               </a:rPr>
-              <a:t>BOUNDARY (read this plainly, once): "This session will not tell you whether to stay or leave, or place you into a Career State. It will help you recognize three signs worth examining in your own work." Do not repeat it again later as a separate slide.</a:t>
+              <a:t>WHAT NOT TO SAY: Do not analyze individual answers aloud.</a:t>
             </a:r>
           </a:p>
           <a:p>
@@ -1582,7 +1696,7 @@
               <a:rPr sz="1100">
                 <a:latin typeface="Arial"/>
               </a:rPr>
-              <a:t>WHAT NOT TO SAY: Do not promise a Career State, a score, or a stay-or-leave answer as an outcome.</a:t>
+              <a:t>PARTICIPANT ACTION: Selects one option via chat or poll widget.</a:t>
             </a:r>
           </a:p>
           <a:p>
@@ -1590,7 +1704,7 @@
               <a:rPr sz="1100">
                 <a:latin typeface="Arial"/>
               </a:rPr>
-              <a:t>PARTICIPANT ACTION: None yet. Orienting to the session's shape.</a:t>
+              <a:t>LIKELY MISUNDERSTANDING: A participant may try to explain their situation in detail; thank them briefly and move on without engaging the specifics.</a:t>
             </a:r>
           </a:p>
           <a:p>
@@ -1598,15 +1712,7 @@
               <a:rPr sz="1100">
                 <a:latin typeface="Arial"/>
               </a:rPr>
-              <a:t>LIKELY MISUNDERSTANDING: "A basis for deciding whether to go deeper" is a conversion objective, not a learning outcome — do not restate it as a fourth promise here. Some may still expect a scored result today; the boundary above is stated once so you can redirect quickly if it resurfaces in chat.</a:t>
-            </a:r>
-          </a:p>
-          <a:p>
-            <a:r>
-              <a:rPr sz="1100">
-                <a:latin typeface="Arial"/>
-              </a:rPr>
-              <a:t>TRANSITION LINE: Here is the idea that ties all three signs together.</a:t>
+              <a:t>TRANSITION LINE: Whatever brought you here, by the end of today you'll leave with three specific things. Here's what they are.</a:t>
             </a:r>
           </a:p>
         </p:txBody>
@@ -1679,7 +1785,7 @@
               <a:rPr sz="1100">
                 <a:latin typeface="Arial"/>
               </a:rPr>
-              <a:t>TIMING: 6:30-8:00</a:t>
+              <a:t>TIMING: 5:00-6:30</a:t>
             </a:r>
           </a:p>
           <a:p>
@@ -1687,7 +1793,7 @@
               <a:rPr sz="1100">
                 <a:latin typeface="Arial"/>
               </a:rPr>
-              <a:t>WHAT TO SAY: This is the central line of the entire lesson. Read the four bullets steadily, then let "Performance matters. It is not the whole reading." land before moving on.</a:t>
+              <a:t>WHAT TO SAY: Three things by minute 45: the difference between performance and growth, your own Career Stall Check completed against real evidence, and one next question worth investigating.</a:t>
             </a:r>
           </a:p>
           <a:p>
@@ -1695,7 +1801,7 @@
               <a:rPr sz="1100">
                 <a:latin typeface="Arial"/>
               </a:rPr>
-              <a:t>WHAT NOT TO SAY: Do not imply performance does not matter. It does. It is simply a different signal than formation.</a:t>
+              <a:t>WHAT NOT TO SAY: Do not promise a Career State, a score, or a stay-or-leave answer as an outcome. Do not restate the boundary here — it was already stated once, plainly, on slide 3. Repeating it dilutes it.</a:t>
             </a:r>
           </a:p>
           <a:p>
@@ -1703,7 +1809,7 @@
               <a:rPr sz="1100">
                 <a:latin typeface="Arial"/>
               </a:rPr>
-              <a:t>PARTICIPANT ACTION: None. This is the pivot point into the three signs.</a:t>
+              <a:t>PARTICIPANT ACTION: None yet. Orienting to the session's shape.</a:t>
             </a:r>
           </a:p>
           <a:p>
@@ -1711,7 +1817,7 @@
               <a:rPr sz="1100">
                 <a:latin typeface="Arial"/>
               </a:rPr>
-              <a:t>LIKELY MISUNDERSTANDING: Someone may hear "performance does not matter." Correct plainly if it comes up: performance matters, it is just not the complete reading.</a:t>
+              <a:t>LIKELY MISUNDERSTANDING: "A basis for deciding whether to go deeper" is a conversion objective, not a learning outcome — do not restate it as a fourth promise here.</a:t>
             </a:r>
           </a:p>
           <a:p>
@@ -1719,7 +1825,7 @@
               <a:rPr sz="1100">
                 <a:latin typeface="Arial"/>
               </a:rPr>
-              <a:t>TRANSITION LINE: Here are three specific ways capable people miss that distinction in their own work.</a:t>
+              <a:t>TRANSITION LINE: Here is the idea that ties all three signs together.</a:t>
             </a:r>
           </a:p>
         </p:txBody>
@@ -1792,7 +1898,7 @@
               <a:rPr sz="1100">
                 <a:latin typeface="Arial"/>
               </a:rPr>
-              <a:t>TIMING: 8:00-13:00</a:t>
+              <a:t>TIMING: 6:30-8:00</a:t>
             </a:r>
           </a:p>
           <a:p>
@@ -1800,7 +1906,7 @@
               <a:rPr sz="1100">
                 <a:latin typeface="Arial"/>
               </a:rPr>
-              <a:t>WHAT TO SAY: High performers often use strong performance as proof that growth is happening. Separate delivery from formation. Read the test question slowly, then give 30-45 seconds for the quick check.</a:t>
+              <a:t>WHAT TO SAY: This is the central line of the entire lesson. Read the four bullets steadily, then let "Performance matters. It is not the whole reading." land before moving on.</a:t>
             </a:r>
           </a:p>
           <a:p>
@@ -1808,7 +1914,7 @@
               <a:rPr sz="1100">
                 <a:latin typeface="Arial"/>
               </a:rPr>
-              <a:t>EXAMPLE: A person can lead the same decision forum more smoothly each quarter without meeting a problem they do not already know how to solve.</a:t>
+              <a:t>WHAT NOT TO SAY: Do not imply performance does not matter. It does. It is simply a different signal than formation.</a:t>
             </a:r>
           </a:p>
           <a:p>
@@ -1816,7 +1922,7 @@
               <a:rPr sz="1100">
                 <a:latin typeface="Arial"/>
               </a:rPr>
-              <a:t>WHAT NOT TO SAY: Do not imply high performance is fake. It is real. It is simply a different signal.</a:t>
+              <a:t>PARTICIPANT ACTION: None. This is the pivot point into the three signs.</a:t>
             </a:r>
           </a:p>
           <a:p>
@@ -1824,7 +1930,7 @@
               <a:rPr sz="1100">
                 <a:latin typeface="Arial"/>
               </a:rPr>
-              <a:t>PARTICIPANT ACTION: Answers the quick check in chat, poll, or privately in writing — one word only.</a:t>
+              <a:t>LIKELY MISUNDERSTANDING: Someone may hear "performance does not matter." Correct plainly if it comes up: performance matters, it is just not the complete reading.</a:t>
             </a:r>
           </a:p>
           <a:p>
@@ -1832,15 +1938,7 @@
               <a:rPr sz="1100">
                 <a:latin typeface="Arial"/>
               </a:rPr>
-              <a:t>LIKELY MISUNDERSTANDING: Someone may say their work "feels" like growth because it is demanding. Demanding is not the same as unfamiliar. Redirect gently if it comes up.</a:t>
-            </a:r>
-          </a:p>
-          <a:p>
-            <a:r>
-              <a:rPr sz="1100">
-                <a:latin typeface="Arial"/>
-              </a:rPr>
-              <a:t>TRANSITION LINE: That is the first sign. Here is a second one that hides in plain sight because it feels like the opposite of a warning.</a:t>
+              <a:t>TRANSITION LINE: Here are three specific ways capable people miss that distinction in their own work.</a:t>
             </a:r>
           </a:p>
         </p:txBody>
@@ -1913,7 +2011,7 @@
               <a:rPr sz="1100">
                 <a:latin typeface="Arial"/>
               </a:rPr>
-              <a:t>TIMING: 13:00-18:00</a:t>
+              <a:t>TIMING: 8:00-13:00</a:t>
             </a:r>
           </a:p>
           <a:p>
@@ -1921,7 +2019,7 @@
               <a:rPr sz="1100">
                 <a:latin typeface="Arial"/>
               </a:rPr>
-              <a:t>WHAT TO SAY: Dependence is not bad. It is simply not the same as portability. A person can become essential to a system while their external story becomes harder to explain. Read the test question, then give the room 30-45 seconds for the quick check.</a:t>
+              <a:t>WHAT TO SAY: High performers often use strong performance as proof that growth is happening. Separate delivery from formation. Read the test question slowly, then give 30-45 seconds for the quick check.</a:t>
             </a:r>
           </a:p>
           <a:p>
@@ -1929,7 +2027,7 @@
               <a:rPr sz="1100">
                 <a:latin typeface="Arial"/>
               </a:rPr>
-              <a:t>WHAT NOT TO SAY: Do not call indispensability a trap. It can be earned and valuable. The risk is misreading it as automatically portable.</a:t>
+              <a:t>EXAMPLE: A person can lead the same decision forum more smoothly each quarter without meeting a problem they do not already know how to solve.</a:t>
             </a:r>
           </a:p>
           <a:p>
@@ -1937,7 +2035,7 @@
               <a:rPr sz="1100">
                 <a:latin typeface="Arial"/>
               </a:rPr>
-              <a:t>PARTICIPANT ACTION: Answers the quick check in chat, poll, or privately in writing.</a:t>
+              <a:t>WHAT NOT TO SAY: Do not imply high performance is fake. It is real. It is simply a different signal.</a:t>
             </a:r>
           </a:p>
           <a:p>
@@ -1945,7 +2043,7 @@
               <a:rPr sz="1100">
                 <a:latin typeface="Arial"/>
               </a:rPr>
-              <a:t>LIKELY MISUNDERSTANDING: Someone may hear this as "being needed is bad." Correct plainly: being needed is good; assuming it travels is the misread.</a:t>
+              <a:t>PARTICIPANT ACTION: Answers the quick check in chat, poll, or privately in writing — one word only.</a:t>
             </a:r>
           </a:p>
           <a:p>
@@ -1953,7 +2051,15 @@
               <a:rPr sz="1100">
                 <a:latin typeface="Arial"/>
               </a:rPr>
-              <a:t>TRANSITION LINE: The third sign is the one that hides inside what looks like career progress.</a:t>
+              <a:t>LIKELY MISUNDERSTANDING: Someone may say their work "feels" like growth because it is demanding. Demanding is not the same as unfamiliar. Redirect gently if it comes up.</a:t>
+            </a:r>
+          </a:p>
+          <a:p>
+            <a:r>
+              <a:rPr sz="1100">
+                <a:latin typeface="Arial"/>
+              </a:rPr>
+              <a:t>TRANSITION LINE: That is the first sign. Here is a second one that hides in plain sight because it feels like the opposite of a warning.</a:t>
             </a:r>
           </a:p>
         </p:txBody>
@@ -2026,7 +2132,7 @@
               <a:rPr sz="1100">
                 <a:latin typeface="Arial"/>
               </a:rPr>
-              <a:t>TIMING: 18:00-23:00</a:t>
+              <a:t>TIMING: 13:00-18:00</a:t>
             </a:r>
           </a:p>
           <a:p>
@@ -2034,7 +2140,7 @@
               <a:rPr sz="1100">
                 <a:latin typeface="Arial"/>
               </a:rPr>
-              <a:t>WHAT TO SAY: Promotions can build capability. They can also move a person into approvals, representation, and familiar judgment. The point is to read the work, not the title. Give the room 30-45 seconds for the quick check after the test question.</a:t>
+              <a:t>WHAT TO SAY: Dependence is not bad. It is simply not the same as portability. A person can become essential to a system while their external story becomes harder to explain. Read the test question, then give the room 30-45 seconds for the quick check.</a:t>
             </a:r>
           </a:p>
           <a:p>
@@ -2042,7 +2148,7 @@
               <a:rPr sz="1100">
                 <a:latin typeface="Arial"/>
               </a:rPr>
-              <a:t>WHAT NOT TO SAY: This is not a diagnosis of anyone's specific promotion. It is a pattern worth noticing.</a:t>
+              <a:t>WHAT NOT TO SAY: Do not call indispensability a trap. It can be earned and valuable. The risk is misreading it as automatically portable.</a:t>
             </a:r>
           </a:p>
           <a:p>
@@ -2058,7 +2164,7 @@
               <a:rPr sz="1100">
                 <a:latin typeface="Arial"/>
               </a:rPr>
-              <a:t>LIKELY MISUNDERSTANDING: Someone may hear this as an argument against accepting promotions. It is not. It is an argument against assuming title growth is automatically capability growth.</a:t>
+              <a:t>LIKELY MISUNDERSTANDING: Someone may hear this as "being needed is bad." Correct plainly: being needed is good; assuming it travels is the misread.</a:t>
             </a:r>
           </a:p>
           <a:p>
@@ -2066,7 +2172,7 @@
               <a:rPr sz="1100">
                 <a:latin typeface="Arial"/>
               </a:rPr>
-              <a:t>TRANSITION LINE: You've now tested three signs against your own last 90 days. Let's put that evidence somewhere you can keep it.</a:t>
+              <a:t>TRANSITION LINE: The third sign is the one that hides inside what looks like career progress.</a:t>
             </a:r>
           </a:p>
         </p:txBody>
@@ -2139,7 +2245,7 @@
               <a:rPr sz="1100">
                 <a:latin typeface="Arial"/>
               </a:rPr>
-              <a:t>TIMING: 23:00-28:00</a:t>
+              <a:t>TIMING: 18:00-23:00</a:t>
             </a:r>
           </a:p>
           <a:p>
@@ -2147,7 +2253,7 @@
               <a:rPr sz="1100">
                 <a:latin typeface="Arial"/>
               </a:rPr>
-              <a:t>WHAT TO SAY: Five quiet minutes. Open the Career Stall Check and write against your own last 90 days. No one will be called on.</a:t>
+              <a:t>WHAT TO SAY: Promotions can build capability. They can also move a person into approvals, representation, and familiar judgment. The point is to read the work, not the title. Give the room 30-45 seconds for the quick check after the test question.</a:t>
             </a:r>
           </a:p>
           <a:p>
@@ -2155,7 +2261,7 @@
               <a:rPr sz="1100">
                 <a:latin typeface="Arial"/>
               </a:rPr>
-              <a:t>WHAT NOT TO SAY: Do not say this is the full assessment. Do not offer to review anyone's answers live.</a:t>
+              <a:t>WHAT NOT TO SAY: This is not a diagnosis of anyone's specific promotion. It is a pattern worth noticing.</a:t>
             </a:r>
           </a:p>
           <a:p>
@@ -2163,7 +2269,7 @@
               <a:rPr sz="1100">
                 <a:latin typeface="Arial"/>
               </a:rPr>
-              <a:t>PARTICIPANT ACTION: Completes the four fields on the Career Stall Check handout privately.</a:t>
+              <a:t>PARTICIPANT ACTION: Answers the quick check in chat, poll, or privately in writing.</a:t>
             </a:r>
           </a:p>
           <a:p>
@@ -2171,7 +2277,7 @@
               <a:rPr sz="1100">
                 <a:latin typeface="Arial"/>
               </a:rPr>
-              <a:t>LIKELY MISUNDERSTANDING: Someone may ask if this produces a score or placement. It does not — redirect calmly: "That is what the full Position Read does. This is recognition."</a:t>
+              <a:t>LIKELY MISUNDERSTANDING: Someone may hear this as an argument against accepting promotions. It is not. It is an argument against assuming title growth is automatically capability growth.</a:t>
             </a:r>
           </a:p>
           <a:p>
@@ -2179,7 +2285,7 @@
               <a:rPr sz="1100">
                 <a:latin typeface="Arial"/>
               </a:rPr>
-              <a:t>TRANSITION LINE: Before we go further, one caution about what a recognition exercise is and is not.</a:t>
+              <a:t>TRANSITION LINE: You've now tested three signs against your own last 90 days. Let's put that evidence somewhere you can keep it.</a:t>
             </a:r>
           </a:p>
         </p:txBody>
@@ -5809,7 +5915,7 @@
                 </a:solidFill>
                 <a:latin typeface="Arial"/>
               </a:rPr>
-              <a:t>INTERPRET WITHOUT DIAGNOSING</a:t>
+              <a:t>CAREER STALL CHECK</a:t>
             </a:r>
           </a:p>
         </p:txBody>
@@ -5822,8 +5928,8 @@
         </p:nvSpPr>
         <p:spPr>
           <a:xfrm>
-            <a:off x="658368" y="1078992"/>
-            <a:ext cx="9875520" cy="685800"/>
+            <a:off x="658368" y="1097280"/>
+            <a:ext cx="10058400" cy="685800"/>
           </a:xfrm>
           <a:prstGeom prst="rect">
             <a:avLst/>
@@ -5842,33 +5948,72 @@
               </a:lnSpc>
             </a:pPr>
             <a:r>
-              <a:rPr sz="3000" b="1" i="0">
+              <a:rPr sz="3200" b="1" i="0">
                 <a:solidFill>
                   <a:srgbClr val="0F2347"/>
                 </a:solidFill>
                 <a:latin typeface="Georgia"/>
               </a:rPr>
-              <a:t>A recognition exercise is not a result.</a:t>
-            </a:r>
-          </a:p>
-        </p:txBody>
-      </p:sp>
-      <p:sp>
-        <p:nvSpPr>
-          <p:cNvPr id="4" name="Rectangle 3"/>
+              <a:t>Five quiet minutes.</a:t>
+            </a:r>
+          </a:p>
+        </p:txBody>
+      </p:sp>
+      <p:sp>
+        <p:nvSpPr>
+          <p:cNvPr id="4" name="TextBox 3"/>
+          <p:cNvSpPr txBox="1"/>
+          <p:nvPr/>
+        </p:nvSpPr>
+        <p:spPr>
+          <a:xfrm>
+            <a:off x="676656" y="1828800"/>
+            <a:ext cx="9692640" cy="411480"/>
+          </a:xfrm>
+          <a:prstGeom prst="rect">
+            <a:avLst/>
+          </a:prstGeom>
+          <a:noFill/>
+        </p:spPr>
+        <p:txBody>
+          <a:bodyPr wrap="square" lIns="0" rIns="0" tIns="0" bIns="0" anchor="t">
+            <a:spAutoFit/>
+          </a:bodyPr>
+          <a:lstStyle/>
+          <a:p>
+            <a:pPr algn="l">
+              <a:lnSpc>
+                <a:spcPct val="115000"/>
+              </a:lnSpc>
+            </a:pPr>
+            <a:r>
+              <a:rPr sz="1500" b="0" i="0">
+                <a:solidFill>
+                  <a:srgbClr val="152B4C"/>
+                </a:solidFill>
+                <a:latin typeface="Arial"/>
+              </a:rPr>
+              <a:t>Write privately in the Career Stall Check. This is not the full assessment.</a:t>
+            </a:r>
+          </a:p>
+        </p:txBody>
+      </p:sp>
+      <p:sp>
+        <p:nvSpPr>
+          <p:cNvPr id="5" name="Oval 4"/>
           <p:cNvSpPr/>
           <p:nvPr/>
         </p:nvSpPr>
         <p:spPr>
           <a:xfrm>
-            <a:off x="676656" y="2194560"/>
-            <a:ext cx="3931920" cy="22860"/>
-          </a:xfrm>
-          <a:prstGeom prst="rect">
+            <a:off x="713232" y="2423160"/>
+            <a:ext cx="347472" cy="347472"/>
+          </a:xfrm>
+          <a:prstGeom prst="ellipse">
             <a:avLst/>
           </a:prstGeom>
           <a:solidFill>
-            <a:srgbClr val="C9A84C"/>
+            <a:srgbClr val="C1440E"/>
           </a:solidFill>
           <a:ln>
             <a:noFill/>
@@ -5899,107 +6044,137 @@
       </p:sp>
       <p:sp>
         <p:nvSpPr>
-          <p:cNvPr id="5" name="TextBox 4"/>
-          <p:cNvSpPr txBox="1"/>
-          <p:nvPr/>
-        </p:nvSpPr>
-        <p:spPr>
-          <a:xfrm>
-            <a:off x="768096" y="2606040"/>
-            <a:ext cx="9784080" cy="2011680"/>
-          </a:xfrm>
-          <a:prstGeom prst="rect">
-            <a:avLst/>
-          </a:prstGeom>
-          <a:noFill/>
-        </p:spPr>
-        <p:txBody>
-          <a:bodyPr wrap="square" lIns="0" rIns="0" tIns="0" bIns="0" anchor="t">
-            <a:spAutoFit/>
-          </a:bodyPr>
-          <a:lstStyle/>
-          <a:p>
-            <a:pPr algn="l">
-              <a:lnSpc>
-                <a:spcPct val="145000"/>
-              </a:lnSpc>
-            </a:pPr>
-            <a:r>
-              <a:rPr sz="1900" b="0" i="0">
+          <p:cNvPr id="6" name="TextBox 5"/>
+          <p:cNvSpPr txBox="1"/>
+          <p:nvPr/>
+        </p:nvSpPr>
+        <p:spPr>
+          <a:xfrm>
+            <a:off x="777240" y="2491740"/>
+            <a:ext cx="228600" cy="146304"/>
+          </a:xfrm>
+          <a:prstGeom prst="rect">
+            <a:avLst/>
+          </a:prstGeom>
+          <a:noFill/>
+        </p:spPr>
+        <p:txBody>
+          <a:bodyPr wrap="square" lIns="0" rIns="0" tIns="0" bIns="0" anchor="t">
+            <a:spAutoFit/>
+          </a:bodyPr>
+          <a:lstStyle/>
+          <a:p>
+            <a:pPr algn="ctr">
+              <a:lnSpc>
+                <a:spcPct val="115000"/>
+              </a:lnSpc>
+            </a:pPr>
+            <a:r>
+              <a:rPr sz="1100" b="1" i="0">
+                <a:solidFill>
+                  <a:srgbClr val="FFFFFF"/>
+                </a:solidFill>
+                <a:latin typeface="Arial"/>
+              </a:rPr>
+              <a:t>1</a:t>
+            </a:r>
+          </a:p>
+        </p:txBody>
+      </p:sp>
+      <p:sp>
+        <p:nvSpPr>
+          <p:cNvPr id="7" name="TextBox 6"/>
+          <p:cNvSpPr txBox="1"/>
+          <p:nvPr/>
+        </p:nvSpPr>
+        <p:spPr>
+          <a:xfrm>
+            <a:off x="1261872" y="2386584"/>
+            <a:ext cx="9601200" cy="310896"/>
+          </a:xfrm>
+          <a:prstGeom prst="rect">
+            <a:avLst/>
+          </a:prstGeom>
+          <a:noFill/>
+        </p:spPr>
+        <p:txBody>
+          <a:bodyPr wrap="square" lIns="0" rIns="0" tIns="0" bIns="0" anchor="t">
+            <a:spAutoFit/>
+          </a:bodyPr>
+          <a:lstStyle/>
+          <a:p>
+            <a:pPr algn="l">
+              <a:lnSpc>
+                <a:spcPct val="115000"/>
+              </a:lnSpc>
+            </a:pPr>
+            <a:r>
+              <a:rPr sz="1500" b="1" i="0">
+                <a:solidFill>
+                  <a:srgbClr val="0F2347"/>
+                </a:solidFill>
+                <a:latin typeface="Arial"/>
+              </a:rPr>
+              <a:t>Which sign is most present for me?</a:t>
+            </a:r>
+          </a:p>
+        </p:txBody>
+      </p:sp>
+      <p:sp>
+        <p:nvSpPr>
+          <p:cNvPr id="8" name="TextBox 7"/>
+          <p:cNvSpPr txBox="1"/>
+          <p:nvPr/>
+        </p:nvSpPr>
+        <p:spPr>
+          <a:xfrm>
+            <a:off x="1261872" y="2715768"/>
+            <a:ext cx="9966960" cy="365760"/>
+          </a:xfrm>
+          <a:prstGeom prst="rect">
+            <a:avLst/>
+          </a:prstGeom>
+          <a:noFill/>
+        </p:spPr>
+        <p:txBody>
+          <a:bodyPr wrap="square" lIns="0" rIns="0" tIns="0" bIns="0" anchor="t">
+            <a:spAutoFit/>
+          </a:bodyPr>
+          <a:lstStyle/>
+          <a:p>
+            <a:pPr algn="l">
+              <a:lnSpc>
+                <a:spcPct val="115000"/>
+              </a:lnSpc>
+            </a:pPr>
+            <a:r>
+              <a:rPr sz="1200" b="0" i="0">
                 <a:solidFill>
                   <a:srgbClr val="152B4C"/>
                 </a:solidFill>
                 <a:latin typeface="Arial"/>
               </a:rPr>
-              <a:t>If one sign felt familiar, that does not mean you should leave.</a:t>
-            </a:r>
-          </a:p>
-          <a:p>
-            <a:pPr algn="l">
-              <a:lnSpc>
-                <a:spcPct val="145000"/>
-              </a:lnSpc>
-            </a:pPr>
-            <a:r>
-              <a:rPr sz="1900" b="0" i="0">
-                <a:solidFill>
-                  <a:srgbClr val="152B4C"/>
-                </a:solidFill>
-                <a:latin typeface="Arial"/>
-              </a:rPr>
-              <a:t>If none felt familiar, that does not mean your role is fully compounding.</a:t>
-            </a:r>
-          </a:p>
-          <a:p>
-            <a:pPr algn="l">
-              <a:lnSpc>
-                <a:spcPct val="145000"/>
-              </a:lnSpc>
-            </a:pPr>
-            <a:r>
-              <a:rPr sz="1900" b="0" i="0">
-                <a:solidFill>
-                  <a:srgbClr val="152B4C"/>
-                </a:solidFill>
-                <a:latin typeface="Arial"/>
-              </a:rPr>
-              <a:t>Recognition tells you what may deserve examination.</a:t>
-            </a:r>
-          </a:p>
-          <a:p>
-            <a:pPr algn="l">
-              <a:lnSpc>
-                <a:spcPct val="145000"/>
-              </a:lnSpc>
-            </a:pPr>
-            <a:r>
-              <a:rPr sz="1900" b="0" i="0">
-                <a:solidFill>
-                  <a:srgbClr val="152B4C"/>
-                </a:solidFill>
-                <a:latin typeface="Arial"/>
-              </a:rPr>
-              <a:t>Assessment is what turns the observation into a more defensible read.</a:t>
-            </a:r>
-          </a:p>
-        </p:txBody>
-      </p:sp>
-      <p:sp>
-        <p:nvSpPr>
-          <p:cNvPr id="6" name="Rectangle 5"/>
+              <a:t>Repeating instead of stretching, indispensable but mainly here, or responsibility growing faster than capability.</a:t>
+            </a:r>
+          </a:p>
+        </p:txBody>
+      </p:sp>
+      <p:sp>
+        <p:nvSpPr>
+          <p:cNvPr id="9" name="Oval 8"/>
           <p:cNvSpPr/>
           <p:nvPr/>
         </p:nvSpPr>
         <p:spPr>
           <a:xfrm>
-            <a:off x="676656" y="5074920"/>
-            <a:ext cx="3931920" cy="22860"/>
-          </a:xfrm>
-          <a:prstGeom prst="rect">
+            <a:off x="713232" y="3319272"/>
+            <a:ext cx="347472" cy="347472"/>
+          </a:xfrm>
+          <a:prstGeom prst="ellipse">
             <a:avLst/>
           </a:prstGeom>
           <a:solidFill>
-            <a:srgbClr val="C9A84C"/>
+            <a:srgbClr val="C1440E"/>
           </a:solidFill>
           <a:ln>
             <a:noFill/>
@@ -6030,46 +6205,446 @@
       </p:sp>
       <p:sp>
         <p:nvSpPr>
-          <p:cNvPr id="7" name="TextBox 6"/>
-          <p:cNvSpPr txBox="1"/>
-          <p:nvPr/>
-        </p:nvSpPr>
-        <p:spPr>
-          <a:xfrm>
-            <a:off x="768096" y="5257800"/>
-            <a:ext cx="9966960" cy="640080"/>
-          </a:xfrm>
-          <a:prstGeom prst="rect">
-            <a:avLst/>
-          </a:prstGeom>
-          <a:noFill/>
-        </p:spPr>
-        <p:txBody>
-          <a:bodyPr wrap="square" lIns="0" rIns="0" tIns="0" bIns="0" anchor="t">
-            <a:spAutoFit/>
-          </a:bodyPr>
-          <a:lstStyle/>
-          <a:p>
-            <a:pPr algn="l">
-              <a:lnSpc>
-                <a:spcPct val="130000"/>
-              </a:lnSpc>
-            </a:pPr>
-            <a:r>
-              <a:rPr sz="1400" b="0" i="1">
+          <p:cNvPr id="10" name="TextBox 9"/>
+          <p:cNvSpPr txBox="1"/>
+          <p:nvPr/>
+        </p:nvSpPr>
+        <p:spPr>
+          <a:xfrm>
+            <a:off x="777240" y="3387852"/>
+            <a:ext cx="228600" cy="146304"/>
+          </a:xfrm>
+          <a:prstGeom prst="rect">
+            <a:avLst/>
+          </a:prstGeom>
+          <a:noFill/>
+        </p:spPr>
+        <p:txBody>
+          <a:bodyPr wrap="square" lIns="0" rIns="0" tIns="0" bIns="0" anchor="t">
+            <a:spAutoFit/>
+          </a:bodyPr>
+          <a:lstStyle/>
+          <a:p>
+            <a:pPr algn="ctr">
+              <a:lnSpc>
+                <a:spcPct val="115000"/>
+              </a:lnSpc>
+            </a:pPr>
+            <a:r>
+              <a:rPr sz="1100" b="1" i="0">
+                <a:solidFill>
+                  <a:srgbClr val="FFFFFF"/>
+                </a:solidFill>
+                <a:latin typeface="Arial"/>
+              </a:rPr>
+              <a:t>2</a:t>
+            </a:r>
+          </a:p>
+        </p:txBody>
+      </p:sp>
+      <p:sp>
+        <p:nvSpPr>
+          <p:cNvPr id="11" name="TextBox 10"/>
+          <p:cNvSpPr txBox="1"/>
+          <p:nvPr/>
+        </p:nvSpPr>
+        <p:spPr>
+          <a:xfrm>
+            <a:off x="1261872" y="3282696"/>
+            <a:ext cx="9601200" cy="310896"/>
+          </a:xfrm>
+          <a:prstGeom prst="rect">
+            <a:avLst/>
+          </a:prstGeom>
+          <a:noFill/>
+        </p:spPr>
+        <p:txBody>
+          <a:bodyPr wrap="square" lIns="0" rIns="0" tIns="0" bIns="0" anchor="t">
+            <a:spAutoFit/>
+          </a:bodyPr>
+          <a:lstStyle/>
+          <a:p>
+            <a:pPr algn="l">
+              <a:lnSpc>
+                <a:spcPct val="115000"/>
+              </a:lnSpc>
+            </a:pPr>
+            <a:r>
+              <a:rPr sz="1500" b="1" i="0">
+                <a:solidFill>
+                  <a:srgbClr val="0F2347"/>
+                </a:solidFill>
+                <a:latin typeface="Arial"/>
+              </a:rPr>
+              <a:t>What is one example from the last 90 days?</a:t>
+            </a:r>
+          </a:p>
+        </p:txBody>
+      </p:sp>
+      <p:sp>
+        <p:nvSpPr>
+          <p:cNvPr id="12" name="TextBox 11"/>
+          <p:cNvSpPr txBox="1"/>
+          <p:nvPr/>
+        </p:nvSpPr>
+        <p:spPr>
+          <a:xfrm>
+            <a:off x="1261872" y="3611879"/>
+            <a:ext cx="9966960" cy="365760"/>
+          </a:xfrm>
+          <a:prstGeom prst="rect">
+            <a:avLst/>
+          </a:prstGeom>
+          <a:noFill/>
+        </p:spPr>
+        <p:txBody>
+          <a:bodyPr wrap="square" lIns="0" rIns="0" tIns="0" bIns="0" anchor="t">
+            <a:spAutoFit/>
+          </a:bodyPr>
+          <a:lstStyle/>
+          <a:p>
+            <a:pPr algn="l">
+              <a:lnSpc>
+                <a:spcPct val="115000"/>
+              </a:lnSpc>
+            </a:pPr>
+            <a:r>
+              <a:rPr sz="1200" b="0" i="0">
                 <a:solidFill>
                   <a:srgbClr val="152B4C"/>
                 </a:solidFill>
                 <a:latin typeface="Arial"/>
               </a:rPr>
-              <a:t>As routine output becomes easier to reproduce, the distinction between familiar performance and growing judgment becomes more consequential.</a:t>
-            </a:r>
-          </a:p>
-        </p:txBody>
-      </p:sp>
-      <p:sp>
-        <p:nvSpPr>
-          <p:cNvPr id="8" name="TextBox 7"/>
+              <a:t>Use a lived example, not a plan, promise, title, or feeling.</a:t>
+            </a:r>
+          </a:p>
+        </p:txBody>
+      </p:sp>
+      <p:sp>
+        <p:nvSpPr>
+          <p:cNvPr id="13" name="Oval 12"/>
+          <p:cNvSpPr/>
+          <p:nvPr/>
+        </p:nvSpPr>
+        <p:spPr>
+          <a:xfrm>
+            <a:off x="713232" y="4215383"/>
+            <a:ext cx="347472" cy="347472"/>
+          </a:xfrm>
+          <a:prstGeom prst="ellipse">
+            <a:avLst/>
+          </a:prstGeom>
+          <a:solidFill>
+            <a:srgbClr val="C1440E"/>
+          </a:solidFill>
+          <a:ln>
+            <a:noFill/>
+          </a:ln>
+          <a:effectLst/>
+        </p:spPr>
+        <p:style>
+          <a:lnRef idx="1">
+            <a:schemeClr val="accent1"/>
+          </a:lnRef>
+          <a:fillRef idx="3">
+            <a:schemeClr val="accent1"/>
+          </a:fillRef>
+          <a:effectRef idx="2">
+            <a:schemeClr val="accent1"/>
+          </a:effectRef>
+          <a:fontRef idx="minor">
+            <a:schemeClr val="lt1"/>
+          </a:fontRef>
+        </p:style>
+        <p:txBody>
+          <a:bodyPr rtlCol="0" anchor="ctr"/>
+          <a:lstStyle/>
+          <a:p>
+            <a:pPr algn="ctr"/>
+          </a:p>
+        </p:txBody>
+      </p:sp>
+      <p:sp>
+        <p:nvSpPr>
+          <p:cNvPr id="14" name="TextBox 13"/>
+          <p:cNvSpPr txBox="1"/>
+          <p:nvPr/>
+        </p:nvSpPr>
+        <p:spPr>
+          <a:xfrm>
+            <a:off x="777240" y="4283963"/>
+            <a:ext cx="228600" cy="146304"/>
+          </a:xfrm>
+          <a:prstGeom prst="rect">
+            <a:avLst/>
+          </a:prstGeom>
+          <a:noFill/>
+        </p:spPr>
+        <p:txBody>
+          <a:bodyPr wrap="square" lIns="0" rIns="0" tIns="0" bIns="0" anchor="t">
+            <a:spAutoFit/>
+          </a:bodyPr>
+          <a:lstStyle/>
+          <a:p>
+            <a:pPr algn="ctr">
+              <a:lnSpc>
+                <a:spcPct val="115000"/>
+              </a:lnSpc>
+            </a:pPr>
+            <a:r>
+              <a:rPr sz="1100" b="1" i="0">
+                <a:solidFill>
+                  <a:srgbClr val="FFFFFF"/>
+                </a:solidFill>
+                <a:latin typeface="Arial"/>
+              </a:rPr>
+              <a:t>3</a:t>
+            </a:r>
+          </a:p>
+        </p:txBody>
+      </p:sp>
+      <p:sp>
+        <p:nvSpPr>
+          <p:cNvPr id="15" name="TextBox 14"/>
+          <p:cNvSpPr txBox="1"/>
+          <p:nvPr/>
+        </p:nvSpPr>
+        <p:spPr>
+          <a:xfrm>
+            <a:off x="1261872" y="4178807"/>
+            <a:ext cx="9601200" cy="310896"/>
+          </a:xfrm>
+          <a:prstGeom prst="rect">
+            <a:avLst/>
+          </a:prstGeom>
+          <a:noFill/>
+        </p:spPr>
+        <p:txBody>
+          <a:bodyPr wrap="square" lIns="0" rIns="0" tIns="0" bIns="0" anchor="t">
+            <a:spAutoFit/>
+          </a:bodyPr>
+          <a:lstStyle/>
+          <a:p>
+            <a:pPr algn="l">
+              <a:lnSpc>
+                <a:spcPct val="115000"/>
+              </a:lnSpc>
+            </a:pPr>
+            <a:r>
+              <a:rPr sz="1500" b="1" i="0">
+                <a:solidFill>
+                  <a:srgbClr val="0F2347"/>
+                </a:solidFill>
+                <a:latin typeface="Arial"/>
+              </a:rPr>
+              <a:t>What capability, learning, or future option may not be growing?</a:t>
+            </a:r>
+          </a:p>
+        </p:txBody>
+      </p:sp>
+      <p:sp>
+        <p:nvSpPr>
+          <p:cNvPr id="16" name="TextBox 15"/>
+          <p:cNvSpPr txBox="1"/>
+          <p:nvPr/>
+        </p:nvSpPr>
+        <p:spPr>
+          <a:xfrm>
+            <a:off x="1261872" y="4507992"/>
+            <a:ext cx="9966960" cy="365760"/>
+          </a:xfrm>
+          <a:prstGeom prst="rect">
+            <a:avLst/>
+          </a:prstGeom>
+          <a:noFill/>
+        </p:spPr>
+        <p:txBody>
+          <a:bodyPr wrap="square" lIns="0" rIns="0" tIns="0" bIns="0" anchor="t">
+            <a:spAutoFit/>
+          </a:bodyPr>
+          <a:lstStyle/>
+          <a:p>
+            <a:pPr algn="l">
+              <a:lnSpc>
+                <a:spcPct val="115000"/>
+              </a:lnSpc>
+            </a:pPr>
+            <a:r>
+              <a:rPr sz="1200" b="0" i="0">
+                <a:solidFill>
+                  <a:srgbClr val="152B4C"/>
+                </a:solidFill>
+                <a:latin typeface="Arial"/>
+              </a:rPr>
+              <a:t>Name the specific thing, not a general sense that something is off.</a:t>
+            </a:r>
+          </a:p>
+        </p:txBody>
+      </p:sp>
+      <p:sp>
+        <p:nvSpPr>
+          <p:cNvPr id="17" name="Oval 16"/>
+          <p:cNvSpPr/>
+          <p:nvPr/>
+        </p:nvSpPr>
+        <p:spPr>
+          <a:xfrm>
+            <a:off x="713232" y="5111496"/>
+            <a:ext cx="347472" cy="347472"/>
+          </a:xfrm>
+          <a:prstGeom prst="ellipse">
+            <a:avLst/>
+          </a:prstGeom>
+          <a:solidFill>
+            <a:srgbClr val="C1440E"/>
+          </a:solidFill>
+          <a:ln>
+            <a:noFill/>
+          </a:ln>
+          <a:effectLst/>
+        </p:spPr>
+        <p:style>
+          <a:lnRef idx="1">
+            <a:schemeClr val="accent1"/>
+          </a:lnRef>
+          <a:fillRef idx="3">
+            <a:schemeClr val="accent1"/>
+          </a:fillRef>
+          <a:effectRef idx="2">
+            <a:schemeClr val="accent1"/>
+          </a:effectRef>
+          <a:fontRef idx="minor">
+            <a:schemeClr val="lt1"/>
+          </a:fontRef>
+        </p:style>
+        <p:txBody>
+          <a:bodyPr rtlCol="0" anchor="ctr"/>
+          <a:lstStyle/>
+          <a:p>
+            <a:pPr algn="ctr"/>
+          </a:p>
+        </p:txBody>
+      </p:sp>
+      <p:sp>
+        <p:nvSpPr>
+          <p:cNvPr id="18" name="TextBox 17"/>
+          <p:cNvSpPr txBox="1"/>
+          <p:nvPr/>
+        </p:nvSpPr>
+        <p:spPr>
+          <a:xfrm>
+            <a:off x="777240" y="5180076"/>
+            <a:ext cx="228600" cy="146304"/>
+          </a:xfrm>
+          <a:prstGeom prst="rect">
+            <a:avLst/>
+          </a:prstGeom>
+          <a:noFill/>
+        </p:spPr>
+        <p:txBody>
+          <a:bodyPr wrap="square" lIns="0" rIns="0" tIns="0" bIns="0" anchor="t">
+            <a:spAutoFit/>
+          </a:bodyPr>
+          <a:lstStyle/>
+          <a:p>
+            <a:pPr algn="ctr">
+              <a:lnSpc>
+                <a:spcPct val="115000"/>
+              </a:lnSpc>
+            </a:pPr>
+            <a:r>
+              <a:rPr sz="1100" b="1" i="0">
+                <a:solidFill>
+                  <a:srgbClr val="FFFFFF"/>
+                </a:solidFill>
+                <a:latin typeface="Arial"/>
+              </a:rPr>
+              <a:t>4</a:t>
+            </a:r>
+          </a:p>
+        </p:txBody>
+      </p:sp>
+      <p:sp>
+        <p:nvSpPr>
+          <p:cNvPr id="19" name="TextBox 18"/>
+          <p:cNvSpPr txBox="1"/>
+          <p:nvPr/>
+        </p:nvSpPr>
+        <p:spPr>
+          <a:xfrm>
+            <a:off x="1261872" y="5074920"/>
+            <a:ext cx="9601200" cy="310896"/>
+          </a:xfrm>
+          <a:prstGeom prst="rect">
+            <a:avLst/>
+          </a:prstGeom>
+          <a:noFill/>
+        </p:spPr>
+        <p:txBody>
+          <a:bodyPr wrap="square" lIns="0" rIns="0" tIns="0" bIns="0" anchor="t">
+            <a:spAutoFit/>
+          </a:bodyPr>
+          <a:lstStyle/>
+          <a:p>
+            <a:pPr algn="l">
+              <a:lnSpc>
+                <a:spcPct val="115000"/>
+              </a:lnSpc>
+            </a:pPr>
+            <a:r>
+              <a:rPr sz="1500" b="1" i="0">
+                <a:solidFill>
+                  <a:srgbClr val="0F2347"/>
+                </a:solidFill>
+                <a:latin typeface="Arial"/>
+              </a:rPr>
+              <a:t>What is the next question I need to investigate?</a:t>
+            </a:r>
+          </a:p>
+        </p:txBody>
+      </p:sp>
+      <p:sp>
+        <p:nvSpPr>
+          <p:cNvPr id="20" name="TextBox 19"/>
+          <p:cNvSpPr txBox="1"/>
+          <p:nvPr/>
+        </p:nvSpPr>
+        <p:spPr>
+          <a:xfrm>
+            <a:off x="1261872" y="5404104"/>
+            <a:ext cx="9966960" cy="365760"/>
+          </a:xfrm>
+          <a:prstGeom prst="rect">
+            <a:avLst/>
+          </a:prstGeom>
+          <a:noFill/>
+        </p:spPr>
+        <p:txBody>
+          <a:bodyPr wrap="square" lIns="0" rIns="0" tIns="0" bIns="0" anchor="t">
+            <a:spAutoFit/>
+          </a:bodyPr>
+          <a:lstStyle/>
+          <a:p>
+            <a:pPr algn="l">
+              <a:lnSpc>
+                <a:spcPct val="115000"/>
+              </a:lnSpc>
+            </a:pPr>
+            <a:r>
+              <a:rPr sz="1200" b="0" i="0">
+                <a:solidFill>
+                  <a:srgbClr val="152B4C"/>
+                </a:solidFill>
+                <a:latin typeface="Arial"/>
+              </a:rPr>
+              <a:t>The question you would need to read more carefully before making a bigger career decision.</a:t>
+            </a:r>
+          </a:p>
+        </p:txBody>
+      </p:sp>
+      <p:sp>
+        <p:nvSpPr>
+          <p:cNvPr id="21" name="TextBox 20"/>
           <p:cNvSpPr txBox="1"/>
           <p:nvPr/>
         </p:nvSpPr>
@@ -6108,7 +6683,7 @@
       </p:sp>
       <p:sp>
         <p:nvSpPr>
-          <p:cNvPr id="9" name="TextBox 8"/>
+          <p:cNvPr id="22" name="TextBox 21"/>
           <p:cNvSpPr txBox="1"/>
           <p:nvPr/>
         </p:nvSpPr>
@@ -6205,7 +6780,7 @@
                 </a:solidFill>
                 <a:latin typeface="Arial"/>
               </a:rPr>
-              <a:t>THIS WAS ONE PIECE</a:t>
+              <a:t>INTERPRET WITHOUT DIAGNOSING</a:t>
             </a:r>
           </a:p>
         </p:txBody>
@@ -6218,49 +6793,33 @@
         </p:nvSpPr>
         <p:spPr>
           <a:xfrm>
-            <a:off x="658368" y="1371600"/>
-            <a:ext cx="10424160" cy="1234440"/>
-          </a:xfrm>
-          <a:prstGeom prst="rect">
-            <a:avLst/>
-          </a:prstGeom>
-          <a:noFill/>
-        </p:spPr>
-        <p:txBody>
-          <a:bodyPr wrap="square" lIns="0" rIns="0" tIns="0" bIns="0" anchor="t">
-            <a:spAutoFit/>
-          </a:bodyPr>
-          <a:lstStyle/>
-          <a:p>
-            <a:pPr algn="l">
-              <a:lnSpc>
-                <a:spcPct val="110000"/>
-              </a:lnSpc>
-            </a:pPr>
-            <a:r>
-              <a:rPr sz="3300" b="1" i="0">
+            <a:off x="658368" y="1078992"/>
+            <a:ext cx="9875520" cy="685800"/>
+          </a:xfrm>
+          <a:prstGeom prst="rect">
+            <a:avLst/>
+          </a:prstGeom>
+          <a:noFill/>
+        </p:spPr>
+        <p:txBody>
+          <a:bodyPr wrap="square" lIns="0" rIns="0" tIns="0" bIns="0" anchor="t">
+            <a:spAutoFit/>
+          </a:bodyPr>
+          <a:lstStyle/>
+          <a:p>
+            <a:pPr algn="l">
+              <a:lnSpc>
+                <a:spcPct val="115000"/>
+              </a:lnSpc>
+            </a:pPr>
+            <a:r>
+              <a:rPr sz="3000" b="1" i="0">
                 <a:solidFill>
                   <a:srgbClr val="0F2347"/>
                 </a:solidFill>
                 <a:latin typeface="Georgia"/>
               </a:rPr>
-              <a:t>Recognition Is the</a:t>
-            </a:r>
-          </a:p>
-          <a:p>
-            <a:pPr algn="l">
-              <a:lnSpc>
-                <a:spcPct val="110000"/>
-              </a:lnSpc>
-            </a:pPr>
-            <a:r>
-              <a:rPr sz="3300" b="1" i="0">
-                <a:solidFill>
-                  <a:srgbClr val="0F2347"/>
-                </a:solidFill>
-                <a:latin typeface="Georgia"/>
-              </a:rPr>
-              <a:t>Beginning of the Read</a:t>
+              <a:t>A recognition exercise is not a result.</a:t>
             </a:r>
           </a:p>
         </p:txBody>
@@ -6273,14 +6832,14 @@
         </p:nvSpPr>
         <p:spPr>
           <a:xfrm>
-            <a:off x="658368" y="2697480"/>
-            <a:ext cx="5166360" cy="2331720"/>
+            <a:off x="676656" y="2194560"/>
+            <a:ext cx="3931920" cy="22860"/>
           </a:xfrm>
           <a:prstGeom prst="rect">
             <a:avLst/>
           </a:prstGeom>
           <a:solidFill>
-            <a:srgbClr val="FBF7EF"/>
+            <a:srgbClr val="C9A84C"/>
           </a:solidFill>
           <a:ln>
             <a:noFill/>
@@ -6311,20 +6870,107 @@
       </p:sp>
       <p:sp>
         <p:nvSpPr>
-          <p:cNvPr id="5" name="Rectangle 4"/>
+          <p:cNvPr id="5" name="TextBox 4"/>
+          <p:cNvSpPr txBox="1"/>
+          <p:nvPr/>
+        </p:nvSpPr>
+        <p:spPr>
+          <a:xfrm>
+            <a:off x="768096" y="2606040"/>
+            <a:ext cx="9784080" cy="2011680"/>
+          </a:xfrm>
+          <a:prstGeom prst="rect">
+            <a:avLst/>
+          </a:prstGeom>
+          <a:noFill/>
+        </p:spPr>
+        <p:txBody>
+          <a:bodyPr wrap="square" lIns="0" rIns="0" tIns="0" bIns="0" anchor="t">
+            <a:spAutoFit/>
+          </a:bodyPr>
+          <a:lstStyle/>
+          <a:p>
+            <a:pPr algn="l">
+              <a:lnSpc>
+                <a:spcPct val="145000"/>
+              </a:lnSpc>
+            </a:pPr>
+            <a:r>
+              <a:rPr sz="1900" b="0" i="0">
+                <a:solidFill>
+                  <a:srgbClr val="152B4C"/>
+                </a:solidFill>
+                <a:latin typeface="Arial"/>
+              </a:rPr>
+              <a:t>If one sign felt familiar, that does not mean you should leave.</a:t>
+            </a:r>
+          </a:p>
+          <a:p>
+            <a:pPr algn="l">
+              <a:lnSpc>
+                <a:spcPct val="145000"/>
+              </a:lnSpc>
+            </a:pPr>
+            <a:r>
+              <a:rPr sz="1900" b="0" i="0">
+                <a:solidFill>
+                  <a:srgbClr val="152B4C"/>
+                </a:solidFill>
+                <a:latin typeface="Arial"/>
+              </a:rPr>
+              <a:t>If none felt familiar, that does not mean your role is fully compounding.</a:t>
+            </a:r>
+          </a:p>
+          <a:p>
+            <a:pPr algn="l">
+              <a:lnSpc>
+                <a:spcPct val="145000"/>
+              </a:lnSpc>
+            </a:pPr>
+            <a:r>
+              <a:rPr sz="1900" b="0" i="0">
+                <a:solidFill>
+                  <a:srgbClr val="152B4C"/>
+                </a:solidFill>
+                <a:latin typeface="Arial"/>
+              </a:rPr>
+              <a:t>Recognition tells you what may deserve examination.</a:t>
+            </a:r>
+          </a:p>
+          <a:p>
+            <a:pPr algn="l">
+              <a:lnSpc>
+                <a:spcPct val="145000"/>
+              </a:lnSpc>
+            </a:pPr>
+            <a:r>
+              <a:rPr sz="1900" b="0" i="0">
+                <a:solidFill>
+                  <a:srgbClr val="152B4C"/>
+                </a:solidFill>
+                <a:latin typeface="Arial"/>
+              </a:rPr>
+              <a:t>Assessment is what turns the observation into a more defensible read.</a:t>
+            </a:r>
+          </a:p>
+        </p:txBody>
+      </p:sp>
+      <p:sp>
+        <p:nvSpPr>
+          <p:cNvPr id="6" name="Rectangle 5"/>
           <p:cNvSpPr/>
           <p:nvPr/>
         </p:nvSpPr>
         <p:spPr>
           <a:xfrm>
-            <a:off x="6345936" y="2697480"/>
-            <a:ext cx="5166360" cy="2331720"/>
+            <a:off x="676656" y="5074920"/>
+            <a:ext cx="3931920" cy="22860"/>
           </a:xfrm>
           <a:prstGeom prst="rect">
             <a:avLst/>
           </a:prstGeom>
           <a:solidFill>
-            <a:srgbClr val="FBF7EF"/>
+            <a:srgbClr val="C9A84C"/>
           </a:solidFill>
           <a:ln>
             <a:noFill/>
@@ -6355,110 +7001,39 @@
       </p:sp>
       <p:sp>
         <p:nvSpPr>
-          <p:cNvPr id="6" name="TextBox 5"/>
-          <p:cNvSpPr txBox="1"/>
-          <p:nvPr/>
-        </p:nvSpPr>
-        <p:spPr>
-          <a:xfrm>
-            <a:off x="896112" y="2880360"/>
-            <a:ext cx="4663440" cy="274320"/>
-          </a:xfrm>
-          <a:prstGeom prst="rect">
-            <a:avLst/>
-          </a:prstGeom>
-          <a:noFill/>
-        </p:spPr>
-        <p:txBody>
-          <a:bodyPr wrap="square" lIns="0" rIns="0" tIns="0" bIns="0" anchor="t">
-            <a:spAutoFit/>
-          </a:bodyPr>
-          <a:lstStyle/>
-          <a:p>
-            <a:pPr algn="l">
-              <a:lnSpc>
-                <a:spcPct val="115000"/>
-              </a:lnSpc>
-            </a:pPr>
-            <a:r>
-              <a:rPr sz="1100" b="1" i="0" spc="150">
-                <a:solidFill>
-                  <a:srgbClr val="C9A84C"/>
-                </a:solidFill>
-                <a:latin typeface="Arial"/>
-              </a:rPr>
-              <a:t>TODAY: RECOGNITION</a:t>
-            </a:r>
-          </a:p>
-        </p:txBody>
-      </p:sp>
-      <p:sp>
-        <p:nvSpPr>
           <p:cNvPr id="7" name="TextBox 6"/>
           <p:cNvSpPr txBox="1"/>
           <p:nvPr/>
         </p:nvSpPr>
         <p:spPr>
           <a:xfrm>
-            <a:off x="896112" y="3291840"/>
-            <a:ext cx="4663440" cy="1554480"/>
-          </a:xfrm>
-          <a:prstGeom prst="rect">
-            <a:avLst/>
-          </a:prstGeom>
-          <a:noFill/>
-        </p:spPr>
-        <p:txBody>
-          <a:bodyPr wrap="square" lIns="0" rIns="0" tIns="0" bIns="0" anchor="t">
-            <a:spAutoFit/>
-          </a:bodyPr>
-          <a:lstStyle/>
-          <a:p>
-            <a:pPr algn="l">
-              <a:lnSpc>
-                <a:spcPct val="140000"/>
-              </a:lnSpc>
-            </a:pPr>
-            <a:r>
-              <a:rPr sz="1900" b="1" i="0">
-                <a:solidFill>
-                  <a:srgbClr val="0F2347"/>
-                </a:solidFill>
-                <a:latin typeface="Georgia"/>
-              </a:rPr>
-              <a:t>Repeated work.</a:t>
-            </a:r>
-          </a:p>
-          <a:p>
-            <a:pPr algn="l">
-              <a:lnSpc>
-                <a:spcPct val="140000"/>
-              </a:lnSpc>
-            </a:pPr>
-            <a:r>
-              <a:rPr sz="1900" b="1" i="0">
-                <a:solidFill>
-                  <a:srgbClr val="0F2347"/>
-                </a:solidFill>
-                <a:latin typeface="Georgia"/>
-              </a:rPr>
-              <a:t>Context-bound value.</a:t>
-            </a:r>
-          </a:p>
-          <a:p>
-            <a:pPr algn="l">
-              <a:lnSpc>
-                <a:spcPct val="140000"/>
-              </a:lnSpc>
-            </a:pPr>
-            <a:r>
-              <a:rPr sz="1900" b="1" i="0">
-                <a:solidFill>
-                  <a:srgbClr val="0F2347"/>
-                </a:solidFill>
-                <a:latin typeface="Georgia"/>
-              </a:rPr>
-              <a:t>Responsibility without capability expansion.</a:t>
+            <a:off x="768096" y="5257800"/>
+            <a:ext cx="9966960" cy="640080"/>
+          </a:xfrm>
+          <a:prstGeom prst="rect">
+            <a:avLst/>
+          </a:prstGeom>
+          <a:noFill/>
+        </p:spPr>
+        <p:txBody>
+          <a:bodyPr wrap="square" lIns="0" rIns="0" tIns="0" bIns="0" anchor="t">
+            <a:spAutoFit/>
+          </a:bodyPr>
+          <a:lstStyle/>
+          <a:p>
+            <a:pPr algn="l">
+              <a:lnSpc>
+                <a:spcPct val="130000"/>
+              </a:lnSpc>
+            </a:pPr>
+            <a:r>
+              <a:rPr sz="1400" b="0" i="1">
+                <a:solidFill>
+                  <a:srgbClr val="152B4C"/>
+                </a:solidFill>
+                <a:latin typeface="Arial"/>
+              </a:rPr>
+              <a:t>As routine output becomes easier to reproduce, the distinction between familiar performance and growing judgment becomes more consequential.</a:t>
             </a:r>
           </a:p>
         </p:txBody>
@@ -6466,242 +7041,6 @@
       <p:sp>
         <p:nvSpPr>
           <p:cNvPr id="8" name="TextBox 7"/>
-          <p:cNvSpPr txBox="1"/>
-          <p:nvPr/>
-        </p:nvSpPr>
-        <p:spPr>
-          <a:xfrm>
-            <a:off x="6583680" y="2880360"/>
-            <a:ext cx="4846320" cy="274320"/>
-          </a:xfrm>
-          <a:prstGeom prst="rect">
-            <a:avLst/>
-          </a:prstGeom>
-          <a:noFill/>
-        </p:spPr>
-        <p:txBody>
-          <a:bodyPr wrap="square" lIns="0" rIns="0" tIns="0" bIns="0" anchor="t">
-            <a:spAutoFit/>
-          </a:bodyPr>
-          <a:lstStyle/>
-          <a:p>
-            <a:pPr algn="l">
-              <a:lnSpc>
-                <a:spcPct val="115000"/>
-              </a:lnSpc>
-            </a:pPr>
-            <a:r>
-              <a:rPr sz="1100" b="1" i="0" spc="100">
-                <a:solidFill>
-                  <a:srgbClr val="C1440E"/>
-                </a:solidFill>
-                <a:latin typeface="Arial"/>
-              </a:rPr>
-              <a:t>THE WORKSHOP: ASSESSMENT + DECISION</a:t>
-            </a:r>
-          </a:p>
-        </p:txBody>
-      </p:sp>
-      <p:sp>
-        <p:nvSpPr>
-          <p:cNvPr id="9" name="TextBox 8"/>
-          <p:cNvSpPr txBox="1"/>
-          <p:nvPr/>
-        </p:nvSpPr>
-        <p:spPr>
-          <a:xfrm>
-            <a:off x="6583680" y="3291840"/>
-            <a:ext cx="4846320" cy="1737360"/>
-          </a:xfrm>
-          <a:prstGeom prst="rect">
-            <a:avLst/>
-          </a:prstGeom>
-          <a:noFill/>
-        </p:spPr>
-        <p:txBody>
-          <a:bodyPr wrap="square" lIns="0" rIns="0" tIns="0" bIns="0" anchor="t">
-            <a:spAutoFit/>
-          </a:bodyPr>
-          <a:lstStyle/>
-          <a:p>
-            <a:pPr algn="l">
-              <a:lnSpc>
-                <a:spcPct val="130000"/>
-              </a:lnSpc>
-            </a:pPr>
-            <a:r>
-              <a:rPr sz="1250" b="0" i="0">
-                <a:solidFill>
-                  <a:srgbClr val="0F2347"/>
-                </a:solidFill>
-                <a:latin typeface="Arial"/>
-              </a:rPr>
-              <a:t>The complete 12-statement initial read</a:t>
-            </a:r>
-          </a:p>
-          <a:p>
-            <a:pPr algn="l">
-              <a:lnSpc>
-                <a:spcPct val="130000"/>
-              </a:lnSpc>
-            </a:pPr>
-            <a:r>
-              <a:rPr sz="1250" b="0" i="0">
-                <a:solidFill>
-                  <a:srgbClr val="0F2347"/>
-                </a:solidFill>
-                <a:latin typeface="Arial"/>
-              </a:rPr>
-              <a:t>Evidence correction and an evidence-backed second read</a:t>
-            </a:r>
-          </a:p>
-          <a:p>
-            <a:pPr algn="l">
-              <a:lnSpc>
-                <a:spcPct val="130000"/>
-              </a:lnSpc>
-            </a:pPr>
-            <a:r>
-              <a:rPr sz="1250" b="0" i="0">
-                <a:solidFill>
-                  <a:srgbClr val="0F2347"/>
-                </a:solidFill>
-                <a:latin typeface="Arial"/>
-              </a:rPr>
-              <a:t>Provisional placement or boundary reading</a:t>
-            </a:r>
-          </a:p>
-          <a:p>
-            <a:pPr algn="l">
-              <a:lnSpc>
-                <a:spcPct val="130000"/>
-              </a:lnSpc>
-            </a:pPr>
-            <a:r>
-              <a:rPr sz="1250" b="0" i="0">
-                <a:solidFill>
-                  <a:srgbClr val="0F2347"/>
-                </a:solidFill>
-                <a:latin typeface="Arial"/>
-              </a:rPr>
-              <a:t>One category of move to test</a:t>
-            </a:r>
-          </a:p>
-          <a:p>
-            <a:pPr algn="l">
-              <a:lnSpc>
-                <a:spcPct val="130000"/>
-              </a:lnSpc>
-            </a:pPr>
-            <a:r>
-              <a:rPr sz="1250" b="0" i="0">
-                <a:solidFill>
-                  <a:srgbClr val="0F2347"/>
-                </a:solidFill>
-                <a:latin typeface="Arial"/>
-              </a:rPr>
-              <a:t>A completed Next-Move Decision</a:t>
-            </a:r>
-          </a:p>
-          <a:p>
-            <a:pPr algn="l">
-              <a:lnSpc>
-                <a:spcPct val="130000"/>
-              </a:lnSpc>
-            </a:pPr>
-            <a:r>
-              <a:rPr sz="1250" b="0" i="0">
-                <a:solidFill>
-                  <a:srgbClr val="0F2347"/>
-                </a:solidFill>
-                <a:latin typeface="Arial"/>
-              </a:rPr>
-              <a:t>A 30-day evidence process and a 90-day rescore date</a:t>
-            </a:r>
-          </a:p>
-        </p:txBody>
-      </p:sp>
-      <p:sp>
-        <p:nvSpPr>
-          <p:cNvPr id="10" name="TextBox 9"/>
-          <p:cNvSpPr txBox="1"/>
-          <p:nvPr/>
-        </p:nvSpPr>
-        <p:spPr>
-          <a:xfrm>
-            <a:off x="658368" y="5303520"/>
-            <a:ext cx="10698480" cy="365760"/>
-          </a:xfrm>
-          <a:prstGeom prst="rect">
-            <a:avLst/>
-          </a:prstGeom>
-          <a:noFill/>
-        </p:spPr>
-        <p:txBody>
-          <a:bodyPr wrap="square" lIns="0" rIns="0" tIns="0" bIns="0" anchor="t">
-            <a:spAutoFit/>
-          </a:bodyPr>
-          <a:lstStyle/>
-          <a:p>
-            <a:pPr algn="l">
-              <a:lnSpc>
-                <a:spcPct val="130000"/>
-              </a:lnSpc>
-            </a:pPr>
-            <a:r>
-              <a:rPr sz="1300" b="0" i="1">
-                <a:solidFill>
-                  <a:srgbClr val="152B4C"/>
-                </a:solidFill>
-                <a:latin typeface="Arial"/>
-              </a:rPr>
-              <a:t>The full Capability Position Read measures these patterns more rigorously through Density and Optionality.</a:t>
-            </a:r>
-          </a:p>
-        </p:txBody>
-      </p:sp>
-      <p:sp>
-        <p:nvSpPr>
-          <p:cNvPr id="11" name="TextBox 10"/>
-          <p:cNvSpPr txBox="1"/>
-          <p:nvPr/>
-        </p:nvSpPr>
-        <p:spPr>
-          <a:xfrm>
-            <a:off x="658368" y="5760720"/>
-            <a:ext cx="10698480" cy="640080"/>
-          </a:xfrm>
-          <a:prstGeom prst="rect">
-            <a:avLst/>
-          </a:prstGeom>
-          <a:noFill/>
-        </p:spPr>
-        <p:txBody>
-          <a:bodyPr wrap="square" lIns="0" rIns="0" tIns="0" bIns="0" anchor="t">
-            <a:spAutoFit/>
-          </a:bodyPr>
-          <a:lstStyle/>
-          <a:p>
-            <a:pPr algn="l">
-              <a:lnSpc>
-                <a:spcPct val="125000"/>
-              </a:lnSpc>
-            </a:pPr>
-            <a:r>
-              <a:rPr sz="1600" b="1" i="1">
-                <a:solidFill>
-                  <a:srgbClr val="0F2347"/>
-                </a:solidFill>
-                <a:latin typeface="Georgia"/>
-              </a:rPr>
-              <a:t>Most career advice begins after you decide to leave. This helps you determine whether leaving is even the right question.</a:t>
-            </a:r>
-          </a:p>
-        </p:txBody>
-      </p:sp>
-      <p:sp>
-        <p:nvSpPr>
-          <p:cNvPr id="12" name="TextBox 11"/>
           <p:cNvSpPr txBox="1"/>
           <p:nvPr/>
         </p:nvSpPr>
@@ -6740,7 +7079,7 @@
       </p:sp>
       <p:sp>
         <p:nvSpPr>
-          <p:cNvPr id="13" name="TextBox 12"/>
+          <p:cNvPr id="9" name="TextBox 8"/>
           <p:cNvSpPr txBox="1"/>
           <p:nvPr/>
         </p:nvSpPr>
@@ -6786,6 +7125,638 @@
 </file>
 
 <file path=ppt/slides/slide12.xml><?xml version="1.0" encoding="utf-8"?>
+<p:sld xmlns:a="http://schemas.openxmlformats.org/drawingml/2006/main" xmlns:p="http://schemas.openxmlformats.org/presentationml/2006/main" xmlns:r="http://schemas.openxmlformats.org/officeDocument/2006/relationships">
+  <p:cSld>
+    <p:bg>
+      <p:bgPr>
+        <a:solidFill>
+          <a:srgbClr val="F5F0E8"/>
+        </a:solidFill>
+        <a:effectLst/>
+      </p:bgPr>
+    </p:bg>
+    <p:spTree>
+      <p:nvGrpSpPr>
+        <p:cNvPr id="1" name=""/>
+        <p:cNvGrpSpPr/>
+        <p:nvPr/>
+      </p:nvGrpSpPr>
+      <p:grpSpPr/>
+      <p:sp>
+        <p:nvSpPr>
+          <p:cNvPr id="2" name="TextBox 1"/>
+          <p:cNvSpPr txBox="1"/>
+          <p:nvPr/>
+        </p:nvSpPr>
+        <p:spPr>
+          <a:xfrm>
+            <a:off x="658368" y="548640"/>
+            <a:ext cx="7772400" cy="201168"/>
+          </a:xfrm>
+          <a:prstGeom prst="rect">
+            <a:avLst/>
+          </a:prstGeom>
+          <a:noFill/>
+        </p:spPr>
+        <p:txBody>
+          <a:bodyPr wrap="square" lIns="0" rIns="0" tIns="0" bIns="0" anchor="t">
+            <a:spAutoFit/>
+          </a:bodyPr>
+          <a:lstStyle/>
+          <a:p>
+            <a:pPr algn="l">
+              <a:lnSpc>
+                <a:spcPct val="115000"/>
+              </a:lnSpc>
+            </a:pPr>
+            <a:r>
+              <a:rPr sz="900" b="1" i="0" spc="200">
+                <a:solidFill>
+                  <a:srgbClr val="C9A84C"/>
+                </a:solidFill>
+                <a:latin typeface="Arial"/>
+              </a:rPr>
+              <a:t>THIS WAS ONE PIECE</a:t>
+            </a:r>
+          </a:p>
+        </p:txBody>
+      </p:sp>
+      <p:sp>
+        <p:nvSpPr>
+          <p:cNvPr id="3" name="TextBox 2"/>
+          <p:cNvSpPr txBox="1"/>
+          <p:nvPr/>
+        </p:nvSpPr>
+        <p:spPr>
+          <a:xfrm>
+            <a:off x="658368" y="1371600"/>
+            <a:ext cx="10424160" cy="1234440"/>
+          </a:xfrm>
+          <a:prstGeom prst="rect">
+            <a:avLst/>
+          </a:prstGeom>
+          <a:noFill/>
+        </p:spPr>
+        <p:txBody>
+          <a:bodyPr wrap="square" lIns="0" rIns="0" tIns="0" bIns="0" anchor="t">
+            <a:spAutoFit/>
+          </a:bodyPr>
+          <a:lstStyle/>
+          <a:p>
+            <a:pPr algn="l">
+              <a:lnSpc>
+                <a:spcPct val="110000"/>
+              </a:lnSpc>
+            </a:pPr>
+            <a:r>
+              <a:rPr sz="3300" b="1" i="0">
+                <a:solidFill>
+                  <a:srgbClr val="0F2347"/>
+                </a:solidFill>
+                <a:latin typeface="Georgia"/>
+              </a:rPr>
+              <a:t>Recognition Is the</a:t>
+            </a:r>
+          </a:p>
+          <a:p>
+            <a:pPr algn="l">
+              <a:lnSpc>
+                <a:spcPct val="110000"/>
+              </a:lnSpc>
+            </a:pPr>
+            <a:r>
+              <a:rPr sz="3300" b="1" i="0">
+                <a:solidFill>
+                  <a:srgbClr val="0F2347"/>
+                </a:solidFill>
+                <a:latin typeface="Georgia"/>
+              </a:rPr>
+              <a:t>Beginning of the Read</a:t>
+            </a:r>
+          </a:p>
+        </p:txBody>
+      </p:sp>
+      <p:sp>
+        <p:nvSpPr>
+          <p:cNvPr id="4" name="Rectangle 3"/>
+          <p:cNvSpPr/>
+          <p:nvPr/>
+        </p:nvSpPr>
+        <p:spPr>
+          <a:xfrm>
+            <a:off x="658368" y="2697480"/>
+            <a:ext cx="5166360" cy="2331720"/>
+          </a:xfrm>
+          <a:prstGeom prst="rect">
+            <a:avLst/>
+          </a:prstGeom>
+          <a:solidFill>
+            <a:srgbClr val="FBF7EF"/>
+          </a:solidFill>
+          <a:ln>
+            <a:noFill/>
+          </a:ln>
+          <a:effectLst/>
+        </p:spPr>
+        <p:style>
+          <a:lnRef idx="1">
+            <a:schemeClr val="accent1"/>
+          </a:lnRef>
+          <a:fillRef idx="3">
+            <a:schemeClr val="accent1"/>
+          </a:fillRef>
+          <a:effectRef idx="2">
+            <a:schemeClr val="accent1"/>
+          </a:effectRef>
+          <a:fontRef idx="minor">
+            <a:schemeClr val="lt1"/>
+          </a:fontRef>
+        </p:style>
+        <p:txBody>
+          <a:bodyPr rtlCol="0" anchor="ctr"/>
+          <a:lstStyle/>
+          <a:p>
+            <a:pPr algn="ctr"/>
+          </a:p>
+        </p:txBody>
+      </p:sp>
+      <p:sp>
+        <p:nvSpPr>
+          <p:cNvPr id="5" name="Rectangle 4"/>
+          <p:cNvSpPr/>
+          <p:nvPr/>
+        </p:nvSpPr>
+        <p:spPr>
+          <a:xfrm>
+            <a:off x="6345936" y="2697480"/>
+            <a:ext cx="5166360" cy="2331720"/>
+          </a:xfrm>
+          <a:prstGeom prst="rect">
+            <a:avLst/>
+          </a:prstGeom>
+          <a:solidFill>
+            <a:srgbClr val="FBF7EF"/>
+          </a:solidFill>
+          <a:ln>
+            <a:noFill/>
+          </a:ln>
+          <a:effectLst/>
+        </p:spPr>
+        <p:style>
+          <a:lnRef idx="1">
+            <a:schemeClr val="accent1"/>
+          </a:lnRef>
+          <a:fillRef idx="3">
+            <a:schemeClr val="accent1"/>
+          </a:fillRef>
+          <a:effectRef idx="2">
+            <a:schemeClr val="accent1"/>
+          </a:effectRef>
+          <a:fontRef idx="minor">
+            <a:schemeClr val="lt1"/>
+          </a:fontRef>
+        </p:style>
+        <p:txBody>
+          <a:bodyPr rtlCol="0" anchor="ctr"/>
+          <a:lstStyle/>
+          <a:p>
+            <a:pPr algn="ctr"/>
+          </a:p>
+        </p:txBody>
+      </p:sp>
+      <p:sp>
+        <p:nvSpPr>
+          <p:cNvPr id="6" name="TextBox 5"/>
+          <p:cNvSpPr txBox="1"/>
+          <p:nvPr/>
+        </p:nvSpPr>
+        <p:spPr>
+          <a:xfrm>
+            <a:off x="896112" y="2880360"/>
+            <a:ext cx="4663440" cy="274320"/>
+          </a:xfrm>
+          <a:prstGeom prst="rect">
+            <a:avLst/>
+          </a:prstGeom>
+          <a:noFill/>
+        </p:spPr>
+        <p:txBody>
+          <a:bodyPr wrap="square" lIns="0" rIns="0" tIns="0" bIns="0" anchor="t">
+            <a:spAutoFit/>
+          </a:bodyPr>
+          <a:lstStyle/>
+          <a:p>
+            <a:pPr algn="l">
+              <a:lnSpc>
+                <a:spcPct val="115000"/>
+              </a:lnSpc>
+            </a:pPr>
+            <a:r>
+              <a:rPr sz="1100" b="1" i="0" spc="150">
+                <a:solidFill>
+                  <a:srgbClr val="C9A84C"/>
+                </a:solidFill>
+                <a:latin typeface="Arial"/>
+              </a:rPr>
+              <a:t>TODAY: RECOGNITION</a:t>
+            </a:r>
+          </a:p>
+        </p:txBody>
+      </p:sp>
+      <p:sp>
+        <p:nvSpPr>
+          <p:cNvPr id="7" name="TextBox 6"/>
+          <p:cNvSpPr txBox="1"/>
+          <p:nvPr/>
+        </p:nvSpPr>
+        <p:spPr>
+          <a:xfrm>
+            <a:off x="896112" y="3291840"/>
+            <a:ext cx="4663440" cy="1554480"/>
+          </a:xfrm>
+          <a:prstGeom prst="rect">
+            <a:avLst/>
+          </a:prstGeom>
+          <a:noFill/>
+        </p:spPr>
+        <p:txBody>
+          <a:bodyPr wrap="square" lIns="0" rIns="0" tIns="0" bIns="0" anchor="t">
+            <a:spAutoFit/>
+          </a:bodyPr>
+          <a:lstStyle/>
+          <a:p>
+            <a:pPr algn="l">
+              <a:lnSpc>
+                <a:spcPct val="140000"/>
+              </a:lnSpc>
+            </a:pPr>
+            <a:r>
+              <a:rPr sz="1900" b="1" i="0">
+                <a:solidFill>
+                  <a:srgbClr val="0F2347"/>
+                </a:solidFill>
+                <a:latin typeface="Georgia"/>
+              </a:rPr>
+              <a:t>Repeated work.</a:t>
+            </a:r>
+          </a:p>
+          <a:p>
+            <a:pPr algn="l">
+              <a:lnSpc>
+                <a:spcPct val="140000"/>
+              </a:lnSpc>
+            </a:pPr>
+            <a:r>
+              <a:rPr sz="1900" b="1" i="0">
+                <a:solidFill>
+                  <a:srgbClr val="0F2347"/>
+                </a:solidFill>
+                <a:latin typeface="Georgia"/>
+              </a:rPr>
+              <a:t>Context-bound value.</a:t>
+            </a:r>
+          </a:p>
+          <a:p>
+            <a:pPr algn="l">
+              <a:lnSpc>
+                <a:spcPct val="140000"/>
+              </a:lnSpc>
+            </a:pPr>
+            <a:r>
+              <a:rPr sz="1900" b="1" i="0">
+                <a:solidFill>
+                  <a:srgbClr val="0F2347"/>
+                </a:solidFill>
+                <a:latin typeface="Georgia"/>
+              </a:rPr>
+              <a:t>Responsibility without capability expansion.</a:t>
+            </a:r>
+          </a:p>
+        </p:txBody>
+      </p:sp>
+      <p:sp>
+        <p:nvSpPr>
+          <p:cNvPr id="8" name="TextBox 7"/>
+          <p:cNvSpPr txBox="1"/>
+          <p:nvPr/>
+        </p:nvSpPr>
+        <p:spPr>
+          <a:xfrm>
+            <a:off x="6583680" y="2880360"/>
+            <a:ext cx="4846320" cy="274320"/>
+          </a:xfrm>
+          <a:prstGeom prst="rect">
+            <a:avLst/>
+          </a:prstGeom>
+          <a:noFill/>
+        </p:spPr>
+        <p:txBody>
+          <a:bodyPr wrap="square" lIns="0" rIns="0" tIns="0" bIns="0" anchor="t">
+            <a:spAutoFit/>
+          </a:bodyPr>
+          <a:lstStyle/>
+          <a:p>
+            <a:pPr algn="l">
+              <a:lnSpc>
+                <a:spcPct val="115000"/>
+              </a:lnSpc>
+            </a:pPr>
+            <a:r>
+              <a:rPr sz="1100" b="1" i="0" spc="100">
+                <a:solidFill>
+                  <a:srgbClr val="C1440E"/>
+                </a:solidFill>
+                <a:latin typeface="Arial"/>
+              </a:rPr>
+              <a:t>THE WORKSHOP: ASSESSMENT + DECISION</a:t>
+            </a:r>
+          </a:p>
+        </p:txBody>
+      </p:sp>
+      <p:sp>
+        <p:nvSpPr>
+          <p:cNvPr id="9" name="TextBox 8"/>
+          <p:cNvSpPr txBox="1"/>
+          <p:nvPr/>
+        </p:nvSpPr>
+        <p:spPr>
+          <a:xfrm>
+            <a:off x="6583680" y="3291840"/>
+            <a:ext cx="4846320" cy="1737360"/>
+          </a:xfrm>
+          <a:prstGeom prst="rect">
+            <a:avLst/>
+          </a:prstGeom>
+          <a:noFill/>
+        </p:spPr>
+        <p:txBody>
+          <a:bodyPr wrap="square" lIns="0" rIns="0" tIns="0" bIns="0" anchor="t">
+            <a:spAutoFit/>
+          </a:bodyPr>
+          <a:lstStyle/>
+          <a:p>
+            <a:pPr algn="l">
+              <a:lnSpc>
+                <a:spcPct val="130000"/>
+              </a:lnSpc>
+            </a:pPr>
+            <a:r>
+              <a:rPr sz="1250" b="0" i="0">
+                <a:solidFill>
+                  <a:srgbClr val="0F2347"/>
+                </a:solidFill>
+                <a:latin typeface="Arial"/>
+              </a:rPr>
+              <a:t>The complete 12-statement initial read</a:t>
+            </a:r>
+          </a:p>
+          <a:p>
+            <a:pPr algn="l">
+              <a:lnSpc>
+                <a:spcPct val="130000"/>
+              </a:lnSpc>
+            </a:pPr>
+            <a:r>
+              <a:rPr sz="1250" b="0" i="0">
+                <a:solidFill>
+                  <a:srgbClr val="0F2347"/>
+                </a:solidFill>
+                <a:latin typeface="Arial"/>
+              </a:rPr>
+              <a:t>Evidence correction and an evidence-backed second read</a:t>
+            </a:r>
+          </a:p>
+          <a:p>
+            <a:pPr algn="l">
+              <a:lnSpc>
+                <a:spcPct val="130000"/>
+              </a:lnSpc>
+            </a:pPr>
+            <a:r>
+              <a:rPr sz="1250" b="0" i="0">
+                <a:solidFill>
+                  <a:srgbClr val="0F2347"/>
+                </a:solidFill>
+                <a:latin typeface="Arial"/>
+              </a:rPr>
+              <a:t>Provisional placement or boundary reading</a:t>
+            </a:r>
+          </a:p>
+          <a:p>
+            <a:pPr algn="l">
+              <a:lnSpc>
+                <a:spcPct val="130000"/>
+              </a:lnSpc>
+            </a:pPr>
+            <a:r>
+              <a:rPr sz="1250" b="0" i="0">
+                <a:solidFill>
+                  <a:srgbClr val="0F2347"/>
+                </a:solidFill>
+                <a:latin typeface="Arial"/>
+              </a:rPr>
+              <a:t>One category of move to test</a:t>
+            </a:r>
+          </a:p>
+          <a:p>
+            <a:pPr algn="l">
+              <a:lnSpc>
+                <a:spcPct val="130000"/>
+              </a:lnSpc>
+            </a:pPr>
+            <a:r>
+              <a:rPr sz="1250" b="0" i="0">
+                <a:solidFill>
+                  <a:srgbClr val="0F2347"/>
+                </a:solidFill>
+                <a:latin typeface="Arial"/>
+              </a:rPr>
+              <a:t>A completed Next-Move Decision</a:t>
+            </a:r>
+          </a:p>
+          <a:p>
+            <a:pPr algn="l">
+              <a:lnSpc>
+                <a:spcPct val="130000"/>
+              </a:lnSpc>
+            </a:pPr>
+            <a:r>
+              <a:rPr sz="1250" b="0" i="0">
+                <a:solidFill>
+                  <a:srgbClr val="0F2347"/>
+                </a:solidFill>
+                <a:latin typeface="Arial"/>
+              </a:rPr>
+              <a:t>A 30-day evidence process and a 90-day rescore date</a:t>
+            </a:r>
+          </a:p>
+        </p:txBody>
+      </p:sp>
+      <p:sp>
+        <p:nvSpPr>
+          <p:cNvPr id="10" name="TextBox 9"/>
+          <p:cNvSpPr txBox="1"/>
+          <p:nvPr/>
+        </p:nvSpPr>
+        <p:spPr>
+          <a:xfrm>
+            <a:off x="658368" y="5303520"/>
+            <a:ext cx="10698480" cy="365760"/>
+          </a:xfrm>
+          <a:prstGeom prst="rect">
+            <a:avLst/>
+          </a:prstGeom>
+          <a:noFill/>
+        </p:spPr>
+        <p:txBody>
+          <a:bodyPr wrap="square" lIns="0" rIns="0" tIns="0" bIns="0" anchor="t">
+            <a:spAutoFit/>
+          </a:bodyPr>
+          <a:lstStyle/>
+          <a:p>
+            <a:pPr algn="l">
+              <a:lnSpc>
+                <a:spcPct val="130000"/>
+              </a:lnSpc>
+            </a:pPr>
+            <a:r>
+              <a:rPr sz="1300" b="0" i="1">
+                <a:solidFill>
+                  <a:srgbClr val="152B4C"/>
+                </a:solidFill>
+                <a:latin typeface="Arial"/>
+              </a:rPr>
+              <a:t>The full Capability Position Read measures these patterns more rigorously through Density and Optionality.</a:t>
+            </a:r>
+          </a:p>
+        </p:txBody>
+      </p:sp>
+      <p:sp>
+        <p:nvSpPr>
+          <p:cNvPr id="11" name="TextBox 10"/>
+          <p:cNvSpPr txBox="1"/>
+          <p:nvPr/>
+        </p:nvSpPr>
+        <p:spPr>
+          <a:xfrm>
+            <a:off x="658368" y="5760720"/>
+            <a:ext cx="10698480" cy="640080"/>
+          </a:xfrm>
+          <a:prstGeom prst="rect">
+            <a:avLst/>
+          </a:prstGeom>
+          <a:noFill/>
+        </p:spPr>
+        <p:txBody>
+          <a:bodyPr wrap="square" lIns="0" rIns="0" tIns="0" bIns="0" anchor="t">
+            <a:spAutoFit/>
+          </a:bodyPr>
+          <a:lstStyle/>
+          <a:p>
+            <a:pPr algn="l">
+              <a:lnSpc>
+                <a:spcPct val="125000"/>
+              </a:lnSpc>
+            </a:pPr>
+            <a:r>
+              <a:rPr sz="1600" b="1" i="1">
+                <a:solidFill>
+                  <a:srgbClr val="0F2347"/>
+                </a:solidFill>
+                <a:latin typeface="Georgia"/>
+              </a:rPr>
+              <a:t>Most career advice begins after you decide to leave. This helps you determine whether leaving is even the right question.</a:t>
+            </a:r>
+          </a:p>
+        </p:txBody>
+      </p:sp>
+      <p:sp>
+        <p:nvSpPr>
+          <p:cNvPr id="12" name="TextBox 11"/>
+          <p:cNvSpPr txBox="1"/>
+          <p:nvPr/>
+        </p:nvSpPr>
+        <p:spPr>
+          <a:xfrm>
+            <a:off x="658368" y="6464808"/>
+            <a:ext cx="4937760" cy="164592"/>
+          </a:xfrm>
+          <a:prstGeom prst="rect">
+            <a:avLst/>
+          </a:prstGeom>
+          <a:noFill/>
+        </p:spPr>
+        <p:txBody>
+          <a:bodyPr wrap="square" lIns="0" rIns="0" tIns="0" bIns="0" anchor="t">
+            <a:spAutoFit/>
+          </a:bodyPr>
+          <a:lstStyle/>
+          <a:p>
+            <a:pPr algn="l">
+              <a:lnSpc>
+                <a:spcPct val="115000"/>
+              </a:lnSpc>
+            </a:pPr>
+            <a:r>
+              <a:rPr sz="760" b="1" i="0" spc="150">
+                <a:solidFill>
+                  <a:srgbClr val="0F2347"/>
+                </a:solidFill>
+                <a:latin typeface="Arial"/>
+              </a:rPr>
+              <a:t>TEMIDAYO AFONJA   |   TEMIDAYOAFONJA.COM</a:t>
+            </a:r>
+          </a:p>
+        </p:txBody>
+      </p:sp>
+      <p:sp>
+        <p:nvSpPr>
+          <p:cNvPr id="13" name="TextBox 12"/>
+          <p:cNvSpPr txBox="1"/>
+          <p:nvPr/>
+        </p:nvSpPr>
+        <p:spPr>
+          <a:xfrm>
+            <a:off x="11430000" y="6464808"/>
+            <a:ext cx="256032" cy="164592"/>
+          </a:xfrm>
+          <a:prstGeom prst="rect">
+            <a:avLst/>
+          </a:prstGeom>
+          <a:noFill/>
+        </p:spPr>
+        <p:txBody>
+          <a:bodyPr wrap="square" lIns="0" rIns="0" tIns="0" bIns="0" anchor="t">
+            <a:spAutoFit/>
+          </a:bodyPr>
+          <a:lstStyle/>
+          <a:p>
+            <a:pPr algn="r">
+              <a:lnSpc>
+                <a:spcPct val="115000"/>
+              </a:lnSpc>
+            </a:pPr>
+            <a:r>
+              <a:rPr sz="760" b="1" i="0">
+                <a:solidFill>
+                  <a:srgbClr val="0F2347"/>
+                </a:solidFill>
+                <a:latin typeface="Arial"/>
+              </a:rPr>
+              <a:t>12</a:t>
+            </a:r>
+          </a:p>
+        </p:txBody>
+      </p:sp>
+    </p:spTree>
+  </p:cSld>
+  <p:clrMapOvr>
+    <a:masterClrMapping/>
+  </p:clrMapOvr>
+</p:sld>
+</file>
+
+<file path=ppt/slides/slide13.xml><?xml version="1.0" encoding="utf-8"?>
 <p:sld xmlns:a="http://schemas.openxmlformats.org/drawingml/2006/main" xmlns:p="http://schemas.openxmlformats.org/presentationml/2006/main" xmlns:r="http://schemas.openxmlformats.org/officeDocument/2006/relationships">
   <p:cSld>
     <p:bg>
@@ -7458,7 +8429,7 @@
                 </a:solidFill>
                 <a:latin typeface="Arial"/>
               </a:rPr>
-              <a:t>12</a:t>
+              <a:t>13</a:t>
             </a:r>
           </a:p>
         </p:txBody>
@@ -7471,7 +8442,7 @@
 </p:sld>
 </file>
 
-<file path=ppt/slides/slide13.xml><?xml version="1.0" encoding="utf-8"?>
+<file path=ppt/slides/slide14.xml><?xml version="1.0" encoding="utf-8"?>
 <p:sld xmlns:a="http://schemas.openxmlformats.org/drawingml/2006/main" xmlns:p="http://schemas.openxmlformats.org/presentationml/2006/main" xmlns:r="http://schemas.openxmlformats.org/officeDocument/2006/relationships" show="0">
   <p:cSld>
     <p:bg>
@@ -8245,7 +9216,7 @@
                 </a:solidFill>
                 <a:latin typeface="Arial"/>
               </a:rPr>
-              <a:t>13</a:t>
+              <a:t>14</a:t>
             </a:r>
           </a:p>
         </p:txBody>
@@ -8258,7 +9229,7 @@
 </p:sld>
 </file>
 
-<file path=ppt/slides/slide14.xml><?xml version="1.0" encoding="utf-8"?>
+<file path=ppt/slides/slide15.xml><?xml version="1.0" encoding="utf-8"?>
 <p:sld xmlns:a="http://schemas.openxmlformats.org/drawingml/2006/main" xmlns:p="http://schemas.openxmlformats.org/presentationml/2006/main" xmlns:r="http://schemas.openxmlformats.org/officeDocument/2006/relationships">
   <p:cSld>
     <p:bg>
@@ -8620,7 +9591,7 @@
                 </a:solidFill>
                 <a:latin typeface="Arial"/>
               </a:rPr>
-              <a:t>14</a:t>
+              <a:t>15</a:t>
             </a:r>
           </a:p>
         </p:txBody>
@@ -9259,7 +10230,7 @@
                 </a:solidFill>
                 <a:latin typeface="Arial"/>
               </a:rPr>
-              <a:t>OPENING POLL</a:t>
+              <a:t>BOUNDARY</a:t>
             </a:r>
           </a:p>
         </p:txBody>
@@ -9272,7 +10243,7 @@
         </p:nvSpPr>
         <p:spPr>
           <a:xfrm>
-            <a:off x="658368" y="1143000"/>
+            <a:off x="658368" y="1097280"/>
             <a:ext cx="9875520" cy="685800"/>
           </a:xfrm>
           <a:prstGeom prst="rect">
@@ -9298,71 +10269,30 @@
                 </a:solidFill>
                 <a:latin typeface="Georgia"/>
               </a:rPr>
-              <a:t>What brought you here today?</a:t>
-            </a:r>
-          </a:p>
-        </p:txBody>
-      </p:sp>
-      <p:sp>
-        <p:nvSpPr>
-          <p:cNvPr id="4" name="TextBox 3"/>
-          <p:cNvSpPr txBox="1"/>
-          <p:nvPr/>
-        </p:nvSpPr>
-        <p:spPr>
-          <a:xfrm>
-            <a:off x="676656" y="1828800"/>
-            <a:ext cx="8778240" cy="411480"/>
-          </a:xfrm>
-          <a:prstGeom prst="rect">
-            <a:avLst/>
-          </a:prstGeom>
-          <a:noFill/>
-        </p:spPr>
-        <p:txBody>
-          <a:bodyPr wrap="square" lIns="0" rIns="0" tIns="0" bIns="0" anchor="t">
-            <a:spAutoFit/>
-          </a:bodyPr>
-          <a:lstStyle/>
-          <a:p>
-            <a:pPr algn="l">
-              <a:lnSpc>
-                <a:spcPct val="115000"/>
-              </a:lnSpc>
-            </a:pPr>
-            <a:r>
-              <a:rPr sz="1500" b="0" i="0">
-                <a:solidFill>
-                  <a:srgbClr val="152B4C"/>
-                </a:solidFill>
-                <a:latin typeface="Arial"/>
-              </a:rPr>
-              <a:t>Choose the closest reason. No explanation needed.</a:t>
-            </a:r>
-          </a:p>
-        </p:txBody>
-      </p:sp>
-      <p:sp>
-        <p:nvSpPr>
-          <p:cNvPr id="5" name="Rectangle 4"/>
+              <a:t>What this lesson will not do.</a:t>
+            </a:r>
+          </a:p>
+        </p:txBody>
+      </p:sp>
+      <p:sp>
+        <p:nvSpPr>
+          <p:cNvPr id="4" name="Rectangle 3"/>
           <p:cNvSpPr/>
           <p:nvPr/>
         </p:nvSpPr>
         <p:spPr>
           <a:xfrm>
-            <a:off x="868680" y="2514600"/>
-            <a:ext cx="4800600" cy="603504"/>
+            <a:off x="676656" y="1783080"/>
+            <a:ext cx="3840480" cy="22860"/>
           </a:xfrm>
           <a:prstGeom prst="rect">
             <a:avLst/>
           </a:prstGeom>
           <a:solidFill>
-            <a:srgbClr val="FBF7EF"/>
+            <a:srgbClr val="C9A84C"/>
           </a:solidFill>
-          <a:ln w="12700">
-            <a:solidFill>
-              <a:srgbClr val="C9A84C"/>
-            </a:solidFill>
+          <a:ln>
+            <a:noFill/>
           </a:ln>
           <a:effectLst/>
         </p:spPr>
@@ -9390,495 +10320,46 @@
       </p:sp>
       <p:sp>
         <p:nvSpPr>
+          <p:cNvPr id="5" name="TextBox 4"/>
+          <p:cNvSpPr txBox="1"/>
+          <p:nvPr/>
+        </p:nvSpPr>
+        <p:spPr>
+          <a:xfrm>
+            <a:off x="676656" y="2103120"/>
+            <a:ext cx="10058400" cy="1005840"/>
+          </a:xfrm>
+          <a:prstGeom prst="rect">
+            <a:avLst/>
+          </a:prstGeom>
+          <a:noFill/>
+        </p:spPr>
+        <p:txBody>
+          <a:bodyPr wrap="square" lIns="0" rIns="0" tIns="0" bIns="0" anchor="t">
+            <a:spAutoFit/>
+          </a:bodyPr>
+          <a:lstStyle/>
+          <a:p>
+            <a:pPr algn="l">
+              <a:lnSpc>
+                <a:spcPct val="135000"/>
+              </a:lnSpc>
+            </a:pPr>
+            <a:r>
+              <a:rPr sz="1800" b="0" i="0">
+                <a:solidFill>
+                  <a:srgbClr val="152B4C"/>
+                </a:solidFill>
+                <a:latin typeface="Arial"/>
+              </a:rPr>
+              <a:t>This free lesson will not tell you whether to stay or leave, place you into a Career State, or replace the full Position Read. It will help you recognize three signs worth examining in your own work.</a:t>
+            </a:r>
+          </a:p>
+        </p:txBody>
+      </p:sp>
+      <p:sp>
+        <p:nvSpPr>
           <p:cNvPr id="6" name="TextBox 5"/>
-          <p:cNvSpPr txBox="1"/>
-          <p:nvPr/>
-        </p:nvSpPr>
-        <p:spPr>
-          <a:xfrm>
-            <a:off x="1069848" y="2679192"/>
-            <a:ext cx="4389120" cy="274320"/>
-          </a:xfrm>
-          <a:prstGeom prst="rect">
-            <a:avLst/>
-          </a:prstGeom>
-          <a:noFill/>
-        </p:spPr>
-        <p:txBody>
-          <a:bodyPr wrap="square" lIns="0" rIns="0" tIns="0" bIns="0" anchor="t">
-            <a:spAutoFit/>
-          </a:bodyPr>
-          <a:lstStyle/>
-          <a:p>
-            <a:pPr algn="l">
-              <a:lnSpc>
-                <a:spcPct val="115000"/>
-              </a:lnSpc>
-            </a:pPr>
-            <a:r>
-              <a:rPr sz="1400" b="0" i="0">
-                <a:solidFill>
-                  <a:srgbClr val="0F2347"/>
-                </a:solidFill>
-                <a:latin typeface="Arial"/>
-              </a:rPr>
-              <a:t>Promotion or larger role</a:t>
-            </a:r>
-          </a:p>
-        </p:txBody>
-      </p:sp>
-      <p:sp>
-        <p:nvSpPr>
-          <p:cNvPr id="7" name="Rectangle 6"/>
-          <p:cNvSpPr/>
-          <p:nvPr/>
-        </p:nvSpPr>
-        <p:spPr>
-          <a:xfrm>
-            <a:off x="6080760" y="2514600"/>
-            <a:ext cx="4800600" cy="603504"/>
-          </a:xfrm>
-          <a:prstGeom prst="rect">
-            <a:avLst/>
-          </a:prstGeom>
-          <a:solidFill>
-            <a:srgbClr val="FBF7EF"/>
-          </a:solidFill>
-          <a:ln w="12700">
-            <a:solidFill>
-              <a:srgbClr val="C9A84C"/>
-            </a:solidFill>
-          </a:ln>
-          <a:effectLst/>
-        </p:spPr>
-        <p:style>
-          <a:lnRef idx="1">
-            <a:schemeClr val="accent1"/>
-          </a:lnRef>
-          <a:fillRef idx="3">
-            <a:schemeClr val="accent1"/>
-          </a:fillRef>
-          <a:effectRef idx="2">
-            <a:schemeClr val="accent1"/>
-          </a:effectRef>
-          <a:fontRef idx="minor">
-            <a:schemeClr val="lt1"/>
-          </a:fontRef>
-        </p:style>
-        <p:txBody>
-          <a:bodyPr rtlCol="0" anchor="ctr"/>
-          <a:lstStyle/>
-          <a:p>
-            <a:pPr algn="ctr"/>
-          </a:p>
-        </p:txBody>
-      </p:sp>
-      <p:sp>
-        <p:nvSpPr>
-          <p:cNvPr id="8" name="TextBox 7"/>
-          <p:cNvSpPr txBox="1"/>
-          <p:nvPr/>
-        </p:nvSpPr>
-        <p:spPr>
-          <a:xfrm>
-            <a:off x="6281928" y="2679192"/>
-            <a:ext cx="4389120" cy="274320"/>
-          </a:xfrm>
-          <a:prstGeom prst="rect">
-            <a:avLst/>
-          </a:prstGeom>
-          <a:noFill/>
-        </p:spPr>
-        <p:txBody>
-          <a:bodyPr wrap="square" lIns="0" rIns="0" tIns="0" bIns="0" anchor="t">
-            <a:spAutoFit/>
-          </a:bodyPr>
-          <a:lstStyle/>
-          <a:p>
-            <a:pPr algn="l">
-              <a:lnSpc>
-                <a:spcPct val="115000"/>
-              </a:lnSpc>
-            </a:pPr>
-            <a:r>
-              <a:rPr sz="1400" b="0" i="0">
-                <a:solidFill>
-                  <a:srgbClr val="0F2347"/>
-                </a:solidFill>
-                <a:latin typeface="Arial"/>
-              </a:rPr>
-              <a:t>Reorganization or role change</a:t>
-            </a:r>
-          </a:p>
-        </p:txBody>
-      </p:sp>
-      <p:sp>
-        <p:nvSpPr>
-          <p:cNvPr id="9" name="Rectangle 8"/>
-          <p:cNvSpPr/>
-          <p:nvPr/>
-        </p:nvSpPr>
-        <p:spPr>
-          <a:xfrm>
-            <a:off x="868680" y="3474720"/>
-            <a:ext cx="4800600" cy="603504"/>
-          </a:xfrm>
-          <a:prstGeom prst="rect">
-            <a:avLst/>
-          </a:prstGeom>
-          <a:solidFill>
-            <a:srgbClr val="FBF7EF"/>
-          </a:solidFill>
-          <a:ln w="12700">
-            <a:solidFill>
-              <a:srgbClr val="C9A84C"/>
-            </a:solidFill>
-          </a:ln>
-          <a:effectLst/>
-        </p:spPr>
-        <p:style>
-          <a:lnRef idx="1">
-            <a:schemeClr val="accent1"/>
-          </a:lnRef>
-          <a:fillRef idx="3">
-            <a:schemeClr val="accent1"/>
-          </a:fillRef>
-          <a:effectRef idx="2">
-            <a:schemeClr val="accent1"/>
-          </a:effectRef>
-          <a:fontRef idx="minor">
-            <a:schemeClr val="lt1"/>
-          </a:fontRef>
-        </p:style>
-        <p:txBody>
-          <a:bodyPr rtlCol="0" anchor="ctr"/>
-          <a:lstStyle/>
-          <a:p>
-            <a:pPr algn="ctr"/>
-          </a:p>
-        </p:txBody>
-      </p:sp>
-      <p:sp>
-        <p:nvSpPr>
-          <p:cNvPr id="10" name="TextBox 9"/>
-          <p:cNvSpPr txBox="1"/>
-          <p:nvPr/>
-        </p:nvSpPr>
-        <p:spPr>
-          <a:xfrm>
-            <a:off x="1069848" y="3639312"/>
-            <a:ext cx="4389120" cy="274320"/>
-          </a:xfrm>
-          <a:prstGeom prst="rect">
-            <a:avLst/>
-          </a:prstGeom>
-          <a:noFill/>
-        </p:spPr>
-        <p:txBody>
-          <a:bodyPr wrap="square" lIns="0" rIns="0" tIns="0" bIns="0" anchor="t">
-            <a:spAutoFit/>
-          </a:bodyPr>
-          <a:lstStyle/>
-          <a:p>
-            <a:pPr algn="l">
-              <a:lnSpc>
-                <a:spcPct val="115000"/>
-              </a:lnSpc>
-            </a:pPr>
-            <a:r>
-              <a:rPr sz="1400" b="0" i="0">
-                <a:solidFill>
-                  <a:srgbClr val="0F2347"/>
-                </a:solidFill>
-                <a:latin typeface="Arial"/>
-              </a:rPr>
-              <a:t>Internal move decision</a:t>
-            </a:r>
-          </a:p>
-        </p:txBody>
-      </p:sp>
-      <p:sp>
-        <p:nvSpPr>
-          <p:cNvPr id="11" name="Rectangle 10"/>
-          <p:cNvSpPr/>
-          <p:nvPr/>
-        </p:nvSpPr>
-        <p:spPr>
-          <a:xfrm>
-            <a:off x="6080760" y="3474720"/>
-            <a:ext cx="4800600" cy="603504"/>
-          </a:xfrm>
-          <a:prstGeom prst="rect">
-            <a:avLst/>
-          </a:prstGeom>
-          <a:solidFill>
-            <a:srgbClr val="FBF7EF"/>
-          </a:solidFill>
-          <a:ln w="12700">
-            <a:solidFill>
-              <a:srgbClr val="C9A84C"/>
-            </a:solidFill>
-          </a:ln>
-          <a:effectLst/>
-        </p:spPr>
-        <p:style>
-          <a:lnRef idx="1">
-            <a:schemeClr val="accent1"/>
-          </a:lnRef>
-          <a:fillRef idx="3">
-            <a:schemeClr val="accent1"/>
-          </a:fillRef>
-          <a:effectRef idx="2">
-            <a:schemeClr val="accent1"/>
-          </a:effectRef>
-          <a:fontRef idx="minor">
-            <a:schemeClr val="lt1"/>
-          </a:fontRef>
-        </p:style>
-        <p:txBody>
-          <a:bodyPr rtlCol="0" anchor="ctr"/>
-          <a:lstStyle/>
-          <a:p>
-            <a:pPr algn="ctr"/>
-          </a:p>
-        </p:txBody>
-      </p:sp>
-      <p:sp>
-        <p:nvSpPr>
-          <p:cNvPr id="12" name="TextBox 11"/>
-          <p:cNvSpPr txBox="1"/>
-          <p:nvPr/>
-        </p:nvSpPr>
-        <p:spPr>
-          <a:xfrm>
-            <a:off x="6281928" y="3639312"/>
-            <a:ext cx="4389120" cy="274320"/>
-          </a:xfrm>
-          <a:prstGeom prst="rect">
-            <a:avLst/>
-          </a:prstGeom>
-          <a:noFill/>
-        </p:spPr>
-        <p:txBody>
-          <a:bodyPr wrap="square" lIns="0" rIns="0" tIns="0" bIns="0" anchor="t">
-            <a:spAutoFit/>
-          </a:bodyPr>
-          <a:lstStyle/>
-          <a:p>
-            <a:pPr algn="l">
-              <a:lnSpc>
-                <a:spcPct val="115000"/>
-              </a:lnSpc>
-            </a:pPr>
-            <a:r>
-              <a:rPr sz="1400" b="0" i="0">
-                <a:solidFill>
-                  <a:srgbClr val="0F2347"/>
-                </a:solidFill>
-                <a:latin typeface="Arial"/>
-              </a:rPr>
-              <a:t>External opportunity</a:t>
-            </a:r>
-          </a:p>
-        </p:txBody>
-      </p:sp>
-      <p:sp>
-        <p:nvSpPr>
-          <p:cNvPr id="13" name="Rectangle 12"/>
-          <p:cNvSpPr/>
-          <p:nvPr/>
-        </p:nvSpPr>
-        <p:spPr>
-          <a:xfrm>
-            <a:off x="868680" y="4434840"/>
-            <a:ext cx="4800600" cy="603504"/>
-          </a:xfrm>
-          <a:prstGeom prst="rect">
-            <a:avLst/>
-          </a:prstGeom>
-          <a:solidFill>
-            <a:srgbClr val="FBF7EF"/>
-          </a:solidFill>
-          <a:ln w="12700">
-            <a:solidFill>
-              <a:srgbClr val="C9A84C"/>
-            </a:solidFill>
-          </a:ln>
-          <a:effectLst/>
-        </p:spPr>
-        <p:style>
-          <a:lnRef idx="1">
-            <a:schemeClr val="accent1"/>
-          </a:lnRef>
-          <a:fillRef idx="3">
-            <a:schemeClr val="accent1"/>
-          </a:fillRef>
-          <a:effectRef idx="2">
-            <a:schemeClr val="accent1"/>
-          </a:effectRef>
-          <a:fontRef idx="minor">
-            <a:schemeClr val="lt1"/>
-          </a:fontRef>
-        </p:style>
-        <p:txBody>
-          <a:bodyPr rtlCol="0" anchor="ctr"/>
-          <a:lstStyle/>
-          <a:p>
-            <a:pPr algn="ctr"/>
-          </a:p>
-        </p:txBody>
-      </p:sp>
-      <p:sp>
-        <p:nvSpPr>
-          <p:cNvPr id="14" name="TextBox 13"/>
-          <p:cNvSpPr txBox="1"/>
-          <p:nvPr/>
-        </p:nvSpPr>
-        <p:spPr>
-          <a:xfrm>
-            <a:off x="1069848" y="4599431"/>
-            <a:ext cx="4389120" cy="274320"/>
-          </a:xfrm>
-          <a:prstGeom prst="rect">
-            <a:avLst/>
-          </a:prstGeom>
-          <a:noFill/>
-        </p:spPr>
-        <p:txBody>
-          <a:bodyPr wrap="square" lIns="0" rIns="0" tIns="0" bIns="0" anchor="t">
-            <a:spAutoFit/>
-          </a:bodyPr>
-          <a:lstStyle/>
-          <a:p>
-            <a:pPr algn="l">
-              <a:lnSpc>
-                <a:spcPct val="115000"/>
-              </a:lnSpc>
-            </a:pPr>
-            <a:r>
-              <a:rPr sz="1400" b="0" i="0">
-                <a:solidFill>
-                  <a:srgbClr val="0F2347"/>
-                </a:solidFill>
-                <a:latin typeface="Arial"/>
-              </a:rPr>
-              <a:t>My role feels static</a:t>
-            </a:r>
-          </a:p>
-        </p:txBody>
-      </p:sp>
-      <p:sp>
-        <p:nvSpPr>
-          <p:cNvPr id="15" name="Rectangle 14"/>
-          <p:cNvSpPr/>
-          <p:nvPr/>
-        </p:nvSpPr>
-        <p:spPr>
-          <a:xfrm>
-            <a:off x="6080760" y="4434840"/>
-            <a:ext cx="4800600" cy="603504"/>
-          </a:xfrm>
-          <a:prstGeom prst="rect">
-            <a:avLst/>
-          </a:prstGeom>
-          <a:solidFill>
-            <a:srgbClr val="FBF7EF"/>
-          </a:solidFill>
-          <a:ln w="12700">
-            <a:solidFill>
-              <a:srgbClr val="C9A84C"/>
-            </a:solidFill>
-          </a:ln>
-          <a:effectLst/>
-        </p:spPr>
-        <p:style>
-          <a:lnRef idx="1">
-            <a:schemeClr val="accent1"/>
-          </a:lnRef>
-          <a:fillRef idx="3">
-            <a:schemeClr val="accent1"/>
-          </a:fillRef>
-          <a:effectRef idx="2">
-            <a:schemeClr val="accent1"/>
-          </a:effectRef>
-          <a:fontRef idx="minor">
-            <a:schemeClr val="lt1"/>
-          </a:fontRef>
-        </p:style>
-        <p:txBody>
-          <a:bodyPr rtlCol="0" anchor="ctr"/>
-          <a:lstStyle/>
-          <a:p>
-            <a:pPr algn="ctr"/>
-          </a:p>
-        </p:txBody>
-      </p:sp>
-      <p:sp>
-        <p:nvSpPr>
-          <p:cNvPr id="16" name="TextBox 15"/>
-          <p:cNvSpPr txBox="1"/>
-          <p:nvPr/>
-        </p:nvSpPr>
-        <p:spPr>
-          <a:xfrm>
-            <a:off x="6281928" y="4599431"/>
-            <a:ext cx="4389120" cy="274320"/>
-          </a:xfrm>
-          <a:prstGeom prst="rect">
-            <a:avLst/>
-          </a:prstGeom>
-          <a:noFill/>
-        </p:spPr>
-        <p:txBody>
-          <a:bodyPr wrap="square" lIns="0" rIns="0" tIns="0" bIns="0" anchor="t">
-            <a:spAutoFit/>
-          </a:bodyPr>
-          <a:lstStyle/>
-          <a:p>
-            <a:pPr algn="l">
-              <a:lnSpc>
-                <a:spcPct val="115000"/>
-              </a:lnSpc>
-            </a:pPr>
-            <a:r>
-              <a:rPr sz="1400" b="0" i="0">
-                <a:solidFill>
-                  <a:srgbClr val="0F2347"/>
-                </a:solidFill>
-                <a:latin typeface="Arial"/>
-              </a:rPr>
-              <a:t>General uncertainty</a:t>
-            </a:r>
-          </a:p>
-        </p:txBody>
-      </p:sp>
-      <p:pic>
-        <p:nvPicPr>
-          <p:cNvPr id="17" name="Picture 16" descr="poll_question_mark.png"/>
-          <p:cNvPicPr>
-            <a:picLocks noChangeAspect="1"/>
-          </p:cNvPicPr>
-          <p:nvPr/>
-        </p:nvPicPr>
-        <p:blipFill>
-          <a:blip r:embed="rId2"/>
-          <a:stretch>
-            <a:fillRect/>
-          </a:stretch>
-        </p:blipFill>
-        <p:spPr>
-          <a:xfrm>
-            <a:off x="10195560" y="502920"/>
-            <a:ext cx="1081007" cy="1417320"/>
-          </a:xfrm>
-          <a:prstGeom prst="rect">
-            <a:avLst/>
-          </a:prstGeom>
-        </p:spPr>
-      </p:pic>
-      <p:sp>
-        <p:nvSpPr>
-          <p:cNvPr id="18" name="TextBox 17"/>
           <p:cNvSpPr txBox="1"/>
           <p:nvPr/>
         </p:nvSpPr>
@@ -9917,7 +10398,7 @@
       </p:sp>
       <p:sp>
         <p:nvSpPr>
-          <p:cNvPr id="19" name="TextBox 18"/>
+          <p:cNvPr id="7" name="TextBox 6"/>
           <p:cNvSpPr txBox="1"/>
           <p:nvPr/>
         </p:nvSpPr>
@@ -10014,7 +10495,7 @@
                 </a:solidFill>
                 <a:latin typeface="Arial"/>
               </a:rPr>
-              <a:t>WHAT YOU’LL LEAVE WITH</a:t>
+              <a:t>OPENING POLL</a:t>
             </a:r>
           </a:p>
         </p:txBody>
@@ -10027,8 +10508,8 @@
         </p:nvSpPr>
         <p:spPr>
           <a:xfrm>
-            <a:off x="658368" y="1051560"/>
-            <a:ext cx="10241280" cy="685800"/>
+            <a:off x="658368" y="1143000"/>
+            <a:ext cx="9875520" cy="685800"/>
           </a:xfrm>
           <a:prstGeom prst="rect">
             <a:avLst/>
@@ -10053,30 +10534,71 @@
                 </a:solidFill>
                 <a:latin typeface="Georgia"/>
               </a:rPr>
-              <a:t>Here’s What You’ll Leave With Today</a:t>
-            </a:r>
-          </a:p>
-        </p:txBody>
-      </p:sp>
-      <p:sp>
-        <p:nvSpPr>
-          <p:cNvPr id="4" name="Rectangle 3"/>
+              <a:t>What brought you here today?</a:t>
+            </a:r>
+          </a:p>
+        </p:txBody>
+      </p:sp>
+      <p:sp>
+        <p:nvSpPr>
+          <p:cNvPr id="4" name="TextBox 3"/>
+          <p:cNvSpPr txBox="1"/>
+          <p:nvPr/>
+        </p:nvSpPr>
+        <p:spPr>
+          <a:xfrm>
+            <a:off x="676656" y="1828800"/>
+            <a:ext cx="8778240" cy="411480"/>
+          </a:xfrm>
+          <a:prstGeom prst="rect">
+            <a:avLst/>
+          </a:prstGeom>
+          <a:noFill/>
+        </p:spPr>
+        <p:txBody>
+          <a:bodyPr wrap="square" lIns="0" rIns="0" tIns="0" bIns="0" anchor="t">
+            <a:spAutoFit/>
+          </a:bodyPr>
+          <a:lstStyle/>
+          <a:p>
+            <a:pPr algn="l">
+              <a:lnSpc>
+                <a:spcPct val="115000"/>
+              </a:lnSpc>
+            </a:pPr>
+            <a:r>
+              <a:rPr sz="1500" b="0" i="0">
+                <a:solidFill>
+                  <a:srgbClr val="152B4C"/>
+                </a:solidFill>
+                <a:latin typeface="Arial"/>
+              </a:rPr>
+              <a:t>Choose the closest reason. No explanation needed.</a:t>
+            </a:r>
+          </a:p>
+        </p:txBody>
+      </p:sp>
+      <p:sp>
+        <p:nvSpPr>
+          <p:cNvPr id="5" name="Rectangle 4"/>
           <p:cNvSpPr/>
           <p:nvPr/>
         </p:nvSpPr>
         <p:spPr>
           <a:xfrm>
-            <a:off x="676656" y="1874519"/>
-            <a:ext cx="3840480" cy="22860"/>
+            <a:off x="868680" y="2514600"/>
+            <a:ext cx="4800600" cy="603504"/>
           </a:xfrm>
           <a:prstGeom prst="rect">
             <a:avLst/>
           </a:prstGeom>
           <a:solidFill>
-            <a:srgbClr val="C9A84C"/>
+            <a:srgbClr val="FBF7EF"/>
           </a:solidFill>
-          <a:ln>
-            <a:noFill/>
+          <a:ln w="12700">
+            <a:solidFill>
+              <a:srgbClr val="C9A84C"/>
+            </a:solidFill>
           </a:ln>
           <a:effectLst/>
         </p:spPr>
@@ -10104,23 +10626,64 @@
       </p:sp>
       <p:sp>
         <p:nvSpPr>
-          <p:cNvPr id="5" name="Rounded Rectangle 4"/>
+          <p:cNvPr id="6" name="TextBox 5"/>
+          <p:cNvSpPr txBox="1"/>
+          <p:nvPr/>
+        </p:nvSpPr>
+        <p:spPr>
+          <a:xfrm>
+            <a:off x="1069848" y="2679192"/>
+            <a:ext cx="4389120" cy="274320"/>
+          </a:xfrm>
+          <a:prstGeom prst="rect">
+            <a:avLst/>
+          </a:prstGeom>
+          <a:noFill/>
+        </p:spPr>
+        <p:txBody>
+          <a:bodyPr wrap="square" lIns="0" rIns="0" tIns="0" bIns="0" anchor="t">
+            <a:spAutoFit/>
+          </a:bodyPr>
+          <a:lstStyle/>
+          <a:p>
+            <a:pPr algn="l">
+              <a:lnSpc>
+                <a:spcPct val="115000"/>
+              </a:lnSpc>
+            </a:pPr>
+            <a:r>
+              <a:rPr sz="1400" b="0" i="0">
+                <a:solidFill>
+                  <a:srgbClr val="0F2347"/>
+                </a:solidFill>
+                <a:latin typeface="Arial"/>
+              </a:rPr>
+              <a:t>Promotion or larger role</a:t>
+            </a:r>
+          </a:p>
+        </p:txBody>
+      </p:sp>
+      <p:sp>
+        <p:nvSpPr>
+          <p:cNvPr id="7" name="Rectangle 6"/>
           <p:cNvSpPr/>
           <p:nvPr/>
         </p:nvSpPr>
         <p:spPr>
           <a:xfrm>
-            <a:off x="713232" y="2194560"/>
-            <a:ext cx="320040" cy="320040"/>
-          </a:xfrm>
-          <a:prstGeom prst="roundRect">
+            <a:off x="6080760" y="2514600"/>
+            <a:ext cx="4800600" cy="603504"/>
+          </a:xfrm>
+          <a:prstGeom prst="rect">
             <a:avLst/>
           </a:prstGeom>
           <a:solidFill>
-            <a:srgbClr val="0F2347"/>
+            <a:srgbClr val="FBF7EF"/>
           </a:solidFill>
-          <a:ln>
-            <a:noFill/>
+          <a:ln w="12700">
+            <a:solidFill>
+              <a:srgbClr val="C9A84C"/>
+            </a:solidFill>
           </a:ln>
           <a:effectLst/>
         </p:spPr>
@@ -10148,140 +10711,64 @@
       </p:sp>
       <p:sp>
         <p:nvSpPr>
-          <p:cNvPr id="6" name="TextBox 5"/>
-          <p:cNvSpPr txBox="1"/>
-          <p:nvPr/>
-        </p:nvSpPr>
-        <p:spPr>
-          <a:xfrm>
-            <a:off x="713232" y="2263140"/>
-            <a:ext cx="320040" cy="182880"/>
-          </a:xfrm>
-          <a:prstGeom prst="rect">
-            <a:avLst/>
-          </a:prstGeom>
-          <a:noFill/>
-        </p:spPr>
-        <p:txBody>
-          <a:bodyPr wrap="square" lIns="0" rIns="0" tIns="0" bIns="0" anchor="t">
-            <a:spAutoFit/>
-          </a:bodyPr>
-          <a:lstStyle/>
-          <a:p>
-            <a:pPr algn="ctr">
+          <p:cNvPr id="8" name="TextBox 7"/>
+          <p:cNvSpPr txBox="1"/>
+          <p:nvPr/>
+        </p:nvSpPr>
+        <p:spPr>
+          <a:xfrm>
+            <a:off x="6281928" y="2679192"/>
+            <a:ext cx="4389120" cy="274320"/>
+          </a:xfrm>
+          <a:prstGeom prst="rect">
+            <a:avLst/>
+          </a:prstGeom>
+          <a:noFill/>
+        </p:spPr>
+        <p:txBody>
+          <a:bodyPr wrap="square" lIns="0" rIns="0" tIns="0" bIns="0" anchor="t">
+            <a:spAutoFit/>
+          </a:bodyPr>
+          <a:lstStyle/>
+          <a:p>
+            <a:pPr algn="l">
               <a:lnSpc>
                 <a:spcPct val="115000"/>
               </a:lnSpc>
             </a:pPr>
             <a:r>
-              <a:rPr sz="1500" b="1" i="0">
-                <a:solidFill>
-                  <a:srgbClr val="FFFFFF"/>
-                </a:solidFill>
-                <a:latin typeface="Arial"/>
-              </a:rPr>
-              <a:t>1</a:t>
-            </a:r>
-          </a:p>
-        </p:txBody>
-      </p:sp>
-      <p:sp>
-        <p:nvSpPr>
-          <p:cNvPr id="7" name="TextBox 6"/>
-          <p:cNvSpPr txBox="1"/>
-          <p:nvPr/>
-        </p:nvSpPr>
-        <p:spPr>
-          <a:xfrm>
-            <a:off x="1261872" y="2176272"/>
-            <a:ext cx="9692640" cy="320040"/>
-          </a:xfrm>
-          <a:prstGeom prst="rect">
-            <a:avLst/>
-          </a:prstGeom>
-          <a:noFill/>
-        </p:spPr>
-        <p:txBody>
-          <a:bodyPr wrap="square" lIns="0" rIns="0" tIns="0" bIns="0" anchor="t">
-            <a:spAutoFit/>
-          </a:bodyPr>
-          <a:lstStyle/>
-          <a:p>
-            <a:pPr algn="l">
-              <a:lnSpc>
-                <a:spcPct val="115000"/>
-              </a:lnSpc>
-            </a:pPr>
-            <a:r>
-              <a:rPr sz="1800" b="1" i="0">
+              <a:rPr sz="1400" b="0" i="0">
                 <a:solidFill>
                   <a:srgbClr val="0F2347"/>
                 </a:solidFill>
-                <a:latin typeface="Georgia"/>
-              </a:rPr>
-              <a:t>THE DIFFERENCE</a:t>
-            </a:r>
-          </a:p>
-        </p:txBody>
-      </p:sp>
-      <p:sp>
-        <p:nvSpPr>
-          <p:cNvPr id="8" name="TextBox 7"/>
-          <p:cNvSpPr txBox="1"/>
-          <p:nvPr/>
-        </p:nvSpPr>
-        <p:spPr>
-          <a:xfrm>
-            <a:off x="1261872" y="2542032"/>
-            <a:ext cx="9692640" cy="411480"/>
-          </a:xfrm>
-          <a:prstGeom prst="rect">
-            <a:avLst/>
-          </a:prstGeom>
-          <a:noFill/>
-        </p:spPr>
-        <p:txBody>
-          <a:bodyPr wrap="square" lIns="0" rIns="0" tIns="0" bIns="0" anchor="t">
-            <a:spAutoFit/>
-          </a:bodyPr>
-          <a:lstStyle/>
-          <a:p>
-            <a:pPr algn="l">
-              <a:lnSpc>
-                <a:spcPct val="115000"/>
-              </a:lnSpc>
-            </a:pPr>
-            <a:r>
-              <a:rPr sz="1350" b="0" i="0">
-                <a:solidFill>
-                  <a:srgbClr val="152B4C"/>
-                </a:solidFill>
-                <a:latin typeface="Arial"/>
-              </a:rPr>
-              <a:t>How to distinguish strong performance from continuing career growth.</a:t>
-            </a:r>
-          </a:p>
-        </p:txBody>
-      </p:sp>
-      <p:sp>
-        <p:nvSpPr>
-          <p:cNvPr id="9" name="Rounded Rectangle 8"/>
+                <a:latin typeface="Arial"/>
+              </a:rPr>
+              <a:t>Reorganization or role change</a:t>
+            </a:r>
+          </a:p>
+        </p:txBody>
+      </p:sp>
+      <p:sp>
+        <p:nvSpPr>
+          <p:cNvPr id="9" name="Rectangle 8"/>
           <p:cNvSpPr/>
           <p:nvPr/>
         </p:nvSpPr>
         <p:spPr>
           <a:xfrm>
-            <a:off x="713232" y="3218688"/>
-            <a:ext cx="320040" cy="320040"/>
-          </a:xfrm>
-          <a:prstGeom prst="roundRect">
+            <a:off x="868680" y="3474720"/>
+            <a:ext cx="4800600" cy="603504"/>
+          </a:xfrm>
+          <a:prstGeom prst="rect">
             <a:avLst/>
           </a:prstGeom>
           <a:solidFill>
-            <a:srgbClr val="0F2347"/>
+            <a:srgbClr val="FBF7EF"/>
           </a:solidFill>
-          <a:ln>
-            <a:noFill/>
+          <a:ln w="12700">
+            <a:solidFill>
+              <a:srgbClr val="C9A84C"/>
+            </a:solidFill>
           </a:ln>
           <a:effectLst/>
         </p:spPr>
@@ -10315,134 +10802,58 @@
         </p:nvSpPr>
         <p:spPr>
           <a:xfrm>
-            <a:off x="713232" y="3287268"/>
-            <a:ext cx="320040" cy="182880"/>
-          </a:xfrm>
-          <a:prstGeom prst="rect">
-            <a:avLst/>
-          </a:prstGeom>
-          <a:noFill/>
-        </p:spPr>
-        <p:txBody>
-          <a:bodyPr wrap="square" lIns="0" rIns="0" tIns="0" bIns="0" anchor="t">
-            <a:spAutoFit/>
-          </a:bodyPr>
-          <a:lstStyle/>
-          <a:p>
-            <a:pPr algn="ctr">
+            <a:off x="1069848" y="3639312"/>
+            <a:ext cx="4389120" cy="274320"/>
+          </a:xfrm>
+          <a:prstGeom prst="rect">
+            <a:avLst/>
+          </a:prstGeom>
+          <a:noFill/>
+        </p:spPr>
+        <p:txBody>
+          <a:bodyPr wrap="square" lIns="0" rIns="0" tIns="0" bIns="0" anchor="t">
+            <a:spAutoFit/>
+          </a:bodyPr>
+          <a:lstStyle/>
+          <a:p>
+            <a:pPr algn="l">
               <a:lnSpc>
                 <a:spcPct val="115000"/>
               </a:lnSpc>
             </a:pPr>
             <a:r>
-              <a:rPr sz="1500" b="1" i="0">
-                <a:solidFill>
-                  <a:srgbClr val="FFFFFF"/>
-                </a:solidFill>
-                <a:latin typeface="Arial"/>
-              </a:rPr>
-              <a:t>2</a:t>
-            </a:r>
-          </a:p>
-        </p:txBody>
-      </p:sp>
-      <p:sp>
-        <p:nvSpPr>
-          <p:cNvPr id="11" name="TextBox 10"/>
-          <p:cNvSpPr txBox="1"/>
-          <p:nvPr/>
-        </p:nvSpPr>
-        <p:spPr>
-          <a:xfrm>
-            <a:off x="1261872" y="3200400"/>
-            <a:ext cx="9692640" cy="320040"/>
-          </a:xfrm>
-          <a:prstGeom prst="rect">
-            <a:avLst/>
-          </a:prstGeom>
-          <a:noFill/>
-        </p:spPr>
-        <p:txBody>
-          <a:bodyPr wrap="square" lIns="0" rIns="0" tIns="0" bIns="0" anchor="t">
-            <a:spAutoFit/>
-          </a:bodyPr>
-          <a:lstStyle/>
-          <a:p>
-            <a:pPr algn="l">
-              <a:lnSpc>
-                <a:spcPct val="115000"/>
-              </a:lnSpc>
-            </a:pPr>
-            <a:r>
-              <a:rPr sz="1800" b="1" i="0">
+              <a:rPr sz="1400" b="0" i="0">
                 <a:solidFill>
                   <a:srgbClr val="0F2347"/>
                 </a:solidFill>
-                <a:latin typeface="Georgia"/>
-              </a:rPr>
-              <a:t>YOUR CAREER STALL CHECK</a:t>
-            </a:r>
-          </a:p>
-        </p:txBody>
-      </p:sp>
-      <p:sp>
-        <p:nvSpPr>
-          <p:cNvPr id="12" name="TextBox 11"/>
-          <p:cNvSpPr txBox="1"/>
-          <p:nvPr/>
-        </p:nvSpPr>
-        <p:spPr>
-          <a:xfrm>
-            <a:off x="1261872" y="3566160"/>
-            <a:ext cx="9692640" cy="411480"/>
-          </a:xfrm>
-          <a:prstGeom prst="rect">
-            <a:avLst/>
-          </a:prstGeom>
-          <a:noFill/>
-        </p:spPr>
-        <p:txBody>
-          <a:bodyPr wrap="square" lIns="0" rIns="0" tIns="0" bIns="0" anchor="t">
-            <a:spAutoFit/>
-          </a:bodyPr>
-          <a:lstStyle/>
-          <a:p>
-            <a:pPr algn="l">
-              <a:lnSpc>
-                <a:spcPct val="115000"/>
-              </a:lnSpc>
-            </a:pPr>
-            <a:r>
-              <a:rPr sz="1350" b="0" i="0">
-                <a:solidFill>
-                  <a:srgbClr val="152B4C"/>
-                </a:solidFill>
-                <a:latin typeface="Arial"/>
-              </a:rPr>
-              <a:t>A Career Stall Check grounded in one example from your last 90 days.</a:t>
-            </a:r>
-          </a:p>
-        </p:txBody>
-      </p:sp>
-      <p:sp>
-        <p:nvSpPr>
-          <p:cNvPr id="13" name="Rounded Rectangle 12"/>
+                <a:latin typeface="Arial"/>
+              </a:rPr>
+              <a:t>Internal move decision</a:t>
+            </a:r>
+          </a:p>
+        </p:txBody>
+      </p:sp>
+      <p:sp>
+        <p:nvSpPr>
+          <p:cNvPr id="11" name="Rectangle 10"/>
           <p:cNvSpPr/>
           <p:nvPr/>
         </p:nvSpPr>
         <p:spPr>
           <a:xfrm>
-            <a:off x="713232" y="4242816"/>
-            <a:ext cx="320040" cy="320040"/>
-          </a:xfrm>
-          <a:prstGeom prst="roundRect">
+            <a:off x="6080760" y="3474720"/>
+            <a:ext cx="4800600" cy="603504"/>
+          </a:xfrm>
+          <a:prstGeom prst="rect">
             <a:avLst/>
           </a:prstGeom>
           <a:solidFill>
-            <a:srgbClr val="0F2347"/>
+            <a:srgbClr val="FBF7EF"/>
           </a:solidFill>
-          <a:ln>
-            <a:noFill/>
+          <a:ln w="12700">
+            <a:solidFill>
+              <a:srgbClr val="C9A84C"/>
+            </a:solidFill>
           </a:ln>
           <a:effectLst/>
         </p:spPr>
@@ -10470,140 +10881,64 @@
       </p:sp>
       <p:sp>
         <p:nvSpPr>
-          <p:cNvPr id="14" name="TextBox 13"/>
-          <p:cNvSpPr txBox="1"/>
-          <p:nvPr/>
-        </p:nvSpPr>
-        <p:spPr>
-          <a:xfrm>
-            <a:off x="713232" y="4311396"/>
-            <a:ext cx="320040" cy="182880"/>
-          </a:xfrm>
-          <a:prstGeom prst="rect">
-            <a:avLst/>
-          </a:prstGeom>
-          <a:noFill/>
-        </p:spPr>
-        <p:txBody>
-          <a:bodyPr wrap="square" lIns="0" rIns="0" tIns="0" bIns="0" anchor="t">
-            <a:spAutoFit/>
-          </a:bodyPr>
-          <a:lstStyle/>
-          <a:p>
-            <a:pPr algn="ctr">
+          <p:cNvPr id="12" name="TextBox 11"/>
+          <p:cNvSpPr txBox="1"/>
+          <p:nvPr/>
+        </p:nvSpPr>
+        <p:spPr>
+          <a:xfrm>
+            <a:off x="6281928" y="3639312"/>
+            <a:ext cx="4389120" cy="274320"/>
+          </a:xfrm>
+          <a:prstGeom prst="rect">
+            <a:avLst/>
+          </a:prstGeom>
+          <a:noFill/>
+        </p:spPr>
+        <p:txBody>
+          <a:bodyPr wrap="square" lIns="0" rIns="0" tIns="0" bIns="0" anchor="t">
+            <a:spAutoFit/>
+          </a:bodyPr>
+          <a:lstStyle/>
+          <a:p>
+            <a:pPr algn="l">
               <a:lnSpc>
                 <a:spcPct val="115000"/>
               </a:lnSpc>
             </a:pPr>
             <a:r>
-              <a:rPr sz="1500" b="1" i="0">
-                <a:solidFill>
-                  <a:srgbClr val="FFFFFF"/>
-                </a:solidFill>
-                <a:latin typeface="Arial"/>
-              </a:rPr>
-              <a:t>3</a:t>
-            </a:r>
-          </a:p>
-        </p:txBody>
-      </p:sp>
-      <p:sp>
-        <p:nvSpPr>
-          <p:cNvPr id="15" name="TextBox 14"/>
-          <p:cNvSpPr txBox="1"/>
-          <p:nvPr/>
-        </p:nvSpPr>
-        <p:spPr>
-          <a:xfrm>
-            <a:off x="1261872" y="4224528"/>
-            <a:ext cx="9692640" cy="320040"/>
-          </a:xfrm>
-          <a:prstGeom prst="rect">
-            <a:avLst/>
-          </a:prstGeom>
-          <a:noFill/>
-        </p:spPr>
-        <p:txBody>
-          <a:bodyPr wrap="square" lIns="0" rIns="0" tIns="0" bIns="0" anchor="t">
-            <a:spAutoFit/>
-          </a:bodyPr>
-          <a:lstStyle/>
-          <a:p>
-            <a:pPr algn="l">
-              <a:lnSpc>
-                <a:spcPct val="115000"/>
-              </a:lnSpc>
-            </a:pPr>
-            <a:r>
-              <a:rPr sz="1800" b="1" i="0">
+              <a:rPr sz="1400" b="0" i="0">
                 <a:solidFill>
                   <a:srgbClr val="0F2347"/>
                 </a:solidFill>
-                <a:latin typeface="Georgia"/>
-              </a:rPr>
-              <a:t>THE NEXT QUESTION</a:t>
-            </a:r>
-          </a:p>
-        </p:txBody>
-      </p:sp>
-      <p:sp>
-        <p:nvSpPr>
-          <p:cNvPr id="16" name="TextBox 15"/>
-          <p:cNvSpPr txBox="1"/>
-          <p:nvPr/>
-        </p:nvSpPr>
-        <p:spPr>
-          <a:xfrm>
-            <a:off x="1261872" y="4590288"/>
-            <a:ext cx="9692640" cy="411480"/>
-          </a:xfrm>
-          <a:prstGeom prst="rect">
-            <a:avLst/>
-          </a:prstGeom>
-          <a:noFill/>
-        </p:spPr>
-        <p:txBody>
-          <a:bodyPr wrap="square" lIns="0" rIns="0" tIns="0" bIns="0" anchor="t">
-            <a:spAutoFit/>
-          </a:bodyPr>
-          <a:lstStyle/>
-          <a:p>
-            <a:pPr algn="l">
-              <a:lnSpc>
-                <a:spcPct val="115000"/>
-              </a:lnSpc>
-            </a:pPr>
-            <a:r>
-              <a:rPr sz="1350" b="0" i="0">
-                <a:solidFill>
-                  <a:srgbClr val="152B4C"/>
-                </a:solidFill>
-                <a:latin typeface="Arial"/>
-              </a:rPr>
-              <a:t>What deserves closer examination before you decide to stay, reshape the role, or leave.</a:t>
-            </a:r>
-          </a:p>
-        </p:txBody>
-      </p:sp>
-      <p:sp>
-        <p:nvSpPr>
-          <p:cNvPr id="17" name="Rectangle 16"/>
+                <a:latin typeface="Arial"/>
+              </a:rPr>
+              <a:t>External opportunity</a:t>
+            </a:r>
+          </a:p>
+        </p:txBody>
+      </p:sp>
+      <p:sp>
+        <p:nvSpPr>
+          <p:cNvPr id="13" name="Rectangle 12"/>
           <p:cNvSpPr/>
           <p:nvPr/>
         </p:nvSpPr>
         <p:spPr>
           <a:xfrm>
-            <a:off x="676656" y="5440680"/>
-            <a:ext cx="3840480" cy="22860"/>
+            <a:off x="868680" y="4434840"/>
+            <a:ext cx="4800600" cy="603504"/>
           </a:xfrm>
           <a:prstGeom prst="rect">
             <a:avLst/>
           </a:prstGeom>
           <a:solidFill>
-            <a:srgbClr val="C9A84C"/>
+            <a:srgbClr val="FBF7EF"/>
           </a:solidFill>
-          <a:ln>
-            <a:noFill/>
+          <a:ln w="12700">
+            <a:solidFill>
+              <a:srgbClr val="C9A84C"/>
+            </a:solidFill>
           </a:ln>
           <a:effectLst/>
         </p:spPr>
@@ -10631,46 +10966,155 @@
       </p:sp>
       <p:sp>
         <p:nvSpPr>
+          <p:cNvPr id="14" name="TextBox 13"/>
+          <p:cNvSpPr txBox="1"/>
+          <p:nvPr/>
+        </p:nvSpPr>
+        <p:spPr>
+          <a:xfrm>
+            <a:off x="1069848" y="4599431"/>
+            <a:ext cx="4389120" cy="274320"/>
+          </a:xfrm>
+          <a:prstGeom prst="rect">
+            <a:avLst/>
+          </a:prstGeom>
+          <a:noFill/>
+        </p:spPr>
+        <p:txBody>
+          <a:bodyPr wrap="square" lIns="0" rIns="0" tIns="0" bIns="0" anchor="t">
+            <a:spAutoFit/>
+          </a:bodyPr>
+          <a:lstStyle/>
+          <a:p>
+            <a:pPr algn="l">
+              <a:lnSpc>
+                <a:spcPct val="115000"/>
+              </a:lnSpc>
+            </a:pPr>
+            <a:r>
+              <a:rPr sz="1400" b="0" i="0">
+                <a:solidFill>
+                  <a:srgbClr val="0F2347"/>
+                </a:solidFill>
+                <a:latin typeface="Arial"/>
+              </a:rPr>
+              <a:t>My role feels static</a:t>
+            </a:r>
+          </a:p>
+        </p:txBody>
+      </p:sp>
+      <p:sp>
+        <p:nvSpPr>
+          <p:cNvPr id="15" name="Rectangle 14"/>
+          <p:cNvSpPr/>
+          <p:nvPr/>
+        </p:nvSpPr>
+        <p:spPr>
+          <a:xfrm>
+            <a:off x="6080760" y="4434840"/>
+            <a:ext cx="4800600" cy="603504"/>
+          </a:xfrm>
+          <a:prstGeom prst="rect">
+            <a:avLst/>
+          </a:prstGeom>
+          <a:solidFill>
+            <a:srgbClr val="FBF7EF"/>
+          </a:solidFill>
+          <a:ln w="12700">
+            <a:solidFill>
+              <a:srgbClr val="C9A84C"/>
+            </a:solidFill>
+          </a:ln>
+          <a:effectLst/>
+        </p:spPr>
+        <p:style>
+          <a:lnRef idx="1">
+            <a:schemeClr val="accent1"/>
+          </a:lnRef>
+          <a:fillRef idx="3">
+            <a:schemeClr val="accent1"/>
+          </a:fillRef>
+          <a:effectRef idx="2">
+            <a:schemeClr val="accent1"/>
+          </a:effectRef>
+          <a:fontRef idx="minor">
+            <a:schemeClr val="lt1"/>
+          </a:fontRef>
+        </p:style>
+        <p:txBody>
+          <a:bodyPr rtlCol="0" anchor="ctr"/>
+          <a:lstStyle/>
+          <a:p>
+            <a:pPr algn="ctr"/>
+          </a:p>
+        </p:txBody>
+      </p:sp>
+      <p:sp>
+        <p:nvSpPr>
+          <p:cNvPr id="16" name="TextBox 15"/>
+          <p:cNvSpPr txBox="1"/>
+          <p:nvPr/>
+        </p:nvSpPr>
+        <p:spPr>
+          <a:xfrm>
+            <a:off x="6281928" y="4599431"/>
+            <a:ext cx="4389120" cy="274320"/>
+          </a:xfrm>
+          <a:prstGeom prst="rect">
+            <a:avLst/>
+          </a:prstGeom>
+          <a:noFill/>
+        </p:spPr>
+        <p:txBody>
+          <a:bodyPr wrap="square" lIns="0" rIns="0" tIns="0" bIns="0" anchor="t">
+            <a:spAutoFit/>
+          </a:bodyPr>
+          <a:lstStyle/>
+          <a:p>
+            <a:pPr algn="l">
+              <a:lnSpc>
+                <a:spcPct val="115000"/>
+              </a:lnSpc>
+            </a:pPr>
+            <a:r>
+              <a:rPr sz="1400" b="0" i="0">
+                <a:solidFill>
+                  <a:srgbClr val="0F2347"/>
+                </a:solidFill>
+                <a:latin typeface="Arial"/>
+              </a:rPr>
+              <a:t>General uncertainty</a:t>
+            </a:r>
+          </a:p>
+        </p:txBody>
+      </p:sp>
+      <p:pic>
+        <p:nvPicPr>
+          <p:cNvPr id="17" name="Picture 16" descr="poll_question_mark.png"/>
+          <p:cNvPicPr>
+            <a:picLocks noChangeAspect="1"/>
+          </p:cNvPicPr>
+          <p:nvPr/>
+        </p:nvPicPr>
+        <p:blipFill>
+          <a:blip r:embed="rId2"/>
+          <a:stretch>
+            <a:fillRect/>
+          </a:stretch>
+        </p:blipFill>
+        <p:spPr>
+          <a:xfrm>
+            <a:off x="10195560" y="502920"/>
+            <a:ext cx="1081007" cy="1417320"/>
+          </a:xfrm>
+          <a:prstGeom prst="rect">
+            <a:avLst/>
+          </a:prstGeom>
+        </p:spPr>
+      </p:pic>
+      <p:sp>
+        <p:nvSpPr>
           <p:cNvPr id="18" name="TextBox 17"/>
-          <p:cNvSpPr txBox="1"/>
-          <p:nvPr/>
-        </p:nvSpPr>
-        <p:spPr>
-          <a:xfrm>
-            <a:off x="658368" y="5623560"/>
-            <a:ext cx="10698480" cy="548640"/>
-          </a:xfrm>
-          <a:prstGeom prst="rect">
-            <a:avLst/>
-          </a:prstGeom>
-          <a:noFill/>
-        </p:spPr>
-        <p:txBody>
-          <a:bodyPr wrap="square" lIns="0" rIns="0" tIns="0" bIns="0" anchor="t">
-            <a:spAutoFit/>
-          </a:bodyPr>
-          <a:lstStyle/>
-          <a:p>
-            <a:pPr algn="l">
-              <a:lnSpc>
-                <a:spcPct val="130000"/>
-              </a:lnSpc>
-            </a:pPr>
-            <a:r>
-              <a:rPr sz="1250" b="0" i="1">
-                <a:solidFill>
-                  <a:srgbClr val="0F2347"/>
-                </a:solidFill>
-                <a:latin typeface="Arial"/>
-              </a:rPr>
-              <a:t>This session will not tell you whether to stay or leave, or place you into a Career State. It will help you recognize three signs worth examining in your own work.</a:t>
-            </a:r>
-          </a:p>
-        </p:txBody>
-      </p:sp>
-      <p:sp>
-        <p:nvSpPr>
-          <p:cNvPr id="19" name="TextBox 18"/>
           <p:cNvSpPr txBox="1"/>
           <p:nvPr/>
         </p:nvSpPr>
@@ -10709,7 +11153,7 @@
       </p:sp>
       <p:sp>
         <p:nvSpPr>
-          <p:cNvPr id="20" name="TextBox 19"/>
+          <p:cNvPr id="19" name="TextBox 18"/>
           <p:cNvSpPr txBox="1"/>
           <p:nvPr/>
         </p:nvSpPr>
@@ -10806,7 +11250,7 @@
                 </a:solidFill>
                 <a:latin typeface="Arial"/>
               </a:rPr>
-              <a:t>THE CENTRAL INSIGHT</a:t>
+              <a:t>WHAT YOU’LL LEAVE WITH</a:t>
             </a:r>
           </a:p>
         </p:txBody>
@@ -10819,23 +11263,23 @@
         </p:nvSpPr>
         <p:spPr>
           <a:xfrm>
-            <a:off x="658368" y="1097280"/>
-            <a:ext cx="10424160" cy="1234440"/>
-          </a:xfrm>
-          <a:prstGeom prst="rect">
-            <a:avLst/>
-          </a:prstGeom>
-          <a:noFill/>
-        </p:spPr>
-        <p:txBody>
-          <a:bodyPr wrap="square" lIns="0" rIns="0" tIns="0" bIns="0" anchor="t">
-            <a:spAutoFit/>
-          </a:bodyPr>
-          <a:lstStyle/>
-          <a:p>
-            <a:pPr algn="l">
-              <a:lnSpc>
-                <a:spcPct val="112000"/>
+            <a:off x="658368" y="1051560"/>
+            <a:ext cx="10241280" cy="685800"/>
+          </a:xfrm>
+          <a:prstGeom prst="rect">
+            <a:avLst/>
+          </a:prstGeom>
+          <a:noFill/>
+        </p:spPr>
+        <p:txBody>
+          <a:bodyPr wrap="square" lIns="0" rIns="0" tIns="0" bIns="0" anchor="t">
+            <a:spAutoFit/>
+          </a:bodyPr>
+          <a:lstStyle/>
+          <a:p>
+            <a:pPr algn="l">
+              <a:lnSpc>
+                <a:spcPct val="115000"/>
               </a:lnSpc>
             </a:pPr>
             <a:r>
@@ -10845,7 +11289,7 @@
                 </a:solidFill>
                 <a:latin typeface="Georgia"/>
               </a:rPr>
-              <a:t>A Role Can Reward You Long After It Stops Building You</a:t>
+              <a:t>Here’s What You’ll Leave With Today</a:t>
             </a:r>
           </a:p>
         </p:txBody>
@@ -10858,7 +11302,7 @@
         </p:nvSpPr>
         <p:spPr>
           <a:xfrm>
-            <a:off x="676656" y="2331720"/>
+            <a:off x="676656" y="1874519"/>
             <a:ext cx="3840480" cy="22860"/>
           </a:xfrm>
           <a:prstGeom prst="rect">
@@ -10896,254 +11340,20 @@
       </p:sp>
       <p:sp>
         <p:nvSpPr>
-          <p:cNvPr id="5" name="TextBox 4"/>
-          <p:cNvSpPr txBox="1"/>
-          <p:nvPr/>
-        </p:nvSpPr>
-        <p:spPr>
-          <a:xfrm>
-            <a:off x="749808" y="2651760"/>
-            <a:ext cx="9875520" cy="365760"/>
-          </a:xfrm>
-          <a:prstGeom prst="rect">
-            <a:avLst/>
-          </a:prstGeom>
-          <a:noFill/>
-        </p:spPr>
-        <p:txBody>
-          <a:bodyPr wrap="square" lIns="0" rIns="0" tIns="0" bIns="0" anchor="t">
-            <a:spAutoFit/>
-          </a:bodyPr>
-          <a:lstStyle/>
-          <a:p>
-            <a:pPr algn="l">
-              <a:lnSpc>
-                <a:spcPct val="115000"/>
-              </a:lnSpc>
-            </a:pPr>
-            <a:r>
-              <a:rPr sz="1800" b="0" i="0">
-                <a:solidFill>
-                  <a:srgbClr val="152B4C"/>
-                </a:solidFill>
-                <a:latin typeface="Arial"/>
-              </a:rPr>
-              <a:t>Strong performance may tell you that you are delivering value.</a:t>
-            </a:r>
-          </a:p>
-        </p:txBody>
-      </p:sp>
-      <p:sp>
-        <p:nvSpPr>
-          <p:cNvPr id="6" name="TextBox 5"/>
-          <p:cNvSpPr txBox="1"/>
-          <p:nvPr/>
-        </p:nvSpPr>
-        <p:spPr>
-          <a:xfrm>
-            <a:off x="749808" y="3154680"/>
-            <a:ext cx="9875520" cy="365760"/>
-          </a:xfrm>
-          <a:prstGeom prst="rect">
-            <a:avLst/>
-          </a:prstGeom>
-          <a:noFill/>
-        </p:spPr>
-        <p:txBody>
-          <a:bodyPr wrap="square" lIns="0" rIns="0" tIns="0" bIns="0" anchor="t">
-            <a:spAutoFit/>
-          </a:bodyPr>
-          <a:lstStyle/>
-          <a:p>
-            <a:pPr algn="l">
-              <a:lnSpc>
-                <a:spcPct val="115000"/>
-              </a:lnSpc>
-            </a:pPr>
-            <a:r>
-              <a:rPr sz="1800" b="0" i="0">
-                <a:solidFill>
-                  <a:srgbClr val="152B4C"/>
-                </a:solidFill>
-                <a:latin typeface="Arial"/>
-              </a:rPr>
-              <a:t>It does not, by itself, tell you whether the work is still:</a:t>
-            </a:r>
-          </a:p>
-        </p:txBody>
-      </p:sp>
-      <p:sp>
-        <p:nvSpPr>
-          <p:cNvPr id="7" name="TextBox 6"/>
-          <p:cNvSpPr txBox="1"/>
-          <p:nvPr/>
-        </p:nvSpPr>
-        <p:spPr>
-          <a:xfrm>
-            <a:off x="1051560" y="3657600"/>
-            <a:ext cx="8686800" cy="310896"/>
-          </a:xfrm>
-          <a:prstGeom prst="rect">
-            <a:avLst/>
-          </a:prstGeom>
-          <a:noFill/>
-        </p:spPr>
-        <p:txBody>
-          <a:bodyPr wrap="square" lIns="0" rIns="0" tIns="0" bIns="0" anchor="t">
-            <a:spAutoFit/>
-          </a:bodyPr>
-          <a:lstStyle/>
-          <a:p>
-            <a:pPr algn="l">
-              <a:lnSpc>
-                <a:spcPct val="115000"/>
-              </a:lnSpc>
-            </a:pPr>
-            <a:r>
-              <a:rPr sz="1600" b="1" i="0">
-                <a:solidFill>
-                  <a:srgbClr val="0F2347"/>
-                </a:solidFill>
-                <a:latin typeface="Arial"/>
-              </a:rPr>
-              <a:t>Expanding your judgment</a:t>
-            </a:r>
-          </a:p>
-        </p:txBody>
-      </p:sp>
-      <p:sp>
-        <p:nvSpPr>
-          <p:cNvPr id="8" name="TextBox 7"/>
-          <p:cNvSpPr txBox="1"/>
-          <p:nvPr/>
-        </p:nvSpPr>
-        <p:spPr>
-          <a:xfrm>
-            <a:off x="1051560" y="4041648"/>
-            <a:ext cx="8686800" cy="310896"/>
-          </a:xfrm>
-          <a:prstGeom prst="rect">
-            <a:avLst/>
-          </a:prstGeom>
-          <a:noFill/>
-        </p:spPr>
-        <p:txBody>
-          <a:bodyPr wrap="square" lIns="0" rIns="0" tIns="0" bIns="0" anchor="t">
-            <a:spAutoFit/>
-          </a:bodyPr>
-          <a:lstStyle/>
-          <a:p>
-            <a:pPr algn="l">
-              <a:lnSpc>
-                <a:spcPct val="115000"/>
-              </a:lnSpc>
-            </a:pPr>
-            <a:r>
-              <a:rPr sz="1600" b="1" i="0">
-                <a:solidFill>
-                  <a:srgbClr val="0F2347"/>
-                </a:solidFill>
-                <a:latin typeface="Arial"/>
-              </a:rPr>
-              <a:t>Exposing you to unfamiliar problems</a:t>
-            </a:r>
-          </a:p>
-        </p:txBody>
-      </p:sp>
-      <p:sp>
-        <p:nvSpPr>
-          <p:cNvPr id="9" name="TextBox 8"/>
-          <p:cNvSpPr txBox="1"/>
-          <p:nvPr/>
-        </p:nvSpPr>
-        <p:spPr>
-          <a:xfrm>
-            <a:off x="1051560" y="4425696"/>
-            <a:ext cx="8686800" cy="310896"/>
-          </a:xfrm>
-          <a:prstGeom prst="rect">
-            <a:avLst/>
-          </a:prstGeom>
-          <a:noFill/>
-        </p:spPr>
-        <p:txBody>
-          <a:bodyPr wrap="square" lIns="0" rIns="0" tIns="0" bIns="0" anchor="t">
-            <a:spAutoFit/>
-          </a:bodyPr>
-          <a:lstStyle/>
-          <a:p>
-            <a:pPr algn="l">
-              <a:lnSpc>
-                <a:spcPct val="115000"/>
-              </a:lnSpc>
-            </a:pPr>
-            <a:r>
-              <a:rPr sz="1600" b="1" i="0">
-                <a:solidFill>
-                  <a:srgbClr val="0F2347"/>
-                </a:solidFill>
-                <a:latin typeface="Arial"/>
-              </a:rPr>
-              <a:t>Building capability that travels</a:t>
-            </a:r>
-          </a:p>
-        </p:txBody>
-      </p:sp>
-      <p:sp>
-        <p:nvSpPr>
-          <p:cNvPr id="10" name="TextBox 9"/>
-          <p:cNvSpPr txBox="1"/>
-          <p:nvPr/>
-        </p:nvSpPr>
-        <p:spPr>
-          <a:xfrm>
-            <a:off x="1051560" y="4809744"/>
-            <a:ext cx="8686800" cy="310896"/>
-          </a:xfrm>
-          <a:prstGeom prst="rect">
-            <a:avLst/>
-          </a:prstGeom>
-          <a:noFill/>
-        </p:spPr>
-        <p:txBody>
-          <a:bodyPr wrap="square" lIns="0" rIns="0" tIns="0" bIns="0" anchor="t">
-            <a:spAutoFit/>
-          </a:bodyPr>
-          <a:lstStyle/>
-          <a:p>
-            <a:pPr algn="l">
-              <a:lnSpc>
-                <a:spcPct val="115000"/>
-              </a:lnSpc>
-            </a:pPr>
-            <a:r>
-              <a:rPr sz="1600" b="1" i="0">
-                <a:solidFill>
-                  <a:srgbClr val="0F2347"/>
-                </a:solidFill>
-                <a:latin typeface="Arial"/>
-              </a:rPr>
-              <a:t>Increasing your future options</a:t>
-            </a:r>
-          </a:p>
-        </p:txBody>
-      </p:sp>
-      <p:sp>
-        <p:nvSpPr>
-          <p:cNvPr id="11" name="Rectangle 10"/>
+          <p:cNvPr id="5" name="Rounded Rectangle 4"/>
           <p:cNvSpPr/>
           <p:nvPr/>
         </p:nvSpPr>
         <p:spPr>
           <a:xfrm>
-            <a:off x="676656" y="5330952"/>
-            <a:ext cx="3840480" cy="22860"/>
-          </a:xfrm>
-          <a:prstGeom prst="rect">
+            <a:off x="713232" y="2331720"/>
+            <a:ext cx="320040" cy="320040"/>
+          </a:xfrm>
+          <a:prstGeom prst="roundRect">
             <a:avLst/>
           </a:prstGeom>
           <a:solidFill>
-            <a:srgbClr val="C9A84C"/>
+            <a:srgbClr val="0F2347"/>
           </a:solidFill>
           <a:ln>
             <a:noFill/>
@@ -11174,14 +11384,253 @@
       </p:sp>
       <p:sp>
         <p:nvSpPr>
+          <p:cNvPr id="6" name="TextBox 5"/>
+          <p:cNvSpPr txBox="1"/>
+          <p:nvPr/>
+        </p:nvSpPr>
+        <p:spPr>
+          <a:xfrm>
+            <a:off x="713232" y="2400300"/>
+            <a:ext cx="320040" cy="182880"/>
+          </a:xfrm>
+          <a:prstGeom prst="rect">
+            <a:avLst/>
+          </a:prstGeom>
+          <a:noFill/>
+        </p:spPr>
+        <p:txBody>
+          <a:bodyPr wrap="square" lIns="0" rIns="0" tIns="0" bIns="0" anchor="t">
+            <a:spAutoFit/>
+          </a:bodyPr>
+          <a:lstStyle/>
+          <a:p>
+            <a:pPr algn="ctr">
+              <a:lnSpc>
+                <a:spcPct val="115000"/>
+              </a:lnSpc>
+            </a:pPr>
+            <a:r>
+              <a:rPr sz="1500" b="1" i="0">
+                <a:solidFill>
+                  <a:srgbClr val="FFFFFF"/>
+                </a:solidFill>
+                <a:latin typeface="Arial"/>
+              </a:rPr>
+              <a:t>1</a:t>
+            </a:r>
+          </a:p>
+        </p:txBody>
+      </p:sp>
+      <p:sp>
+        <p:nvSpPr>
+          <p:cNvPr id="7" name="TextBox 6"/>
+          <p:cNvSpPr txBox="1"/>
+          <p:nvPr/>
+        </p:nvSpPr>
+        <p:spPr>
+          <a:xfrm>
+            <a:off x="1261872" y="2313432"/>
+            <a:ext cx="9692640" cy="320040"/>
+          </a:xfrm>
+          <a:prstGeom prst="rect">
+            <a:avLst/>
+          </a:prstGeom>
+          <a:noFill/>
+        </p:spPr>
+        <p:txBody>
+          <a:bodyPr wrap="square" lIns="0" rIns="0" tIns="0" bIns="0" anchor="t">
+            <a:spAutoFit/>
+          </a:bodyPr>
+          <a:lstStyle/>
+          <a:p>
+            <a:pPr algn="l">
+              <a:lnSpc>
+                <a:spcPct val="115000"/>
+              </a:lnSpc>
+            </a:pPr>
+            <a:r>
+              <a:rPr sz="1800" b="1" i="0">
+                <a:solidFill>
+                  <a:srgbClr val="0F2347"/>
+                </a:solidFill>
+                <a:latin typeface="Georgia"/>
+              </a:rPr>
+              <a:t>THE DIFFERENCE</a:t>
+            </a:r>
+          </a:p>
+        </p:txBody>
+      </p:sp>
+      <p:sp>
+        <p:nvSpPr>
+          <p:cNvPr id="8" name="TextBox 7"/>
+          <p:cNvSpPr txBox="1"/>
+          <p:nvPr/>
+        </p:nvSpPr>
+        <p:spPr>
+          <a:xfrm>
+            <a:off x="1261872" y="2679191"/>
+            <a:ext cx="9692640" cy="411480"/>
+          </a:xfrm>
+          <a:prstGeom prst="rect">
+            <a:avLst/>
+          </a:prstGeom>
+          <a:noFill/>
+        </p:spPr>
+        <p:txBody>
+          <a:bodyPr wrap="square" lIns="0" rIns="0" tIns="0" bIns="0" anchor="t">
+            <a:spAutoFit/>
+          </a:bodyPr>
+          <a:lstStyle/>
+          <a:p>
+            <a:pPr algn="l">
+              <a:lnSpc>
+                <a:spcPct val="115000"/>
+              </a:lnSpc>
+            </a:pPr>
+            <a:r>
+              <a:rPr sz="1350" b="0" i="0">
+                <a:solidFill>
+                  <a:srgbClr val="152B4C"/>
+                </a:solidFill>
+                <a:latin typeface="Arial"/>
+              </a:rPr>
+              <a:t>How to distinguish strong performance from continuing career growth.</a:t>
+            </a:r>
+          </a:p>
+        </p:txBody>
+      </p:sp>
+      <p:sp>
+        <p:nvSpPr>
+          <p:cNvPr id="9" name="Rounded Rectangle 8"/>
+          <p:cNvSpPr/>
+          <p:nvPr/>
+        </p:nvSpPr>
+        <p:spPr>
+          <a:xfrm>
+            <a:off x="713232" y="3520439"/>
+            <a:ext cx="320040" cy="320040"/>
+          </a:xfrm>
+          <a:prstGeom prst="roundRect">
+            <a:avLst/>
+          </a:prstGeom>
+          <a:solidFill>
+            <a:srgbClr val="0F2347"/>
+          </a:solidFill>
+          <a:ln>
+            <a:noFill/>
+          </a:ln>
+          <a:effectLst/>
+        </p:spPr>
+        <p:style>
+          <a:lnRef idx="1">
+            <a:schemeClr val="accent1"/>
+          </a:lnRef>
+          <a:fillRef idx="3">
+            <a:schemeClr val="accent1"/>
+          </a:fillRef>
+          <a:effectRef idx="2">
+            <a:schemeClr val="accent1"/>
+          </a:effectRef>
+          <a:fontRef idx="minor">
+            <a:schemeClr val="lt1"/>
+          </a:fontRef>
+        </p:style>
+        <p:txBody>
+          <a:bodyPr rtlCol="0" anchor="ctr"/>
+          <a:lstStyle/>
+          <a:p>
+            <a:pPr algn="ctr"/>
+          </a:p>
+        </p:txBody>
+      </p:sp>
+      <p:sp>
+        <p:nvSpPr>
+          <p:cNvPr id="10" name="TextBox 9"/>
+          <p:cNvSpPr txBox="1"/>
+          <p:nvPr/>
+        </p:nvSpPr>
+        <p:spPr>
+          <a:xfrm>
+            <a:off x="713232" y="3589019"/>
+            <a:ext cx="320040" cy="182880"/>
+          </a:xfrm>
+          <a:prstGeom prst="rect">
+            <a:avLst/>
+          </a:prstGeom>
+          <a:noFill/>
+        </p:spPr>
+        <p:txBody>
+          <a:bodyPr wrap="square" lIns="0" rIns="0" tIns="0" bIns="0" anchor="t">
+            <a:spAutoFit/>
+          </a:bodyPr>
+          <a:lstStyle/>
+          <a:p>
+            <a:pPr algn="ctr">
+              <a:lnSpc>
+                <a:spcPct val="115000"/>
+              </a:lnSpc>
+            </a:pPr>
+            <a:r>
+              <a:rPr sz="1500" b="1" i="0">
+                <a:solidFill>
+                  <a:srgbClr val="FFFFFF"/>
+                </a:solidFill>
+                <a:latin typeface="Arial"/>
+              </a:rPr>
+              <a:t>2</a:t>
+            </a:r>
+          </a:p>
+        </p:txBody>
+      </p:sp>
+      <p:sp>
+        <p:nvSpPr>
+          <p:cNvPr id="11" name="TextBox 10"/>
+          <p:cNvSpPr txBox="1"/>
+          <p:nvPr/>
+        </p:nvSpPr>
+        <p:spPr>
+          <a:xfrm>
+            <a:off x="1261872" y="3502151"/>
+            <a:ext cx="9692640" cy="320040"/>
+          </a:xfrm>
+          <a:prstGeom prst="rect">
+            <a:avLst/>
+          </a:prstGeom>
+          <a:noFill/>
+        </p:spPr>
+        <p:txBody>
+          <a:bodyPr wrap="square" lIns="0" rIns="0" tIns="0" bIns="0" anchor="t">
+            <a:spAutoFit/>
+          </a:bodyPr>
+          <a:lstStyle/>
+          <a:p>
+            <a:pPr algn="l">
+              <a:lnSpc>
+                <a:spcPct val="115000"/>
+              </a:lnSpc>
+            </a:pPr>
+            <a:r>
+              <a:rPr sz="1800" b="1" i="0">
+                <a:solidFill>
+                  <a:srgbClr val="0F2347"/>
+                </a:solidFill>
+                <a:latin typeface="Georgia"/>
+              </a:rPr>
+              <a:t>YOUR CAREER STALL CHECK</a:t>
+            </a:r>
+          </a:p>
+        </p:txBody>
+      </p:sp>
+      <p:sp>
+        <p:nvSpPr>
           <p:cNvPr id="12" name="TextBox 11"/>
           <p:cNvSpPr txBox="1"/>
           <p:nvPr/>
         </p:nvSpPr>
         <p:spPr>
           <a:xfrm>
-            <a:off x="749808" y="5513831"/>
-            <a:ext cx="9875520" cy="457200"/>
+            <a:off x="1261872" y="3867911"/>
+            <a:ext cx="9692640" cy="411480"/>
           </a:xfrm>
           <a:prstGeom prst="rect">
             <a:avLst/>
@@ -11200,20 +11649,181 @@
               </a:lnSpc>
             </a:pPr>
             <a:r>
-              <a:rPr sz="1900" b="1" i="1">
+              <a:rPr sz="1350" b="0" i="0">
+                <a:solidFill>
+                  <a:srgbClr val="152B4C"/>
+                </a:solidFill>
+                <a:latin typeface="Arial"/>
+              </a:rPr>
+              <a:t>A Career Stall Check grounded in one example from your last 90 days.</a:t>
+            </a:r>
+          </a:p>
+        </p:txBody>
+      </p:sp>
+      <p:sp>
+        <p:nvSpPr>
+          <p:cNvPr id="13" name="Rounded Rectangle 12"/>
+          <p:cNvSpPr/>
+          <p:nvPr/>
+        </p:nvSpPr>
+        <p:spPr>
+          <a:xfrm>
+            <a:off x="713232" y="4709160"/>
+            <a:ext cx="320040" cy="320040"/>
+          </a:xfrm>
+          <a:prstGeom prst="roundRect">
+            <a:avLst/>
+          </a:prstGeom>
+          <a:solidFill>
+            <a:srgbClr val="0F2347"/>
+          </a:solidFill>
+          <a:ln>
+            <a:noFill/>
+          </a:ln>
+          <a:effectLst/>
+        </p:spPr>
+        <p:style>
+          <a:lnRef idx="1">
+            <a:schemeClr val="accent1"/>
+          </a:lnRef>
+          <a:fillRef idx="3">
+            <a:schemeClr val="accent1"/>
+          </a:fillRef>
+          <a:effectRef idx="2">
+            <a:schemeClr val="accent1"/>
+          </a:effectRef>
+          <a:fontRef idx="minor">
+            <a:schemeClr val="lt1"/>
+          </a:fontRef>
+        </p:style>
+        <p:txBody>
+          <a:bodyPr rtlCol="0" anchor="ctr"/>
+          <a:lstStyle/>
+          <a:p>
+            <a:pPr algn="ctr"/>
+          </a:p>
+        </p:txBody>
+      </p:sp>
+      <p:sp>
+        <p:nvSpPr>
+          <p:cNvPr id="14" name="TextBox 13"/>
+          <p:cNvSpPr txBox="1"/>
+          <p:nvPr/>
+        </p:nvSpPr>
+        <p:spPr>
+          <a:xfrm>
+            <a:off x="713232" y="4777740"/>
+            <a:ext cx="320040" cy="182880"/>
+          </a:xfrm>
+          <a:prstGeom prst="rect">
+            <a:avLst/>
+          </a:prstGeom>
+          <a:noFill/>
+        </p:spPr>
+        <p:txBody>
+          <a:bodyPr wrap="square" lIns="0" rIns="0" tIns="0" bIns="0" anchor="t">
+            <a:spAutoFit/>
+          </a:bodyPr>
+          <a:lstStyle/>
+          <a:p>
+            <a:pPr algn="ctr">
+              <a:lnSpc>
+                <a:spcPct val="115000"/>
+              </a:lnSpc>
+            </a:pPr>
+            <a:r>
+              <a:rPr sz="1500" b="1" i="0">
+                <a:solidFill>
+                  <a:srgbClr val="FFFFFF"/>
+                </a:solidFill>
+                <a:latin typeface="Arial"/>
+              </a:rPr>
+              <a:t>3</a:t>
+            </a:r>
+          </a:p>
+        </p:txBody>
+      </p:sp>
+      <p:sp>
+        <p:nvSpPr>
+          <p:cNvPr id="15" name="TextBox 14"/>
+          <p:cNvSpPr txBox="1"/>
+          <p:nvPr/>
+        </p:nvSpPr>
+        <p:spPr>
+          <a:xfrm>
+            <a:off x="1261872" y="4690872"/>
+            <a:ext cx="9692640" cy="320040"/>
+          </a:xfrm>
+          <a:prstGeom prst="rect">
+            <a:avLst/>
+          </a:prstGeom>
+          <a:noFill/>
+        </p:spPr>
+        <p:txBody>
+          <a:bodyPr wrap="square" lIns="0" rIns="0" tIns="0" bIns="0" anchor="t">
+            <a:spAutoFit/>
+          </a:bodyPr>
+          <a:lstStyle/>
+          <a:p>
+            <a:pPr algn="l">
+              <a:lnSpc>
+                <a:spcPct val="115000"/>
+              </a:lnSpc>
+            </a:pPr>
+            <a:r>
+              <a:rPr sz="1800" b="1" i="0">
                 <a:solidFill>
                   <a:srgbClr val="0F2347"/>
                 </a:solidFill>
                 <a:latin typeface="Georgia"/>
               </a:rPr>
-              <a:t>Performance matters. It is not the whole reading.</a:t>
-            </a:r>
-          </a:p>
-        </p:txBody>
-      </p:sp>
-      <p:sp>
-        <p:nvSpPr>
-          <p:cNvPr id="13" name="TextBox 12"/>
+              <a:t>THE NEXT QUESTION</a:t>
+            </a:r>
+          </a:p>
+        </p:txBody>
+      </p:sp>
+      <p:sp>
+        <p:nvSpPr>
+          <p:cNvPr id="16" name="TextBox 15"/>
+          <p:cNvSpPr txBox="1"/>
+          <p:nvPr/>
+        </p:nvSpPr>
+        <p:spPr>
+          <a:xfrm>
+            <a:off x="1261872" y="5056632"/>
+            <a:ext cx="9692640" cy="411480"/>
+          </a:xfrm>
+          <a:prstGeom prst="rect">
+            <a:avLst/>
+          </a:prstGeom>
+          <a:noFill/>
+        </p:spPr>
+        <p:txBody>
+          <a:bodyPr wrap="square" lIns="0" rIns="0" tIns="0" bIns="0" anchor="t">
+            <a:spAutoFit/>
+          </a:bodyPr>
+          <a:lstStyle/>
+          <a:p>
+            <a:pPr algn="l">
+              <a:lnSpc>
+                <a:spcPct val="115000"/>
+              </a:lnSpc>
+            </a:pPr>
+            <a:r>
+              <a:rPr sz="1350" b="0" i="0">
+                <a:solidFill>
+                  <a:srgbClr val="152B4C"/>
+                </a:solidFill>
+                <a:latin typeface="Arial"/>
+              </a:rPr>
+              <a:t>What deserves closer examination before you decide to stay, reshape the role, or leave.</a:t>
+            </a:r>
+          </a:p>
+        </p:txBody>
+      </p:sp>
+      <p:sp>
+        <p:nvSpPr>
+          <p:cNvPr id="17" name="TextBox 16"/>
           <p:cNvSpPr txBox="1"/>
           <p:nvPr/>
         </p:nvSpPr>
@@ -11252,7 +11862,7 @@
       </p:sp>
       <p:sp>
         <p:nvSpPr>
-          <p:cNvPr id="14" name="TextBox 13"/>
+          <p:cNvPr id="18" name="TextBox 17"/>
           <p:cNvSpPr txBox="1"/>
           <p:nvPr/>
         </p:nvSpPr>
@@ -11349,7 +11959,7 @@
                 </a:solidFill>
                 <a:latin typeface="Arial"/>
               </a:rPr>
-              <a:t>SIGN 1</a:t>
+              <a:t>THE CENTRAL INSIGHT</a:t>
             </a:r>
           </a:p>
         </p:txBody>
@@ -11362,23 +11972,23 @@
         </p:nvSpPr>
         <p:spPr>
           <a:xfrm>
-            <a:off x="658368" y="1051560"/>
-            <a:ext cx="10424160" cy="1188720"/>
-          </a:xfrm>
-          <a:prstGeom prst="rect">
-            <a:avLst/>
-          </a:prstGeom>
-          <a:noFill/>
-        </p:spPr>
-        <p:txBody>
-          <a:bodyPr wrap="square" lIns="0" rIns="0" tIns="0" bIns="0" anchor="t">
-            <a:spAutoFit/>
-          </a:bodyPr>
-          <a:lstStyle/>
-          <a:p>
-            <a:pPr algn="l">
-              <a:lnSpc>
-                <a:spcPct val="110000"/>
+            <a:off x="658368" y="1097280"/>
+            <a:ext cx="10424160" cy="1234440"/>
+          </a:xfrm>
+          <a:prstGeom prst="rect">
+            <a:avLst/>
+          </a:prstGeom>
+          <a:noFill/>
+        </p:spPr>
+        <p:txBody>
+          <a:bodyPr wrap="square" lIns="0" rIns="0" tIns="0" bIns="0" anchor="t">
+            <a:spAutoFit/>
+          </a:bodyPr>
+          <a:lstStyle/>
+          <a:p>
+            <a:pPr algn="l">
+              <a:lnSpc>
+                <a:spcPct val="112000"/>
               </a:lnSpc>
             </a:pPr>
             <a:r>
@@ -11388,23 +11998,7 @@
                 </a:solidFill>
                 <a:latin typeface="Georgia"/>
               </a:rPr>
-              <a:t>You Are Repeating,</a:t>
-            </a:r>
-          </a:p>
-          <a:p>
-            <a:pPr algn="l">
-              <a:lnSpc>
-                <a:spcPct val="110000"/>
-              </a:lnSpc>
-            </a:pPr>
-            <a:r>
-              <a:rPr sz="3200" b="1" i="0">
-                <a:solidFill>
-                  <a:srgbClr val="0F2347"/>
-                </a:solidFill>
-                <a:latin typeface="Georgia"/>
-              </a:rPr>
-              <a:t>Not Stretching</a:t>
+              <a:t>A Role Can Reward You Long After It Stops Building You</a:t>
             </a:r>
           </a:p>
         </p:txBody>
@@ -11417,7 +12011,7 @@
         </p:nvSpPr>
         <p:spPr>
           <a:xfrm>
-            <a:off x="676656" y="2240280"/>
+            <a:off x="676656" y="2331720"/>
             <a:ext cx="3840480" cy="22860"/>
           </a:xfrm>
           <a:prstGeom prst="rect">
@@ -11455,20 +12049,254 @@
       </p:sp>
       <p:sp>
         <p:nvSpPr>
-          <p:cNvPr id="5" name="Rectangle 4"/>
+          <p:cNvPr id="5" name="TextBox 4"/>
+          <p:cNvSpPr txBox="1"/>
+          <p:nvPr/>
+        </p:nvSpPr>
+        <p:spPr>
+          <a:xfrm>
+            <a:off x="749808" y="2651760"/>
+            <a:ext cx="9875520" cy="365760"/>
+          </a:xfrm>
+          <a:prstGeom prst="rect">
+            <a:avLst/>
+          </a:prstGeom>
+          <a:noFill/>
+        </p:spPr>
+        <p:txBody>
+          <a:bodyPr wrap="square" lIns="0" rIns="0" tIns="0" bIns="0" anchor="t">
+            <a:spAutoFit/>
+          </a:bodyPr>
+          <a:lstStyle/>
+          <a:p>
+            <a:pPr algn="l">
+              <a:lnSpc>
+                <a:spcPct val="115000"/>
+              </a:lnSpc>
+            </a:pPr>
+            <a:r>
+              <a:rPr sz="1800" b="0" i="0">
+                <a:solidFill>
+                  <a:srgbClr val="152B4C"/>
+                </a:solidFill>
+                <a:latin typeface="Arial"/>
+              </a:rPr>
+              <a:t>Strong performance may tell you that you are delivering value.</a:t>
+            </a:r>
+          </a:p>
+        </p:txBody>
+      </p:sp>
+      <p:sp>
+        <p:nvSpPr>
+          <p:cNvPr id="6" name="TextBox 5"/>
+          <p:cNvSpPr txBox="1"/>
+          <p:nvPr/>
+        </p:nvSpPr>
+        <p:spPr>
+          <a:xfrm>
+            <a:off x="749808" y="3154680"/>
+            <a:ext cx="9875520" cy="365760"/>
+          </a:xfrm>
+          <a:prstGeom prst="rect">
+            <a:avLst/>
+          </a:prstGeom>
+          <a:noFill/>
+        </p:spPr>
+        <p:txBody>
+          <a:bodyPr wrap="square" lIns="0" rIns="0" tIns="0" bIns="0" anchor="t">
+            <a:spAutoFit/>
+          </a:bodyPr>
+          <a:lstStyle/>
+          <a:p>
+            <a:pPr algn="l">
+              <a:lnSpc>
+                <a:spcPct val="115000"/>
+              </a:lnSpc>
+            </a:pPr>
+            <a:r>
+              <a:rPr sz="1800" b="0" i="0">
+                <a:solidFill>
+                  <a:srgbClr val="152B4C"/>
+                </a:solidFill>
+                <a:latin typeface="Arial"/>
+              </a:rPr>
+              <a:t>It does not, by itself, tell you whether the work is still:</a:t>
+            </a:r>
+          </a:p>
+        </p:txBody>
+      </p:sp>
+      <p:sp>
+        <p:nvSpPr>
+          <p:cNvPr id="7" name="TextBox 6"/>
+          <p:cNvSpPr txBox="1"/>
+          <p:nvPr/>
+        </p:nvSpPr>
+        <p:spPr>
+          <a:xfrm>
+            <a:off x="1051560" y="3657600"/>
+            <a:ext cx="8686800" cy="310896"/>
+          </a:xfrm>
+          <a:prstGeom prst="rect">
+            <a:avLst/>
+          </a:prstGeom>
+          <a:noFill/>
+        </p:spPr>
+        <p:txBody>
+          <a:bodyPr wrap="square" lIns="0" rIns="0" tIns="0" bIns="0" anchor="t">
+            <a:spAutoFit/>
+          </a:bodyPr>
+          <a:lstStyle/>
+          <a:p>
+            <a:pPr algn="l">
+              <a:lnSpc>
+                <a:spcPct val="115000"/>
+              </a:lnSpc>
+            </a:pPr>
+            <a:r>
+              <a:rPr sz="1600" b="1" i="0">
+                <a:solidFill>
+                  <a:srgbClr val="0F2347"/>
+                </a:solidFill>
+                <a:latin typeface="Arial"/>
+              </a:rPr>
+              <a:t>Expanding your judgment</a:t>
+            </a:r>
+          </a:p>
+        </p:txBody>
+      </p:sp>
+      <p:sp>
+        <p:nvSpPr>
+          <p:cNvPr id="8" name="TextBox 7"/>
+          <p:cNvSpPr txBox="1"/>
+          <p:nvPr/>
+        </p:nvSpPr>
+        <p:spPr>
+          <a:xfrm>
+            <a:off x="1051560" y="4041648"/>
+            <a:ext cx="8686800" cy="310896"/>
+          </a:xfrm>
+          <a:prstGeom prst="rect">
+            <a:avLst/>
+          </a:prstGeom>
+          <a:noFill/>
+        </p:spPr>
+        <p:txBody>
+          <a:bodyPr wrap="square" lIns="0" rIns="0" tIns="0" bIns="0" anchor="t">
+            <a:spAutoFit/>
+          </a:bodyPr>
+          <a:lstStyle/>
+          <a:p>
+            <a:pPr algn="l">
+              <a:lnSpc>
+                <a:spcPct val="115000"/>
+              </a:lnSpc>
+            </a:pPr>
+            <a:r>
+              <a:rPr sz="1600" b="1" i="0">
+                <a:solidFill>
+                  <a:srgbClr val="0F2347"/>
+                </a:solidFill>
+                <a:latin typeface="Arial"/>
+              </a:rPr>
+              <a:t>Exposing you to unfamiliar problems</a:t>
+            </a:r>
+          </a:p>
+        </p:txBody>
+      </p:sp>
+      <p:sp>
+        <p:nvSpPr>
+          <p:cNvPr id="9" name="TextBox 8"/>
+          <p:cNvSpPr txBox="1"/>
+          <p:nvPr/>
+        </p:nvSpPr>
+        <p:spPr>
+          <a:xfrm>
+            <a:off x="1051560" y="4425696"/>
+            <a:ext cx="8686800" cy="310896"/>
+          </a:xfrm>
+          <a:prstGeom prst="rect">
+            <a:avLst/>
+          </a:prstGeom>
+          <a:noFill/>
+        </p:spPr>
+        <p:txBody>
+          <a:bodyPr wrap="square" lIns="0" rIns="0" tIns="0" bIns="0" anchor="t">
+            <a:spAutoFit/>
+          </a:bodyPr>
+          <a:lstStyle/>
+          <a:p>
+            <a:pPr algn="l">
+              <a:lnSpc>
+                <a:spcPct val="115000"/>
+              </a:lnSpc>
+            </a:pPr>
+            <a:r>
+              <a:rPr sz="1600" b="1" i="0">
+                <a:solidFill>
+                  <a:srgbClr val="0F2347"/>
+                </a:solidFill>
+                <a:latin typeface="Arial"/>
+              </a:rPr>
+              <a:t>Building capability that travels</a:t>
+            </a:r>
+          </a:p>
+        </p:txBody>
+      </p:sp>
+      <p:sp>
+        <p:nvSpPr>
+          <p:cNvPr id="10" name="TextBox 9"/>
+          <p:cNvSpPr txBox="1"/>
+          <p:nvPr/>
+        </p:nvSpPr>
+        <p:spPr>
+          <a:xfrm>
+            <a:off x="1051560" y="4809744"/>
+            <a:ext cx="8686800" cy="310896"/>
+          </a:xfrm>
+          <a:prstGeom prst="rect">
+            <a:avLst/>
+          </a:prstGeom>
+          <a:noFill/>
+        </p:spPr>
+        <p:txBody>
+          <a:bodyPr wrap="square" lIns="0" rIns="0" tIns="0" bIns="0" anchor="t">
+            <a:spAutoFit/>
+          </a:bodyPr>
+          <a:lstStyle/>
+          <a:p>
+            <a:pPr algn="l">
+              <a:lnSpc>
+                <a:spcPct val="115000"/>
+              </a:lnSpc>
+            </a:pPr>
+            <a:r>
+              <a:rPr sz="1600" b="1" i="0">
+                <a:solidFill>
+                  <a:srgbClr val="0F2347"/>
+                </a:solidFill>
+                <a:latin typeface="Arial"/>
+              </a:rPr>
+              <a:t>Increasing your future options</a:t>
+            </a:r>
+          </a:p>
+        </p:txBody>
+      </p:sp>
+      <p:sp>
+        <p:nvSpPr>
+          <p:cNvPr id="11" name="Rectangle 10"/>
           <p:cNvSpPr/>
           <p:nvPr/>
         </p:nvSpPr>
         <p:spPr>
           <a:xfrm>
-            <a:off x="749808" y="2606040"/>
-            <a:ext cx="5394960" cy="1828800"/>
+            <a:off x="676656" y="5330952"/>
+            <a:ext cx="3840480" cy="22860"/>
           </a:xfrm>
           <a:prstGeom prst="rect">
             <a:avLst/>
           </a:prstGeom>
           <a:solidFill>
-            <a:srgbClr val="FBF7EF"/>
+            <a:srgbClr val="C9A84C"/>
           </a:solidFill>
           <a:ln>
             <a:noFill/>
@@ -11499,246 +12327,46 @@
       </p:sp>
       <p:sp>
         <p:nvSpPr>
-          <p:cNvPr id="6" name="TextBox 5"/>
-          <p:cNvSpPr txBox="1"/>
-          <p:nvPr/>
-        </p:nvSpPr>
-        <p:spPr>
-          <a:xfrm>
-            <a:off x="950976" y="2862072"/>
-            <a:ext cx="5029200" cy="1463040"/>
-          </a:xfrm>
-          <a:prstGeom prst="rect">
-            <a:avLst/>
-          </a:prstGeom>
-          <a:noFill/>
-        </p:spPr>
-        <p:txBody>
-          <a:bodyPr wrap="square" lIns="0" rIns="0" tIns="0" bIns="0" anchor="t">
-            <a:spAutoFit/>
-          </a:bodyPr>
-          <a:lstStyle/>
-          <a:p>
-            <a:pPr algn="l">
-              <a:lnSpc>
-                <a:spcPct val="130000"/>
-              </a:lnSpc>
-            </a:pPr>
-            <a:r>
-              <a:rPr sz="1800" b="1" i="0">
+          <p:cNvPr id="12" name="TextBox 11"/>
+          <p:cNvSpPr txBox="1"/>
+          <p:nvPr/>
+        </p:nvSpPr>
+        <p:spPr>
+          <a:xfrm>
+            <a:off x="749808" y="5513831"/>
+            <a:ext cx="9875520" cy="457200"/>
+          </a:xfrm>
+          <a:prstGeom prst="rect">
+            <a:avLst/>
+          </a:prstGeom>
+          <a:noFill/>
+        </p:spPr>
+        <p:txBody>
+          <a:bodyPr wrap="square" lIns="0" rIns="0" tIns="0" bIns="0" anchor="t">
+            <a:spAutoFit/>
+          </a:bodyPr>
+          <a:lstStyle/>
+          <a:p>
+            <a:pPr algn="l">
+              <a:lnSpc>
+                <a:spcPct val="115000"/>
+              </a:lnSpc>
+            </a:pPr>
+            <a:r>
+              <a:rPr sz="1900" b="1" i="1">
                 <a:solidFill>
                   <a:srgbClr val="0F2347"/>
                 </a:solidFill>
                 <a:latin typeface="Georgia"/>
               </a:rPr>
-              <a:t>You may be performing at a high level, but the work is no longer asking you to solve meaningfully unfamiliar problems.</a:t>
-            </a:r>
-          </a:p>
-        </p:txBody>
-      </p:sp>
-      <p:sp>
-        <p:nvSpPr>
-          <p:cNvPr id="7" name="TextBox 6"/>
-          <p:cNvSpPr txBox="1"/>
-          <p:nvPr/>
-        </p:nvSpPr>
-        <p:spPr>
-          <a:xfrm>
-            <a:off x="6446520" y="2606040"/>
-            <a:ext cx="4663440" cy="256032"/>
-          </a:xfrm>
-          <a:prstGeom prst="rect">
-            <a:avLst/>
-          </a:prstGeom>
-          <a:noFill/>
-        </p:spPr>
-        <p:txBody>
-          <a:bodyPr wrap="square" lIns="0" rIns="0" tIns="0" bIns="0" anchor="t">
-            <a:spAutoFit/>
-          </a:bodyPr>
-          <a:lstStyle/>
-          <a:p>
-            <a:pPr algn="l">
-              <a:lnSpc>
-                <a:spcPct val="115000"/>
-              </a:lnSpc>
-            </a:pPr>
-            <a:r>
-              <a:rPr sz="1000" b="1" i="0" spc="200">
-                <a:solidFill>
-                  <a:srgbClr val="C9A84C"/>
-                </a:solidFill>
-                <a:latin typeface="Arial"/>
-              </a:rPr>
-              <a:t>THE TEST</a:t>
-            </a:r>
-          </a:p>
-        </p:txBody>
-      </p:sp>
-      <p:sp>
-        <p:nvSpPr>
-          <p:cNvPr id="8" name="TextBox 7"/>
-          <p:cNvSpPr txBox="1"/>
-          <p:nvPr/>
-        </p:nvSpPr>
-        <p:spPr>
-          <a:xfrm>
-            <a:off x="6446520" y="2926080"/>
-            <a:ext cx="4663440" cy="1463040"/>
-          </a:xfrm>
-          <a:prstGeom prst="rect">
-            <a:avLst/>
-          </a:prstGeom>
-          <a:noFill/>
-        </p:spPr>
-        <p:txBody>
-          <a:bodyPr wrap="square" lIns="0" rIns="0" tIns="0" bIns="0" anchor="t">
-            <a:spAutoFit/>
-          </a:bodyPr>
-          <a:lstStyle/>
-          <a:p>
-            <a:pPr algn="l">
-              <a:lnSpc>
-                <a:spcPct val="130000"/>
-              </a:lnSpc>
-            </a:pPr>
-            <a:r>
-              <a:rPr sz="1700" b="0" i="1">
-                <a:solidFill>
-                  <a:srgbClr val="0F2347"/>
-                </a:solidFill>
-                <a:latin typeface="Georgia"/>
-              </a:rPr>
-              <a:t>What problem have you solved in the last 90 days that you genuinely did not already know how to solve?</a:t>
-            </a:r>
-          </a:p>
-        </p:txBody>
-      </p:sp>
-      <p:sp>
-        <p:nvSpPr>
-          <p:cNvPr id="9" name="Rectangle 8"/>
-          <p:cNvSpPr/>
-          <p:nvPr/>
-        </p:nvSpPr>
-        <p:spPr>
-          <a:xfrm>
-            <a:off x="749808" y="4709160"/>
-            <a:ext cx="10332720" cy="777240"/>
-          </a:xfrm>
-          <a:prstGeom prst="rect">
-            <a:avLst/>
-          </a:prstGeom>
-          <a:solidFill>
-            <a:srgbClr val="0F2347"/>
-          </a:solidFill>
-          <a:ln>
-            <a:noFill/>
-          </a:ln>
-          <a:effectLst/>
-        </p:spPr>
-        <p:style>
-          <a:lnRef idx="1">
-            <a:schemeClr val="accent1"/>
-          </a:lnRef>
-          <a:fillRef idx="3">
-            <a:schemeClr val="accent1"/>
-          </a:fillRef>
-          <a:effectRef idx="2">
-            <a:schemeClr val="accent1"/>
-          </a:effectRef>
-          <a:fontRef idx="minor">
-            <a:schemeClr val="lt1"/>
-          </a:fontRef>
-        </p:style>
-        <p:txBody>
-          <a:bodyPr rtlCol="0" anchor="ctr"/>
-          <a:lstStyle/>
-          <a:p>
-            <a:pPr algn="ctr"/>
-          </a:p>
-        </p:txBody>
-      </p:sp>
-      <p:sp>
-        <p:nvSpPr>
-          <p:cNvPr id="10" name="TextBox 9"/>
-          <p:cNvSpPr txBox="1"/>
-          <p:nvPr/>
-        </p:nvSpPr>
-        <p:spPr>
-          <a:xfrm>
-            <a:off x="1005840" y="4864608"/>
-            <a:ext cx="1828800" cy="256032"/>
-          </a:xfrm>
-          <a:prstGeom prst="rect">
-            <a:avLst/>
-          </a:prstGeom>
-          <a:noFill/>
-        </p:spPr>
-        <p:txBody>
-          <a:bodyPr wrap="square" lIns="0" rIns="0" tIns="0" bIns="0" anchor="t">
-            <a:spAutoFit/>
-          </a:bodyPr>
-          <a:lstStyle/>
-          <a:p>
-            <a:pPr algn="l">
-              <a:lnSpc>
-                <a:spcPct val="115000"/>
-              </a:lnSpc>
-            </a:pPr>
-            <a:r>
-              <a:rPr sz="1000" b="1" i="0" spc="200">
-                <a:solidFill>
-                  <a:srgbClr val="C9A84C"/>
-                </a:solidFill>
-                <a:latin typeface="Arial"/>
-              </a:rPr>
-              <a:t>QUICK CHECK</a:t>
-            </a:r>
-          </a:p>
-        </p:txBody>
-      </p:sp>
-      <p:sp>
-        <p:nvSpPr>
-          <p:cNvPr id="11" name="TextBox 10"/>
-          <p:cNvSpPr txBox="1"/>
-          <p:nvPr/>
-        </p:nvSpPr>
-        <p:spPr>
-          <a:xfrm>
-            <a:off x="1005840" y="5102352"/>
-            <a:ext cx="9875520" cy="365760"/>
-          </a:xfrm>
-          <a:prstGeom prst="rect">
-            <a:avLst/>
-          </a:prstGeom>
-          <a:noFill/>
-        </p:spPr>
-        <p:txBody>
-          <a:bodyPr wrap="square" lIns="0" rIns="0" tIns="0" bIns="0" anchor="t">
-            <a:spAutoFit/>
-          </a:bodyPr>
-          <a:lstStyle/>
-          <a:p>
-            <a:pPr algn="l">
-              <a:lnSpc>
-                <a:spcPct val="115000"/>
-              </a:lnSpc>
-            </a:pPr>
-            <a:r>
-              <a:rPr sz="1400" b="0" i="1">
-                <a:solidFill>
-                  <a:srgbClr val="F5F0E8"/>
-                </a:solidFill>
-                <a:latin typeface="Arial"/>
-              </a:rPr>
-              <a:t>In one word, is your recent work stretching, repeating, or unclear?</a:t>
-            </a:r>
-          </a:p>
-        </p:txBody>
-      </p:sp>
-      <p:sp>
-        <p:nvSpPr>
-          <p:cNvPr id="12" name="TextBox 11"/>
+              <a:t>Performance matters. It is not the whole reading.</a:t>
+            </a:r>
+          </a:p>
+        </p:txBody>
+      </p:sp>
+      <p:sp>
+        <p:nvSpPr>
+          <p:cNvPr id="13" name="TextBox 12"/>
           <p:cNvSpPr txBox="1"/>
           <p:nvPr/>
         </p:nvSpPr>
@@ -11777,7 +12405,7 @@
       </p:sp>
       <p:sp>
         <p:nvSpPr>
-          <p:cNvPr id="13" name="TextBox 12"/>
+          <p:cNvPr id="14" name="TextBox 13"/>
           <p:cNvSpPr txBox="1"/>
           <p:nvPr/>
         </p:nvSpPr>
@@ -11874,7 +12502,7 @@
                 </a:solidFill>
                 <a:latin typeface="Arial"/>
               </a:rPr>
-              <a:t>SIGN 2</a:t>
+              <a:t>SIGN 1</a:t>
             </a:r>
           </a:p>
         </p:txBody>
@@ -11913,7 +12541,7 @@
                 </a:solidFill>
                 <a:latin typeface="Georgia"/>
               </a:rPr>
-              <a:t>You Are Indispensable,</a:t>
+              <a:t>You Are Repeating,</a:t>
             </a:r>
           </a:p>
           <a:p>
@@ -11929,7 +12557,7 @@
                 </a:solidFill>
                 <a:latin typeface="Georgia"/>
               </a:rPr>
-              <a:t>but Mainly Here</a:t>
+              <a:t>Not Stretching</a:t>
             </a:r>
           </a:p>
         </p:txBody>
@@ -12056,7 +12684,7 @@
                 </a:solidFill>
                 <a:latin typeface="Georgia"/>
               </a:rPr>
-              <a:t>The organization relies on you, but your value may be increasingly tied to its systems, internal language, relationships, processes, or history.</a:t>
+              <a:t>You may be performing at a high level, but the work is no longer asking you to solve meaningfully unfamiliar problems.</a:t>
             </a:r>
           </a:p>
         </p:txBody>
@@ -12134,7 +12762,7 @@
                 </a:solidFill>
                 <a:latin typeface="Georgia"/>
               </a:rPr>
-              <a:t>Could someone outside your company explain your value without using your title or internal company language?</a:t>
+              <a:t>What problem have you solved in the last 90 days that you genuinely did not already know how to solve?</a:t>
             </a:r>
           </a:p>
         </p:txBody>
@@ -12256,7 +12884,7 @@
                 </a:solidFill>
                 <a:latin typeface="Arial"/>
               </a:rPr>
-              <a:t>Which has grown fastest: internal dependence, external visibility, or both?</a:t>
+              <a:t>In one word, is your recent work stretching, repeating, or unclear?</a:t>
             </a:r>
           </a:p>
         </p:txBody>
@@ -12399,7 +13027,7 @@
                 </a:solidFill>
                 <a:latin typeface="Arial"/>
               </a:rPr>
-              <a:t>SIGN 3</a:t>
+              <a:t>SIGN 2</a:t>
             </a:r>
           </a:p>
         </p:txBody>
@@ -12438,7 +13066,7 @@
                 </a:solidFill>
                 <a:latin typeface="Georgia"/>
               </a:rPr>
-              <a:t>Your Responsibility Is Growing</a:t>
+              <a:t>You Are Indispensable,</a:t>
             </a:r>
           </a:p>
           <a:p>
@@ -12454,7 +13082,7 @@
                 </a:solidFill>
                 <a:latin typeface="Georgia"/>
               </a:rPr>
-              <a:t>Faster Than Your Capability</a:t>
+              <a:t>but Mainly Here</a:t>
             </a:r>
           </a:p>
         </p:txBody>
@@ -12581,7 +13209,7 @@
                 </a:solidFill>
                 <a:latin typeface="Georgia"/>
               </a:rPr>
-              <a:t>Your title, scope, and expectations may be increasing while the range of judgment, unfamiliar problems, or transferable capability being formed in you is narrowing.</a:t>
+              <a:t>The organization relies on you, but your value may be increasingly tied to its systems, internal language, relationships, processes, or history.</a:t>
             </a:r>
           </a:p>
         </p:txBody>
@@ -12659,7 +13287,7 @@
                 </a:solidFill>
                 <a:latin typeface="Georgia"/>
               </a:rPr>
-              <a:t>What capability do you have now that you did not have before your responsibilities increased?</a:t>
+              <a:t>Could someone outside your company explain your value without using your title or internal company language?</a:t>
             </a:r>
           </a:p>
         </p:txBody>
@@ -12781,7 +13409,7 @@
                 </a:solidFill>
                 <a:latin typeface="Arial"/>
               </a:rPr>
-              <a:t>Which has grown faster: responsibility, learning, or visibility?</a:t>
+              <a:t>Which has grown fastest: internal dependence, external visibility, or both?</a:t>
             </a:r>
           </a:p>
         </p:txBody>
@@ -12924,7 +13552,7 @@
                 </a:solidFill>
                 <a:latin typeface="Arial"/>
               </a:rPr>
-              <a:t>CAREER STALL CHECK</a:t>
+              <a:t>SIGN 3</a:t>
             </a:r>
           </a:p>
         </p:txBody>
@@ -12937,23 +13565,23 @@
         </p:nvSpPr>
         <p:spPr>
           <a:xfrm>
-            <a:off x="658368" y="1097280"/>
-            <a:ext cx="10058400" cy="685800"/>
-          </a:xfrm>
-          <a:prstGeom prst="rect">
-            <a:avLst/>
-          </a:prstGeom>
-          <a:noFill/>
-        </p:spPr>
-        <p:txBody>
-          <a:bodyPr wrap="square" lIns="0" rIns="0" tIns="0" bIns="0" anchor="t">
-            <a:spAutoFit/>
-          </a:bodyPr>
-          <a:lstStyle/>
-          <a:p>
-            <a:pPr algn="l">
-              <a:lnSpc>
-                <a:spcPct val="115000"/>
+            <a:off x="658368" y="1051560"/>
+            <a:ext cx="10424160" cy="1188720"/>
+          </a:xfrm>
+          <a:prstGeom prst="rect">
+            <a:avLst/>
+          </a:prstGeom>
+          <a:noFill/>
+        </p:spPr>
+        <p:txBody>
+          <a:bodyPr wrap="square" lIns="0" rIns="0" tIns="0" bIns="0" anchor="t">
+            <a:spAutoFit/>
+          </a:bodyPr>
+          <a:lstStyle/>
+          <a:p>
+            <a:pPr algn="l">
+              <a:lnSpc>
+                <a:spcPct val="110000"/>
               </a:lnSpc>
             </a:pPr>
             <a:r>
@@ -12963,66 +13591,43 @@
                 </a:solidFill>
                 <a:latin typeface="Georgia"/>
               </a:rPr>
-              <a:t>Five quiet minutes.</a:t>
-            </a:r>
-          </a:p>
-        </p:txBody>
-      </p:sp>
-      <p:sp>
-        <p:nvSpPr>
-          <p:cNvPr id="4" name="TextBox 3"/>
-          <p:cNvSpPr txBox="1"/>
-          <p:nvPr/>
-        </p:nvSpPr>
-        <p:spPr>
-          <a:xfrm>
-            <a:off x="676656" y="1828800"/>
-            <a:ext cx="9692640" cy="411480"/>
-          </a:xfrm>
-          <a:prstGeom prst="rect">
-            <a:avLst/>
-          </a:prstGeom>
-          <a:noFill/>
-        </p:spPr>
-        <p:txBody>
-          <a:bodyPr wrap="square" lIns="0" rIns="0" tIns="0" bIns="0" anchor="t">
-            <a:spAutoFit/>
-          </a:bodyPr>
-          <a:lstStyle/>
-          <a:p>
-            <a:pPr algn="l">
-              <a:lnSpc>
-                <a:spcPct val="115000"/>
-              </a:lnSpc>
-            </a:pPr>
-            <a:r>
-              <a:rPr sz="1500" b="0" i="0">
-                <a:solidFill>
-                  <a:srgbClr val="152B4C"/>
-                </a:solidFill>
-                <a:latin typeface="Arial"/>
-              </a:rPr>
-              <a:t>Write privately in the Career Stall Check. This is not the full assessment.</a:t>
-            </a:r>
-          </a:p>
-        </p:txBody>
-      </p:sp>
-      <p:sp>
-        <p:nvSpPr>
-          <p:cNvPr id="5" name="Oval 4"/>
+              <a:t>Your Responsibility Is Growing</a:t>
+            </a:r>
+          </a:p>
+          <a:p>
+            <a:pPr algn="l">
+              <a:lnSpc>
+                <a:spcPct val="110000"/>
+              </a:lnSpc>
+            </a:pPr>
+            <a:r>
+              <a:rPr sz="3200" b="1" i="0">
+                <a:solidFill>
+                  <a:srgbClr val="0F2347"/>
+                </a:solidFill>
+                <a:latin typeface="Georgia"/>
+              </a:rPr>
+              <a:t>Faster Than Your Capability</a:t>
+            </a:r>
+          </a:p>
+        </p:txBody>
+      </p:sp>
+      <p:sp>
+        <p:nvSpPr>
+          <p:cNvPr id="4" name="Rectangle 3"/>
           <p:cNvSpPr/>
           <p:nvPr/>
         </p:nvSpPr>
         <p:spPr>
           <a:xfrm>
-            <a:off x="713232" y="2423160"/>
-            <a:ext cx="347472" cy="347472"/>
-          </a:xfrm>
-          <a:prstGeom prst="ellipse">
+            <a:off x="676656" y="2240280"/>
+            <a:ext cx="3840480" cy="22860"/>
+          </a:xfrm>
+          <a:prstGeom prst="rect">
             <a:avLst/>
           </a:prstGeom>
           <a:solidFill>
-            <a:srgbClr val="C1440E"/>
+            <a:srgbClr val="C9A84C"/>
           </a:solidFill>
           <a:ln>
             <a:noFill/>
@@ -13053,137 +13658,20 @@
       </p:sp>
       <p:sp>
         <p:nvSpPr>
-          <p:cNvPr id="6" name="TextBox 5"/>
-          <p:cNvSpPr txBox="1"/>
-          <p:nvPr/>
-        </p:nvSpPr>
-        <p:spPr>
-          <a:xfrm>
-            <a:off x="777240" y="2491740"/>
-            <a:ext cx="228600" cy="146304"/>
-          </a:xfrm>
-          <a:prstGeom prst="rect">
-            <a:avLst/>
-          </a:prstGeom>
-          <a:noFill/>
-        </p:spPr>
-        <p:txBody>
-          <a:bodyPr wrap="square" lIns="0" rIns="0" tIns="0" bIns="0" anchor="t">
-            <a:spAutoFit/>
-          </a:bodyPr>
-          <a:lstStyle/>
-          <a:p>
-            <a:pPr algn="ctr">
-              <a:lnSpc>
-                <a:spcPct val="115000"/>
-              </a:lnSpc>
-            </a:pPr>
-            <a:r>
-              <a:rPr sz="1100" b="1" i="0">
-                <a:solidFill>
-                  <a:srgbClr val="FFFFFF"/>
-                </a:solidFill>
-                <a:latin typeface="Arial"/>
-              </a:rPr>
-              <a:t>1</a:t>
-            </a:r>
-          </a:p>
-        </p:txBody>
-      </p:sp>
-      <p:sp>
-        <p:nvSpPr>
-          <p:cNvPr id="7" name="TextBox 6"/>
-          <p:cNvSpPr txBox="1"/>
-          <p:nvPr/>
-        </p:nvSpPr>
-        <p:spPr>
-          <a:xfrm>
-            <a:off x="1261872" y="2386584"/>
-            <a:ext cx="9601200" cy="310896"/>
-          </a:xfrm>
-          <a:prstGeom prst="rect">
-            <a:avLst/>
-          </a:prstGeom>
-          <a:noFill/>
-        </p:spPr>
-        <p:txBody>
-          <a:bodyPr wrap="square" lIns="0" rIns="0" tIns="0" bIns="0" anchor="t">
-            <a:spAutoFit/>
-          </a:bodyPr>
-          <a:lstStyle/>
-          <a:p>
-            <a:pPr algn="l">
-              <a:lnSpc>
-                <a:spcPct val="115000"/>
-              </a:lnSpc>
-            </a:pPr>
-            <a:r>
-              <a:rPr sz="1500" b="1" i="0">
-                <a:solidFill>
-                  <a:srgbClr val="0F2347"/>
-                </a:solidFill>
-                <a:latin typeface="Arial"/>
-              </a:rPr>
-              <a:t>Which sign is most present for me?</a:t>
-            </a:r>
-          </a:p>
-        </p:txBody>
-      </p:sp>
-      <p:sp>
-        <p:nvSpPr>
-          <p:cNvPr id="8" name="TextBox 7"/>
-          <p:cNvSpPr txBox="1"/>
-          <p:nvPr/>
-        </p:nvSpPr>
-        <p:spPr>
-          <a:xfrm>
-            <a:off x="1261872" y="2715768"/>
-            <a:ext cx="9966960" cy="365760"/>
-          </a:xfrm>
-          <a:prstGeom prst="rect">
-            <a:avLst/>
-          </a:prstGeom>
-          <a:noFill/>
-        </p:spPr>
-        <p:txBody>
-          <a:bodyPr wrap="square" lIns="0" rIns="0" tIns="0" bIns="0" anchor="t">
-            <a:spAutoFit/>
-          </a:bodyPr>
-          <a:lstStyle/>
-          <a:p>
-            <a:pPr algn="l">
-              <a:lnSpc>
-                <a:spcPct val="115000"/>
-              </a:lnSpc>
-            </a:pPr>
-            <a:r>
-              <a:rPr sz="1200" b="0" i="0">
-                <a:solidFill>
-                  <a:srgbClr val="152B4C"/>
-                </a:solidFill>
-                <a:latin typeface="Arial"/>
-              </a:rPr>
-              <a:t>Repeating instead of stretching, indispensable but mainly here, or responsibility growing faster than capability.</a:t>
-            </a:r>
-          </a:p>
-        </p:txBody>
-      </p:sp>
-      <p:sp>
-        <p:nvSpPr>
-          <p:cNvPr id="9" name="Oval 8"/>
+          <p:cNvPr id="5" name="Rectangle 4"/>
           <p:cNvSpPr/>
           <p:nvPr/>
         </p:nvSpPr>
         <p:spPr>
           <a:xfrm>
-            <a:off x="713232" y="3319272"/>
-            <a:ext cx="347472" cy="347472"/>
-          </a:xfrm>
-          <a:prstGeom prst="ellipse">
+            <a:off x="749808" y="2606040"/>
+            <a:ext cx="5394960" cy="1828800"/>
+          </a:xfrm>
+          <a:prstGeom prst="rect">
             <a:avLst/>
           </a:prstGeom>
           <a:solidFill>
-            <a:srgbClr val="C1440E"/>
+            <a:srgbClr val="FBF7EF"/>
           </a:solidFill>
           <a:ln>
             <a:noFill/>
@@ -13214,137 +13702,137 @@
       </p:sp>
       <p:sp>
         <p:nvSpPr>
-          <p:cNvPr id="10" name="TextBox 9"/>
-          <p:cNvSpPr txBox="1"/>
-          <p:nvPr/>
-        </p:nvSpPr>
-        <p:spPr>
-          <a:xfrm>
-            <a:off x="777240" y="3387852"/>
-            <a:ext cx="228600" cy="146304"/>
-          </a:xfrm>
-          <a:prstGeom prst="rect">
-            <a:avLst/>
-          </a:prstGeom>
-          <a:noFill/>
-        </p:spPr>
-        <p:txBody>
-          <a:bodyPr wrap="square" lIns="0" rIns="0" tIns="0" bIns="0" anchor="t">
-            <a:spAutoFit/>
-          </a:bodyPr>
-          <a:lstStyle/>
-          <a:p>
-            <a:pPr algn="ctr">
+          <p:cNvPr id="6" name="TextBox 5"/>
+          <p:cNvSpPr txBox="1"/>
+          <p:nvPr/>
+        </p:nvSpPr>
+        <p:spPr>
+          <a:xfrm>
+            <a:off x="950976" y="2862072"/>
+            <a:ext cx="5029200" cy="1463040"/>
+          </a:xfrm>
+          <a:prstGeom prst="rect">
+            <a:avLst/>
+          </a:prstGeom>
+          <a:noFill/>
+        </p:spPr>
+        <p:txBody>
+          <a:bodyPr wrap="square" lIns="0" rIns="0" tIns="0" bIns="0" anchor="t">
+            <a:spAutoFit/>
+          </a:bodyPr>
+          <a:lstStyle/>
+          <a:p>
+            <a:pPr algn="l">
+              <a:lnSpc>
+                <a:spcPct val="130000"/>
+              </a:lnSpc>
+            </a:pPr>
+            <a:r>
+              <a:rPr sz="1800" b="1" i="0">
+                <a:solidFill>
+                  <a:srgbClr val="0F2347"/>
+                </a:solidFill>
+                <a:latin typeface="Georgia"/>
+              </a:rPr>
+              <a:t>Your title, scope, and expectations may be increasing while the range of judgment, unfamiliar problems, or transferable capability being formed in you is narrowing.</a:t>
+            </a:r>
+          </a:p>
+        </p:txBody>
+      </p:sp>
+      <p:sp>
+        <p:nvSpPr>
+          <p:cNvPr id="7" name="TextBox 6"/>
+          <p:cNvSpPr txBox="1"/>
+          <p:nvPr/>
+        </p:nvSpPr>
+        <p:spPr>
+          <a:xfrm>
+            <a:off x="6446520" y="2606040"/>
+            <a:ext cx="4663440" cy="256032"/>
+          </a:xfrm>
+          <a:prstGeom prst="rect">
+            <a:avLst/>
+          </a:prstGeom>
+          <a:noFill/>
+        </p:spPr>
+        <p:txBody>
+          <a:bodyPr wrap="square" lIns="0" rIns="0" tIns="0" bIns="0" anchor="t">
+            <a:spAutoFit/>
+          </a:bodyPr>
+          <a:lstStyle/>
+          <a:p>
+            <a:pPr algn="l">
               <a:lnSpc>
                 <a:spcPct val="115000"/>
               </a:lnSpc>
             </a:pPr>
             <a:r>
-              <a:rPr sz="1100" b="1" i="0">
-                <a:solidFill>
-                  <a:srgbClr val="FFFFFF"/>
-                </a:solidFill>
-                <a:latin typeface="Arial"/>
-              </a:rPr>
-              <a:t>2</a:t>
-            </a:r>
-          </a:p>
-        </p:txBody>
-      </p:sp>
-      <p:sp>
-        <p:nvSpPr>
-          <p:cNvPr id="11" name="TextBox 10"/>
-          <p:cNvSpPr txBox="1"/>
-          <p:nvPr/>
-        </p:nvSpPr>
-        <p:spPr>
-          <a:xfrm>
-            <a:off x="1261872" y="3282696"/>
-            <a:ext cx="9601200" cy="310896"/>
-          </a:xfrm>
-          <a:prstGeom prst="rect">
-            <a:avLst/>
-          </a:prstGeom>
-          <a:noFill/>
-        </p:spPr>
-        <p:txBody>
-          <a:bodyPr wrap="square" lIns="0" rIns="0" tIns="0" bIns="0" anchor="t">
-            <a:spAutoFit/>
-          </a:bodyPr>
-          <a:lstStyle/>
-          <a:p>
-            <a:pPr algn="l">
-              <a:lnSpc>
-                <a:spcPct val="115000"/>
-              </a:lnSpc>
-            </a:pPr>
-            <a:r>
-              <a:rPr sz="1500" b="1" i="0">
+              <a:rPr sz="1000" b="1" i="0" spc="200">
+                <a:solidFill>
+                  <a:srgbClr val="C9A84C"/>
+                </a:solidFill>
+                <a:latin typeface="Arial"/>
+              </a:rPr>
+              <a:t>THE TEST</a:t>
+            </a:r>
+          </a:p>
+        </p:txBody>
+      </p:sp>
+      <p:sp>
+        <p:nvSpPr>
+          <p:cNvPr id="8" name="TextBox 7"/>
+          <p:cNvSpPr txBox="1"/>
+          <p:nvPr/>
+        </p:nvSpPr>
+        <p:spPr>
+          <a:xfrm>
+            <a:off x="6446520" y="2926080"/>
+            <a:ext cx="4663440" cy="1463040"/>
+          </a:xfrm>
+          <a:prstGeom prst="rect">
+            <a:avLst/>
+          </a:prstGeom>
+          <a:noFill/>
+        </p:spPr>
+        <p:txBody>
+          <a:bodyPr wrap="square" lIns="0" rIns="0" tIns="0" bIns="0" anchor="t">
+            <a:spAutoFit/>
+          </a:bodyPr>
+          <a:lstStyle/>
+          <a:p>
+            <a:pPr algn="l">
+              <a:lnSpc>
+                <a:spcPct val="130000"/>
+              </a:lnSpc>
+            </a:pPr>
+            <a:r>
+              <a:rPr sz="1700" b="0" i="1">
                 <a:solidFill>
                   <a:srgbClr val="0F2347"/>
                 </a:solidFill>
-                <a:latin typeface="Arial"/>
-              </a:rPr>
-              <a:t>What is one example from the last 90 days?</a:t>
-            </a:r>
-          </a:p>
-        </p:txBody>
-      </p:sp>
-      <p:sp>
-        <p:nvSpPr>
-          <p:cNvPr id="12" name="TextBox 11"/>
-          <p:cNvSpPr txBox="1"/>
-          <p:nvPr/>
-        </p:nvSpPr>
-        <p:spPr>
-          <a:xfrm>
-            <a:off x="1261872" y="3611879"/>
-            <a:ext cx="9966960" cy="365760"/>
-          </a:xfrm>
-          <a:prstGeom prst="rect">
-            <a:avLst/>
-          </a:prstGeom>
-          <a:noFill/>
-        </p:spPr>
-        <p:txBody>
-          <a:bodyPr wrap="square" lIns="0" rIns="0" tIns="0" bIns="0" anchor="t">
-            <a:spAutoFit/>
-          </a:bodyPr>
-          <a:lstStyle/>
-          <a:p>
-            <a:pPr algn="l">
-              <a:lnSpc>
-                <a:spcPct val="115000"/>
-              </a:lnSpc>
-            </a:pPr>
-            <a:r>
-              <a:rPr sz="1200" b="0" i="0">
-                <a:solidFill>
-                  <a:srgbClr val="152B4C"/>
-                </a:solidFill>
-                <a:latin typeface="Arial"/>
-              </a:rPr>
-              <a:t>Use a lived example, not a plan, promise, title, or feeling.</a:t>
-            </a:r>
-          </a:p>
-        </p:txBody>
-      </p:sp>
-      <p:sp>
-        <p:nvSpPr>
-          <p:cNvPr id="13" name="Oval 12"/>
+                <a:latin typeface="Georgia"/>
+              </a:rPr>
+              <a:t>What capability do you have now that you did not have before your responsibilities increased?</a:t>
+            </a:r>
+          </a:p>
+        </p:txBody>
+      </p:sp>
+      <p:sp>
+        <p:nvSpPr>
+          <p:cNvPr id="9" name="Rectangle 8"/>
           <p:cNvSpPr/>
           <p:nvPr/>
         </p:nvSpPr>
         <p:spPr>
           <a:xfrm>
-            <a:off x="713232" y="4215383"/>
-            <a:ext cx="347472" cy="347472"/>
-          </a:xfrm>
-          <a:prstGeom prst="ellipse">
+            <a:off x="749808" y="4709160"/>
+            <a:ext cx="10332720" cy="777240"/>
+          </a:xfrm>
+          <a:prstGeom prst="rect">
             <a:avLst/>
           </a:prstGeom>
           <a:solidFill>
-            <a:srgbClr val="C1440E"/>
+            <a:srgbClr val="0F2347"/>
           </a:solidFill>
           <a:ln>
             <a:noFill/>
@@ -13375,53 +13863,53 @@
       </p:sp>
       <p:sp>
         <p:nvSpPr>
-          <p:cNvPr id="14" name="TextBox 13"/>
-          <p:cNvSpPr txBox="1"/>
-          <p:nvPr/>
-        </p:nvSpPr>
-        <p:spPr>
-          <a:xfrm>
-            <a:off x="777240" y="4283963"/>
-            <a:ext cx="228600" cy="146304"/>
-          </a:xfrm>
-          <a:prstGeom prst="rect">
-            <a:avLst/>
-          </a:prstGeom>
-          <a:noFill/>
-        </p:spPr>
-        <p:txBody>
-          <a:bodyPr wrap="square" lIns="0" rIns="0" tIns="0" bIns="0" anchor="t">
-            <a:spAutoFit/>
-          </a:bodyPr>
-          <a:lstStyle/>
-          <a:p>
-            <a:pPr algn="ctr">
+          <p:cNvPr id="10" name="TextBox 9"/>
+          <p:cNvSpPr txBox="1"/>
+          <p:nvPr/>
+        </p:nvSpPr>
+        <p:spPr>
+          <a:xfrm>
+            <a:off x="1005840" y="4864608"/>
+            <a:ext cx="1828800" cy="256032"/>
+          </a:xfrm>
+          <a:prstGeom prst="rect">
+            <a:avLst/>
+          </a:prstGeom>
+          <a:noFill/>
+        </p:spPr>
+        <p:txBody>
+          <a:bodyPr wrap="square" lIns="0" rIns="0" tIns="0" bIns="0" anchor="t">
+            <a:spAutoFit/>
+          </a:bodyPr>
+          <a:lstStyle/>
+          <a:p>
+            <a:pPr algn="l">
               <a:lnSpc>
                 <a:spcPct val="115000"/>
               </a:lnSpc>
             </a:pPr>
             <a:r>
-              <a:rPr sz="1100" b="1" i="0">
-                <a:solidFill>
-                  <a:srgbClr val="FFFFFF"/>
-                </a:solidFill>
-                <a:latin typeface="Arial"/>
-              </a:rPr>
-              <a:t>3</a:t>
-            </a:r>
-          </a:p>
-        </p:txBody>
-      </p:sp>
-      <p:sp>
-        <p:nvSpPr>
-          <p:cNvPr id="15" name="TextBox 14"/>
-          <p:cNvSpPr txBox="1"/>
-          <p:nvPr/>
-        </p:nvSpPr>
-        <p:spPr>
-          <a:xfrm>
-            <a:off x="1261872" y="4178807"/>
-            <a:ext cx="9601200" cy="310896"/>
+              <a:rPr sz="1000" b="1" i="0" spc="200">
+                <a:solidFill>
+                  <a:srgbClr val="C9A84C"/>
+                </a:solidFill>
+                <a:latin typeface="Arial"/>
+              </a:rPr>
+              <a:t>QUICK CHECK</a:t>
+            </a:r>
+          </a:p>
+        </p:txBody>
+      </p:sp>
+      <p:sp>
+        <p:nvSpPr>
+          <p:cNvPr id="11" name="TextBox 10"/>
+          <p:cNvSpPr txBox="1"/>
+          <p:nvPr/>
+        </p:nvSpPr>
+        <p:spPr>
+          <a:xfrm>
+            <a:off x="1005840" y="5102352"/>
+            <a:ext cx="9875520" cy="365760"/>
           </a:xfrm>
           <a:prstGeom prst="rect">
             <a:avLst/>
@@ -13440,220 +13928,20 @@
               </a:lnSpc>
             </a:pPr>
             <a:r>
-              <a:rPr sz="1500" b="1" i="0">
-                <a:solidFill>
-                  <a:srgbClr val="0F2347"/>
-                </a:solidFill>
-                <a:latin typeface="Arial"/>
-              </a:rPr>
-              <a:t>What capability, learning, or future option may not be growing?</a:t>
-            </a:r>
-          </a:p>
-        </p:txBody>
-      </p:sp>
-      <p:sp>
-        <p:nvSpPr>
-          <p:cNvPr id="16" name="TextBox 15"/>
-          <p:cNvSpPr txBox="1"/>
-          <p:nvPr/>
-        </p:nvSpPr>
-        <p:spPr>
-          <a:xfrm>
-            <a:off x="1261872" y="4507992"/>
-            <a:ext cx="9966960" cy="365760"/>
-          </a:xfrm>
-          <a:prstGeom prst="rect">
-            <a:avLst/>
-          </a:prstGeom>
-          <a:noFill/>
-        </p:spPr>
-        <p:txBody>
-          <a:bodyPr wrap="square" lIns="0" rIns="0" tIns="0" bIns="0" anchor="t">
-            <a:spAutoFit/>
-          </a:bodyPr>
-          <a:lstStyle/>
-          <a:p>
-            <a:pPr algn="l">
-              <a:lnSpc>
-                <a:spcPct val="115000"/>
-              </a:lnSpc>
-            </a:pPr>
-            <a:r>
-              <a:rPr sz="1200" b="0" i="0">
-                <a:solidFill>
-                  <a:srgbClr val="152B4C"/>
-                </a:solidFill>
-                <a:latin typeface="Arial"/>
-              </a:rPr>
-              <a:t>Name the specific thing, not a general sense that something is off.</a:t>
-            </a:r>
-          </a:p>
-        </p:txBody>
-      </p:sp>
-      <p:sp>
-        <p:nvSpPr>
-          <p:cNvPr id="17" name="Oval 16"/>
-          <p:cNvSpPr/>
-          <p:nvPr/>
-        </p:nvSpPr>
-        <p:spPr>
-          <a:xfrm>
-            <a:off x="713232" y="5111496"/>
-            <a:ext cx="347472" cy="347472"/>
-          </a:xfrm>
-          <a:prstGeom prst="ellipse">
-            <a:avLst/>
-          </a:prstGeom>
-          <a:solidFill>
-            <a:srgbClr val="C1440E"/>
-          </a:solidFill>
-          <a:ln>
-            <a:noFill/>
-          </a:ln>
-          <a:effectLst/>
-        </p:spPr>
-        <p:style>
-          <a:lnRef idx="1">
-            <a:schemeClr val="accent1"/>
-          </a:lnRef>
-          <a:fillRef idx="3">
-            <a:schemeClr val="accent1"/>
-          </a:fillRef>
-          <a:effectRef idx="2">
-            <a:schemeClr val="accent1"/>
-          </a:effectRef>
-          <a:fontRef idx="minor">
-            <a:schemeClr val="lt1"/>
-          </a:fontRef>
-        </p:style>
-        <p:txBody>
-          <a:bodyPr rtlCol="0" anchor="ctr"/>
-          <a:lstStyle/>
-          <a:p>
-            <a:pPr algn="ctr"/>
-          </a:p>
-        </p:txBody>
-      </p:sp>
-      <p:sp>
-        <p:nvSpPr>
-          <p:cNvPr id="18" name="TextBox 17"/>
-          <p:cNvSpPr txBox="1"/>
-          <p:nvPr/>
-        </p:nvSpPr>
-        <p:spPr>
-          <a:xfrm>
-            <a:off x="777240" y="5180076"/>
-            <a:ext cx="228600" cy="146304"/>
-          </a:xfrm>
-          <a:prstGeom prst="rect">
-            <a:avLst/>
-          </a:prstGeom>
-          <a:noFill/>
-        </p:spPr>
-        <p:txBody>
-          <a:bodyPr wrap="square" lIns="0" rIns="0" tIns="0" bIns="0" anchor="t">
-            <a:spAutoFit/>
-          </a:bodyPr>
-          <a:lstStyle/>
-          <a:p>
-            <a:pPr algn="ctr">
-              <a:lnSpc>
-                <a:spcPct val="115000"/>
-              </a:lnSpc>
-            </a:pPr>
-            <a:r>
-              <a:rPr sz="1100" b="1" i="0">
-                <a:solidFill>
-                  <a:srgbClr val="FFFFFF"/>
-                </a:solidFill>
-                <a:latin typeface="Arial"/>
-              </a:rPr>
-              <a:t>4</a:t>
-            </a:r>
-          </a:p>
-        </p:txBody>
-      </p:sp>
-      <p:sp>
-        <p:nvSpPr>
-          <p:cNvPr id="19" name="TextBox 18"/>
-          <p:cNvSpPr txBox="1"/>
-          <p:nvPr/>
-        </p:nvSpPr>
-        <p:spPr>
-          <a:xfrm>
-            <a:off x="1261872" y="5074920"/>
-            <a:ext cx="9601200" cy="310896"/>
-          </a:xfrm>
-          <a:prstGeom prst="rect">
-            <a:avLst/>
-          </a:prstGeom>
-          <a:noFill/>
-        </p:spPr>
-        <p:txBody>
-          <a:bodyPr wrap="square" lIns="0" rIns="0" tIns="0" bIns="0" anchor="t">
-            <a:spAutoFit/>
-          </a:bodyPr>
-          <a:lstStyle/>
-          <a:p>
-            <a:pPr algn="l">
-              <a:lnSpc>
-                <a:spcPct val="115000"/>
-              </a:lnSpc>
-            </a:pPr>
-            <a:r>
-              <a:rPr sz="1500" b="1" i="0">
-                <a:solidFill>
-                  <a:srgbClr val="0F2347"/>
-                </a:solidFill>
-                <a:latin typeface="Arial"/>
-              </a:rPr>
-              <a:t>What is the next question I need to investigate?</a:t>
-            </a:r>
-          </a:p>
-        </p:txBody>
-      </p:sp>
-      <p:sp>
-        <p:nvSpPr>
-          <p:cNvPr id="20" name="TextBox 19"/>
-          <p:cNvSpPr txBox="1"/>
-          <p:nvPr/>
-        </p:nvSpPr>
-        <p:spPr>
-          <a:xfrm>
-            <a:off x="1261872" y="5404104"/>
-            <a:ext cx="9966960" cy="365760"/>
-          </a:xfrm>
-          <a:prstGeom prst="rect">
-            <a:avLst/>
-          </a:prstGeom>
-          <a:noFill/>
-        </p:spPr>
-        <p:txBody>
-          <a:bodyPr wrap="square" lIns="0" rIns="0" tIns="0" bIns="0" anchor="t">
-            <a:spAutoFit/>
-          </a:bodyPr>
-          <a:lstStyle/>
-          <a:p>
-            <a:pPr algn="l">
-              <a:lnSpc>
-                <a:spcPct val="115000"/>
-              </a:lnSpc>
-            </a:pPr>
-            <a:r>
-              <a:rPr sz="1200" b="0" i="0">
-                <a:solidFill>
-                  <a:srgbClr val="152B4C"/>
-                </a:solidFill>
-                <a:latin typeface="Arial"/>
-              </a:rPr>
-              <a:t>The question you would need to read more carefully before making a bigger career decision.</a:t>
-            </a:r>
-          </a:p>
-        </p:txBody>
-      </p:sp>
-      <p:sp>
-        <p:nvSpPr>
-          <p:cNvPr id="21" name="TextBox 20"/>
+              <a:rPr sz="1400" b="0" i="1">
+                <a:solidFill>
+                  <a:srgbClr val="F5F0E8"/>
+                </a:solidFill>
+                <a:latin typeface="Arial"/>
+              </a:rPr>
+              <a:t>Which has grown faster: responsibility, learning, or visibility?</a:t>
+            </a:r>
+          </a:p>
+        </p:txBody>
+      </p:sp>
+      <p:sp>
+        <p:nvSpPr>
+          <p:cNvPr id="12" name="TextBox 11"/>
           <p:cNvSpPr txBox="1"/>
           <p:nvPr/>
         </p:nvSpPr>
@@ -13692,7 +13980,7 @@
       </p:sp>
       <p:sp>
         <p:nvSpPr>
-          <p:cNvPr id="22" name="TextBox 21"/>
+          <p:cNvPr id="13" name="TextBox 12"/>
           <p:cNvSpPr txBox="1"/>
           <p:nvPr/>
         </p:nvSpPr>

--- a/lightning-lesson-v3/How_to_Tell_If_Your_Career_Is_Stalling_Lightning_Lesson_v3.2_FINAL.pptx
+++ b/lightning-lesson-v3/How_to_Tell_If_Your_Career_Is_Stalling_Lightning_Lesson_v3.2_FINAL.pptx
@@ -551,7 +551,7 @@
               <a:rPr sz="1100">
                 <a:latin typeface="Arial"/>
               </a:rPr>
-              <a:t>LIKELY MISUNDERSTANDING: Some may expect a scored assessment today. The boundary is stated plainly within the first five minutes — see slide 4.</a:t>
+              <a:t>LIKELY MISUNDERSTANDING: Some may expect a scored assessment today. The boundary is stated plainly within the first five minutes — see slide 3.</a:t>
             </a:r>
           </a:p>
           <a:p>
@@ -1446,7 +1446,7 @@
               <a:rPr sz="1100">
                 <a:latin typeface="Arial"/>
               </a:rPr>
-              <a:t>TRANSITION LINE: "Before we begin, I want to understand what brought you into the room." Then advance to the concise boundary slide, then the opening poll.</a:t>
+              <a:t>TRANSITION LINE: "Before we begin, one boundary about what today can and cannot do." Then advance to the concise boundary slide.</a:t>
             </a:r>
           </a:p>
           <a:p>
